--- a/docs/shamal-tech-deck.pptx
+++ b/docs/shamal-tech-deck.pptx
@@ -510,7 +510,7 @@
           <a:p>
             <a:r>
               <a:rPr lang="en-US" dirty="0"/>
-              <a:t>شريحة الغلاف: التطبيق منشور ويعمل على الرابط، نعرض اليوم التقنيات المستخدمة بلغة مبسطة.</a:t>
+              <a:t>عرض تقني بحت: كيف بُني التطبيق، وبأي أدوات، وما الذي يعمل فعلياً اليوم.</a:t>
             </a:r>
             <a:endParaRPr lang="en-US" dirty="0"/>
           </a:p>
@@ -598,7 +598,7 @@
           <a:p>
             <a:r>
               <a:rPr lang="en-US" dirty="0"/>
-              <a:t>نشرح التدفق كاملاً بمثال بدء مشروع.</a:t>
+              <a:t/>
             </a:r>
             <a:endParaRPr lang="en-US" dirty="0"/>
           </a:p>
@@ -1595,17 +1595,17 @@
         </p:nvSpPr>
         <p:spPr>
           <a:xfrm>
-            <a:off x="2651760" y="1005840"/>
-            <a:ext cx="6858000" cy="4846320"/>
+            <a:off x="2651760" y="1051560"/>
+            <a:ext cx="6858000" cy="4754880"/>
           </a:xfrm>
           <a:prstGeom prst="roundRect">
             <a:avLst>
-              <a:gd name="adj" fmla="val 5660"/>
+              <a:gd name="adj" fmla="val 5769"/>
             </a:avLst>
           </a:prstGeom>
           <a:solidFill>
             <a:srgbClr val="FFFFFF">
-              <a:alpha val="88000"/>
+              <a:alpha val="90000"/>
             </a:srgbClr>
           </a:solidFill>
           <a:ln w="12700">
@@ -1631,12 +1631,12 @@
         </p:nvSpPr>
         <p:spPr>
           <a:xfrm>
-            <a:off x="5486400" y="1325880"/>
-            <a:ext cx="1234440" cy="1234440"/>
+            <a:off x="5513832" y="1371600"/>
+            <a:ext cx="1188720" cy="1188720"/>
           </a:xfrm>
           <a:prstGeom prst="roundRect">
             <a:avLst>
-              <a:gd name="adj" fmla="val 11852"/>
+              <a:gd name="adj" fmla="val 12308"/>
             </a:avLst>
           </a:prstGeom>
           <a:solidFill>
@@ -1658,8 +1658,8 @@
         </p:nvSpPr>
         <p:spPr>
           <a:xfrm>
-            <a:off x="2651760" y="2651760"/>
-            <a:ext cx="6858000" cy="822960"/>
+            <a:off x="2651760" y="2697480"/>
+            <a:ext cx="6858000" cy="777240"/>
           </a:xfrm>
           <a:prstGeom prst="rect">
             <a:avLst/>
@@ -1675,7 +1675,7 @@
               <a:buNone/>
             </a:pPr>
             <a:r>
-              <a:rPr lang="ar-SA" altLang="en-US" sz="4400" b="1" dirty="0">
+              <a:rPr lang="ar-SA" altLang="en-US" sz="4000" b="1" dirty="0">
                 <a:solidFill>
                   <a:srgbClr val="17504E"/>
                 </a:solidFill>
@@ -1683,9 +1683,9 @@
                 <a:ea typeface="Arial" pitchFamily="34" charset="-122"/>
                 <a:cs typeface="Arial" pitchFamily="34" charset="-120"/>
               </a:rPr>
-              <a:t>شمال AI</a:t>
-            </a:r>
-            <a:endParaRPr lang="ar-SA" sz="4400" dirty="0"/>
+              <a:t>التقنية خلف شمال AI</a:t>
+            </a:r>
+            <a:endParaRPr lang="ar-SA" sz="4000" dirty="0"/>
           </a:p>
         </p:txBody>
       </p:sp>
@@ -1697,7 +1697,46 @@
         </p:nvSpPr>
         <p:spPr>
           <a:xfrm>
-            <a:off x="2651760" y="3429000"/>
+            <a:off x="2651760" y="3474720"/>
+            <a:ext cx="6858000" cy="411480"/>
+          </a:xfrm>
+          <a:prstGeom prst="rect">
+            <a:avLst/>
+          </a:prstGeom>
+          <a:noFill/>
+          <a:ln/>
+        </p:spPr>
+        <p:txBody>
+          <a:bodyPr wrap="square" lIns="0" tIns="0" rIns="0" bIns="0" rtlCol="0" anchor="t"/>
+          <a:lstStyle/>
+          <a:p>
+            <a:pPr rtl="1" algn="ctr" indent="0" marL="0">
+              <a:buNone/>
+            </a:pPr>
+            <a:r>
+              <a:rPr lang="ar-SA" altLang="en-US" sz="1800" b="1" dirty="0">
+                <a:solidFill>
+                  <a:srgbClr val="1F6A68"/>
+                </a:solidFill>
+                <a:latin typeface="Arial" pitchFamily="34" charset="0"/>
+                <a:ea typeface="Arial" pitchFamily="34" charset="-122"/>
+                <a:cs typeface="Arial" pitchFamily="34" charset="-120"/>
+              </a:rPr>
+              <a:t>البنية، الأدوات، والمحرك الذي يبني الرحلة</a:t>
+            </a:r>
+            <a:endParaRPr lang="ar-SA" sz="1800" dirty="0"/>
+          </a:p>
+        </p:txBody>
+      </p:sp>
+      <p:sp>
+        <p:nvSpPr>
+          <p:cNvPr id="6" name="Text 4"/>
+          <p:cNvSpPr txBox="1"/>
+          <p:nvPr/>
+        </p:nvSpPr>
+        <p:spPr>
+          <a:xfrm>
+            <a:off x="2651760" y="4023360"/>
             <a:ext cx="6858000" cy="365760"/>
           </a:xfrm>
           <a:prstGeom prst="rect">
@@ -1714,7 +1753,7 @@
               <a:buNone/>
             </a:pPr>
             <a:r>
-              <a:rPr lang="ar-SA" altLang="en-US" sz="1600" dirty="0">
+              <a:rPr lang="ar-SA" altLang="en-US" sz="1400" dirty="0">
                 <a:solidFill>
                   <a:srgbClr val="6B7F7E"/>
                 </a:solidFill>
@@ -1722,22 +1761,22 @@
                 <a:ea typeface="Arial" pitchFamily="34" charset="-122"/>
                 <a:cs typeface="Arial" pitchFamily="34" charset="-120"/>
               </a:rPr>
-              <a:t>خدماتك الحكومية .. بأسهل طريقة</a:t>
-            </a:r>
-            <a:endParaRPr lang="ar-SA" sz="1600" dirty="0"/>
-          </a:p>
-        </p:txBody>
-      </p:sp>
-      <p:sp>
-        <p:nvSpPr>
-          <p:cNvPr id="6" name="Text 4"/>
-          <p:cNvSpPr txBox="1"/>
-          <p:nvPr/>
-        </p:nvSpPr>
-        <p:spPr>
-          <a:xfrm>
-            <a:off x="2651760" y="4069080"/>
-            <a:ext cx="6858000" cy="457200"/>
+              <a:t>تطبيق ويب بتصميم جوال · عربي بالكامل · منشور ويعمل</a:t>
+            </a:r>
+            <a:endParaRPr lang="ar-SA" sz="1400" dirty="0"/>
+          </a:p>
+        </p:txBody>
+      </p:sp>
+      <p:sp>
+        <p:nvSpPr>
+          <p:cNvPr id="7" name="Text 5"/>
+          <p:cNvSpPr txBox="1"/>
+          <p:nvPr/>
+        </p:nvSpPr>
+        <p:spPr>
+          <a:xfrm>
+            <a:off x="2651760" y="4434840"/>
+            <a:ext cx="6858000" cy="365760"/>
           </a:xfrm>
           <a:prstGeom prst="rect">
             <a:avLst/>
@@ -1753,46 +1792,7 @@
               <a:buNone/>
             </a:pPr>
             <a:r>
-              <a:rPr lang="ar-SA" altLang="en-US" sz="2000" b="1" dirty="0">
-                <a:solidFill>
-                  <a:srgbClr val="1F6A68"/>
-                </a:solidFill>
-                <a:latin typeface="Arial" pitchFamily="34" charset="0"/>
-                <a:ea typeface="Arial" pitchFamily="34" charset="-122"/>
-                <a:cs typeface="Arial" pitchFamily="34" charset="-120"/>
-              </a:rPr>
-              <a:t>التقنية خلف التطبيق: كيف بنيناه وبأي أدوات ومصادر</a:t>
-            </a:r>
-            <a:endParaRPr lang="ar-SA" sz="2000" dirty="0"/>
-          </a:p>
-        </p:txBody>
-      </p:sp>
-      <p:sp>
-        <p:nvSpPr>
-          <p:cNvPr id="7" name="Text 5"/>
-          <p:cNvSpPr txBox="1"/>
-          <p:nvPr/>
-        </p:nvSpPr>
-        <p:spPr>
-          <a:xfrm>
-            <a:off x="2651760" y="4617720"/>
-            <a:ext cx="6858000" cy="365760"/>
-          </a:xfrm>
-          <a:prstGeom prst="rect">
-            <a:avLst/>
-          </a:prstGeom>
-          <a:noFill/>
-          <a:ln/>
-        </p:spPr>
-        <p:txBody>
-          <a:bodyPr wrap="square" lIns="0" tIns="0" rIns="0" bIns="0" rtlCol="0" anchor="t"/>
-          <a:lstStyle/>
-          <a:p>
-            <a:pPr rtl="1" algn="ctr" indent="0" marL="0">
-              <a:buNone/>
-            </a:pPr>
-            <a:r>
-              <a:rPr lang="ar-SA" altLang="en-US" sz="1300" dirty="0">
+              <a:rPr lang="ar-SA" altLang="en-US" sz="1200" dirty="0">
                 <a:solidFill>
                   <a:srgbClr val="6B7F7E"/>
                 </a:solidFill>
@@ -1802,7 +1802,7 @@
               </a:rPr>
               <a:t>ENBTHON 2026 · منطقة الحدود الشمالية</a:t>
             </a:r>
-            <a:endParaRPr lang="ar-SA" sz="1300" dirty="0"/>
+            <a:endParaRPr lang="ar-SA" sz="1200" dirty="0"/>
           </a:p>
         </p:txBody>
       </p:sp>
@@ -1814,12 +1814,12 @@
         </p:nvSpPr>
         <p:spPr>
           <a:xfrm>
-            <a:off x="4754880" y="5120640"/>
-            <a:ext cx="2651760" cy="411480"/>
+            <a:off x="4754880" y="5029200"/>
+            <a:ext cx="2651760" cy="457200"/>
           </a:xfrm>
           <a:prstGeom prst="roundRect">
             <a:avLst>
-              <a:gd name="adj" fmla="val 55556"/>
+              <a:gd name="adj" fmla="val 50000"/>
             </a:avLst>
           </a:prstGeom>
           <a:solidFill>
@@ -1841,8 +1841,8 @@
         </p:nvSpPr>
         <p:spPr>
           <a:xfrm>
-            <a:off x="4754880" y="5120640"/>
-            <a:ext cx="2651760" cy="411480"/>
+            <a:off x="4754880" y="5029200"/>
+            <a:ext cx="2651760" cy="457200"/>
           </a:xfrm>
           <a:prstGeom prst="rect">
             <a:avLst/>
@@ -1858,7 +1858,7 @@
               <a:buNone/>
             </a:pPr>
             <a:r>
-              <a:rPr lang="ar-SA" altLang="en-US" sz="1200" b="1" dirty="0">
+              <a:rPr lang="ar-SA" altLang="en-US" sz="1100" b="1" dirty="0">
                 <a:solidFill>
                   <a:srgbClr val="FFFFFF"/>
                 </a:solidFill>
@@ -1868,7 +1868,7 @@
               </a:rPr>
               <a:t>shamal-ai.vercel.app</a:t>
             </a:r>
-            <a:endParaRPr lang="ar-SA" sz="1200" dirty="0"/>
+            <a:endParaRPr lang="ar-SA" sz="1100" dirty="0"/>
           </a:p>
         </p:txBody>
       </p:sp>
@@ -1937,7 +1937,7 @@
                 <a:ea typeface="Arial" pitchFamily="34" charset="-122"/>
                 <a:cs typeface="Arial" pitchFamily="34" charset="-120"/>
               </a:rPr>
-              <a:t>كيف يعمل التطبيق في 6 خطوات</a:t>
+              <a:t>المعمارية في صورة واحدة</a:t>
             </a:r>
             <a:endParaRPr lang="ar-SA" sz="3000" dirty="0"/>
           </a:p>
@@ -1976,7 +1976,7 @@
                 <a:ea typeface="Arial" pitchFamily="34" charset="-122"/>
                 <a:cs typeface="Arial" pitchFamily="34" charset="-120"/>
               </a:rPr>
-              <a:t>من احتياج المستفيد إلى خطوته التالية</a:t>
+              <a:t>أربع طبقات فقط، كلها داخل مشروع واحد</a:t>
             </a:r>
             <a:endParaRPr lang="ar-SA" sz="1400" dirty="0"/>
           </a:p>
@@ -1990,12 +1990,624 @@
         </p:nvSpPr>
         <p:spPr>
           <a:xfrm>
-            <a:off x="8119872" y="1645920"/>
-            <a:ext cx="3520440" cy="1965960"/>
+            <a:off x="9226296" y="1874520"/>
+            <a:ext cx="2377440" cy="1554480"/>
           </a:xfrm>
           <a:prstGeom prst="roundRect">
             <a:avLst>
-              <a:gd name="adj" fmla="val 8372"/>
+              <a:gd name="adj" fmla="val 10588"/>
+            </a:avLst>
+          </a:prstGeom>
+          <a:solidFill>
+            <a:srgbClr val="E4EDF5"/>
+          </a:solidFill>
+          <a:ln w="9525">
+            <a:solidFill>
+              <a:srgbClr val="E4EDF5"/>
+            </a:solidFill>
+            <a:prstDash val="solid"/>
+          </a:ln>
+          <a:effectLst>
+            <a:outerShdw sx="100000" sy="100000" kx="0" ky="0" algn="bl" rotWithShape="0" blurRad="76200" dist="25400" dir="5400000">
+              <a:srgbClr val="17504E">
+                <a:alpha val="8000"/>
+              </a:srgbClr>
+            </a:outerShdw>
+          </a:effectLst>
+        </p:spPr>
+      </p:sp>
+      <p:sp>
+        <p:nvSpPr>
+          <p:cNvPr id="5" name="Text 3"/>
+          <p:cNvSpPr txBox="1"/>
+          <p:nvPr/>
+        </p:nvSpPr>
+        <p:spPr>
+          <a:xfrm>
+            <a:off x="9363456" y="2103120"/>
+            <a:ext cx="2103120" cy="411480"/>
+          </a:xfrm>
+          <a:prstGeom prst="rect">
+            <a:avLst/>
+          </a:prstGeom>
+          <a:noFill/>
+          <a:ln/>
+        </p:spPr>
+        <p:txBody>
+          <a:bodyPr wrap="square" lIns="0" tIns="0" rIns="0" bIns="0" rtlCol="0" anchor="t"/>
+          <a:lstStyle/>
+          <a:p>
+            <a:pPr rtl="1" algn="ctr" indent="0" marL="0">
+              <a:buNone/>
+            </a:pPr>
+            <a:r>
+              <a:rPr lang="ar-SA" altLang="en-US" sz="1500" b="1" dirty="0">
+                <a:solidFill>
+                  <a:srgbClr val="17504E"/>
+                </a:solidFill>
+                <a:latin typeface="Arial" pitchFamily="34" charset="0"/>
+                <a:ea typeface="Arial" pitchFamily="34" charset="-122"/>
+                <a:cs typeface="Arial" pitchFamily="34" charset="-120"/>
+              </a:rPr>
+              <a:t>المتصفح / الجوال</a:t>
+            </a:r>
+            <a:endParaRPr lang="ar-SA" sz="1500" dirty="0"/>
+          </a:p>
+        </p:txBody>
+      </p:sp>
+      <p:sp>
+        <p:nvSpPr>
+          <p:cNvPr id="6" name="Text 4"/>
+          <p:cNvSpPr txBox="1"/>
+          <p:nvPr/>
+        </p:nvSpPr>
+        <p:spPr>
+          <a:xfrm>
+            <a:off x="9363456" y="2587752"/>
+            <a:ext cx="2103120" cy="685800"/>
+          </a:xfrm>
+          <a:prstGeom prst="rect">
+            <a:avLst/>
+          </a:prstGeom>
+          <a:noFill/>
+          <a:ln/>
+        </p:spPr>
+        <p:txBody>
+          <a:bodyPr wrap="square" lIns="0" tIns="0" rIns="0" bIns="0" rtlCol="0" anchor="t"/>
+          <a:lstStyle/>
+          <a:p>
+            <a:pPr rtl="1" algn="ctr" indent="0" marL="0">
+              <a:lnSpc>
+                <a:spcPct val="115000"/>
+              </a:lnSpc>
+              <a:buNone/>
+            </a:pPr>
+            <a:r>
+              <a:rPr lang="ar-SA" altLang="en-US" sz="1100" dirty="0">
+                <a:solidFill>
+                  <a:srgbClr val="6B7F7E"/>
+                </a:solidFill>
+                <a:latin typeface="Arial" pitchFamily="34" charset="0"/>
+                <a:ea typeface="Arial" pitchFamily="34" charset="-122"/>
+                <a:cs typeface="Arial" pitchFamily="34" charset="-120"/>
+              </a:rPr>
+              <a:t>واجهة React</a:t>
+            </a:r>
+            <a:endParaRPr lang="ar-SA" sz="1100" dirty="0"/>
+          </a:p>
+          <a:p>
+            <a:pPr rtl="1" algn="ctr" indent="0" marL="0">
+              <a:lnSpc>
+                <a:spcPct val="115000"/>
+              </a:lnSpc>
+              <a:buNone/>
+            </a:pPr>
+            <a:r>
+              <a:rPr lang="ar-SA" altLang="en-US" sz="1100" dirty="0">
+                <a:solidFill>
+                  <a:srgbClr val="6B7F7E"/>
+                </a:solidFill>
+                <a:latin typeface="Arial" pitchFamily="34" charset="0"/>
+                <a:ea typeface="Arial" pitchFamily="34" charset="-122"/>
+                <a:cs typeface="Arial" pitchFamily="34" charset="-120"/>
+              </a:rPr>
+              <a:t>إدخال صوتي بالعربية</a:t>
+            </a:r>
+            <a:endParaRPr lang="ar-SA" sz="1100" dirty="0"/>
+          </a:p>
+        </p:txBody>
+      </p:sp>
+      <p:sp>
+        <p:nvSpPr>
+          <p:cNvPr id="7" name="Shape 5"/>
+          <p:cNvSpPr/>
+          <p:nvPr/>
+        </p:nvSpPr>
+        <p:spPr>
+          <a:xfrm>
+            <a:off x="8778240" y="2651760"/>
+            <a:ext cx="448056" cy="0"/>
+          </a:xfrm>
+          <a:prstGeom prst="line">
+            <a:avLst/>
+          </a:prstGeom>
+          <a:noFill/>
+          <a:ln w="25400">
+            <a:solidFill>
+              <a:srgbClr val="1F6A68"/>
+            </a:solidFill>
+            <a:prstDash val="solid"/>
+            <a:headEnd type="triangle"/>
+          </a:ln>
+        </p:spPr>
+      </p:sp>
+      <p:sp>
+        <p:nvSpPr>
+          <p:cNvPr id="8" name="Shape 6"/>
+          <p:cNvSpPr/>
+          <p:nvPr/>
+        </p:nvSpPr>
+        <p:spPr>
+          <a:xfrm>
+            <a:off x="6345936" y="1874520"/>
+            <a:ext cx="2377440" cy="1554480"/>
+          </a:xfrm>
+          <a:prstGeom prst="roundRect">
+            <a:avLst>
+              <a:gd name="adj" fmla="val 10588"/>
+            </a:avLst>
+          </a:prstGeom>
+          <a:solidFill>
+            <a:srgbClr val="E4F0EA"/>
+          </a:solidFill>
+          <a:ln w="9525">
+            <a:solidFill>
+              <a:srgbClr val="E4F0EA"/>
+            </a:solidFill>
+            <a:prstDash val="solid"/>
+          </a:ln>
+          <a:effectLst>
+            <a:outerShdw sx="100000" sy="100000" kx="0" ky="0" algn="bl" rotWithShape="0" blurRad="76200" dist="25400" dir="5400000">
+              <a:srgbClr val="17504E">
+                <a:alpha val="8000"/>
+              </a:srgbClr>
+            </a:outerShdw>
+          </a:effectLst>
+        </p:spPr>
+      </p:sp>
+      <p:sp>
+        <p:nvSpPr>
+          <p:cNvPr id="9" name="Text 7"/>
+          <p:cNvSpPr txBox="1"/>
+          <p:nvPr/>
+        </p:nvSpPr>
+        <p:spPr>
+          <a:xfrm>
+            <a:off x="6483096" y="2103120"/>
+            <a:ext cx="2103120" cy="411480"/>
+          </a:xfrm>
+          <a:prstGeom prst="rect">
+            <a:avLst/>
+          </a:prstGeom>
+          <a:noFill/>
+          <a:ln/>
+        </p:spPr>
+        <p:txBody>
+          <a:bodyPr wrap="square" lIns="0" tIns="0" rIns="0" bIns="0" rtlCol="0" anchor="t"/>
+          <a:lstStyle/>
+          <a:p>
+            <a:pPr rtl="1" algn="ctr" indent="0" marL="0">
+              <a:buNone/>
+            </a:pPr>
+            <a:r>
+              <a:rPr lang="ar-SA" altLang="en-US" sz="1500" b="1" dirty="0">
+                <a:solidFill>
+                  <a:srgbClr val="17504E"/>
+                </a:solidFill>
+                <a:latin typeface="Arial" pitchFamily="34" charset="0"/>
+                <a:ea typeface="Arial" pitchFamily="34" charset="-122"/>
+                <a:cs typeface="Arial" pitchFamily="34" charset="-120"/>
+              </a:rPr>
+              <a:t>Next.js على Vercel</a:t>
+            </a:r>
+            <a:endParaRPr lang="ar-SA" sz="1500" dirty="0"/>
+          </a:p>
+        </p:txBody>
+      </p:sp>
+      <p:sp>
+        <p:nvSpPr>
+          <p:cNvPr id="10" name="Text 8"/>
+          <p:cNvSpPr txBox="1"/>
+          <p:nvPr/>
+        </p:nvSpPr>
+        <p:spPr>
+          <a:xfrm>
+            <a:off x="6483096" y="2587752"/>
+            <a:ext cx="2103120" cy="685800"/>
+          </a:xfrm>
+          <a:prstGeom prst="rect">
+            <a:avLst/>
+          </a:prstGeom>
+          <a:noFill/>
+          <a:ln/>
+        </p:spPr>
+        <p:txBody>
+          <a:bodyPr wrap="square" lIns="0" tIns="0" rIns="0" bIns="0" rtlCol="0" anchor="t"/>
+          <a:lstStyle/>
+          <a:p>
+            <a:pPr rtl="1" algn="ctr" indent="0" marL="0">
+              <a:lnSpc>
+                <a:spcPct val="115000"/>
+              </a:lnSpc>
+              <a:buNone/>
+            </a:pPr>
+            <a:r>
+              <a:rPr lang="ar-SA" altLang="en-US" sz="1100" dirty="0">
+                <a:solidFill>
+                  <a:srgbClr val="6B7F7E"/>
+                </a:solidFill>
+                <a:latin typeface="Arial" pitchFamily="34" charset="0"/>
+                <a:ea typeface="Arial" pitchFamily="34" charset="-122"/>
+                <a:cs typeface="Arial" pitchFamily="34" charset="-120"/>
+              </a:rPr>
+              <a:t>الصفحات + مسارات API</a:t>
+            </a:r>
+            <a:endParaRPr lang="ar-SA" sz="1100" dirty="0"/>
+          </a:p>
+          <a:p>
+            <a:pPr rtl="1" algn="ctr" indent="0" marL="0">
+              <a:lnSpc>
+                <a:spcPct val="115000"/>
+              </a:lnSpc>
+              <a:buNone/>
+            </a:pPr>
+            <a:r>
+              <a:rPr lang="ar-SA" altLang="en-US" sz="1100" dirty="0">
+                <a:solidFill>
+                  <a:srgbClr val="6B7F7E"/>
+                </a:solidFill>
+                <a:latin typeface="Arial" pitchFamily="34" charset="0"/>
+                <a:ea typeface="Arial" pitchFamily="34" charset="-122"/>
+                <a:cs typeface="Arial" pitchFamily="34" charset="-120"/>
+              </a:rPr>
+              <a:t>تصيير على الخادم</a:t>
+            </a:r>
+            <a:endParaRPr lang="ar-SA" sz="1100" dirty="0"/>
+          </a:p>
+        </p:txBody>
+      </p:sp>
+      <p:sp>
+        <p:nvSpPr>
+          <p:cNvPr id="11" name="Shape 9"/>
+          <p:cNvSpPr/>
+          <p:nvPr/>
+        </p:nvSpPr>
+        <p:spPr>
+          <a:xfrm>
+            <a:off x="5897880" y="2651760"/>
+            <a:ext cx="448056" cy="0"/>
+          </a:xfrm>
+          <a:prstGeom prst="line">
+            <a:avLst/>
+          </a:prstGeom>
+          <a:noFill/>
+          <a:ln w="25400">
+            <a:solidFill>
+              <a:srgbClr val="1F6A68"/>
+            </a:solidFill>
+            <a:prstDash val="solid"/>
+            <a:headEnd type="triangle"/>
+          </a:ln>
+        </p:spPr>
+      </p:sp>
+      <p:sp>
+        <p:nvSpPr>
+          <p:cNvPr id="12" name="Shape 10"/>
+          <p:cNvSpPr/>
+          <p:nvPr/>
+        </p:nvSpPr>
+        <p:spPr>
+          <a:xfrm>
+            <a:off x="3465576" y="1874520"/>
+            <a:ext cx="2377440" cy="1554480"/>
+          </a:xfrm>
+          <a:prstGeom prst="roundRect">
+            <a:avLst>
+              <a:gd name="adj" fmla="val 10588"/>
+            </a:avLst>
+          </a:prstGeom>
+          <a:solidFill>
+            <a:srgbClr val="EBE7F4"/>
+          </a:solidFill>
+          <a:ln w="9525">
+            <a:solidFill>
+              <a:srgbClr val="EBE7F4"/>
+            </a:solidFill>
+            <a:prstDash val="solid"/>
+          </a:ln>
+          <a:effectLst>
+            <a:outerShdw sx="100000" sy="100000" kx="0" ky="0" algn="bl" rotWithShape="0" blurRad="76200" dist="25400" dir="5400000">
+              <a:srgbClr val="17504E">
+                <a:alpha val="8000"/>
+              </a:srgbClr>
+            </a:outerShdw>
+          </a:effectLst>
+        </p:spPr>
+      </p:sp>
+      <p:sp>
+        <p:nvSpPr>
+          <p:cNvPr id="13" name="Text 11"/>
+          <p:cNvSpPr txBox="1"/>
+          <p:nvPr/>
+        </p:nvSpPr>
+        <p:spPr>
+          <a:xfrm>
+            <a:off x="3602736" y="2103120"/>
+            <a:ext cx="2103120" cy="411480"/>
+          </a:xfrm>
+          <a:prstGeom prst="rect">
+            <a:avLst/>
+          </a:prstGeom>
+          <a:noFill/>
+          <a:ln/>
+        </p:spPr>
+        <p:txBody>
+          <a:bodyPr wrap="square" lIns="0" tIns="0" rIns="0" bIns="0" rtlCol="0" anchor="t"/>
+          <a:lstStyle/>
+          <a:p>
+            <a:pPr rtl="1" algn="ctr" indent="0" marL="0">
+              <a:buNone/>
+            </a:pPr>
+            <a:r>
+              <a:rPr lang="ar-SA" altLang="en-US" sz="1500" b="1" dirty="0">
+                <a:solidFill>
+                  <a:srgbClr val="17504E"/>
+                </a:solidFill>
+                <a:latin typeface="Arial" pitchFamily="34" charset="0"/>
+                <a:ea typeface="Arial" pitchFamily="34" charset="-122"/>
+                <a:cs typeface="Arial" pitchFamily="34" charset="-120"/>
+              </a:rPr>
+              <a:t>محرك الرحلة</a:t>
+            </a:r>
+            <a:endParaRPr lang="ar-SA" sz="1500" dirty="0"/>
+          </a:p>
+        </p:txBody>
+      </p:sp>
+      <p:sp>
+        <p:nvSpPr>
+          <p:cNvPr id="14" name="Text 12"/>
+          <p:cNvSpPr txBox="1"/>
+          <p:nvPr/>
+        </p:nvSpPr>
+        <p:spPr>
+          <a:xfrm>
+            <a:off x="3602736" y="2587752"/>
+            <a:ext cx="2103120" cy="685800"/>
+          </a:xfrm>
+          <a:prstGeom prst="rect">
+            <a:avLst/>
+          </a:prstGeom>
+          <a:noFill/>
+          <a:ln/>
+        </p:spPr>
+        <p:txBody>
+          <a:bodyPr wrap="square" lIns="0" tIns="0" rIns="0" bIns="0" rtlCol="0" anchor="t"/>
+          <a:lstStyle/>
+          <a:p>
+            <a:pPr rtl="1" algn="ctr" indent="0" marL="0">
+              <a:lnSpc>
+                <a:spcPct val="115000"/>
+              </a:lnSpc>
+              <a:buNone/>
+            </a:pPr>
+            <a:r>
+              <a:rPr lang="ar-SA" altLang="en-US" sz="1100" dirty="0">
+                <a:solidFill>
+                  <a:srgbClr val="6B7F7E"/>
+                </a:solidFill>
+                <a:latin typeface="Arial" pitchFamily="34" charset="0"/>
+                <a:ea typeface="Arial" pitchFamily="34" charset="-122"/>
+                <a:cs typeface="Arial" pitchFamily="34" charset="-120"/>
+              </a:rPr>
+              <a:t>الترتيب والجاهزية</a:t>
+            </a:r>
+            <a:endParaRPr lang="ar-SA" sz="1100" dirty="0"/>
+          </a:p>
+          <a:p>
+            <a:pPr rtl="1" algn="ctr" indent="0" marL="0">
+              <a:lnSpc>
+                <a:spcPct val="115000"/>
+              </a:lnSpc>
+              <a:buNone/>
+            </a:pPr>
+            <a:r>
+              <a:rPr lang="ar-SA" altLang="en-US" sz="1100" dirty="0">
+                <a:solidFill>
+                  <a:srgbClr val="6B7F7E"/>
+                </a:solidFill>
+                <a:latin typeface="Arial" pitchFamily="34" charset="0"/>
+                <a:ea typeface="Arial" pitchFamily="34" charset="-122"/>
+                <a:cs typeface="Arial" pitchFamily="34" charset="-120"/>
+              </a:rPr>
+              <a:t>والعوائق (داخل التطبيق)</a:t>
+            </a:r>
+            <a:endParaRPr lang="ar-SA" sz="1100" dirty="0"/>
+          </a:p>
+        </p:txBody>
+      </p:sp>
+      <p:sp>
+        <p:nvSpPr>
+          <p:cNvPr id="15" name="Shape 13"/>
+          <p:cNvSpPr/>
+          <p:nvPr/>
+        </p:nvSpPr>
+        <p:spPr>
+          <a:xfrm>
+            <a:off x="3017520" y="2651760"/>
+            <a:ext cx="448056" cy="0"/>
+          </a:xfrm>
+          <a:prstGeom prst="line">
+            <a:avLst/>
+          </a:prstGeom>
+          <a:noFill/>
+          <a:ln w="25400">
+            <a:solidFill>
+              <a:srgbClr val="1F6A68"/>
+            </a:solidFill>
+            <a:prstDash val="solid"/>
+            <a:headEnd type="triangle"/>
+          </a:ln>
+        </p:spPr>
+      </p:sp>
+      <p:sp>
+        <p:nvSpPr>
+          <p:cNvPr id="16" name="Shape 14"/>
+          <p:cNvSpPr/>
+          <p:nvPr/>
+        </p:nvSpPr>
+        <p:spPr>
+          <a:xfrm>
+            <a:off x="585216" y="1874520"/>
+            <a:ext cx="2377440" cy="1554480"/>
+          </a:xfrm>
+          <a:prstGeom prst="roundRect">
+            <a:avLst>
+              <a:gd name="adj" fmla="val 10588"/>
+            </a:avLst>
+          </a:prstGeom>
+          <a:solidFill>
+            <a:srgbClr val="F4EEE3"/>
+          </a:solidFill>
+          <a:ln w="9525">
+            <a:solidFill>
+              <a:srgbClr val="F4EEE3"/>
+            </a:solidFill>
+            <a:prstDash val="solid"/>
+          </a:ln>
+          <a:effectLst>
+            <a:outerShdw sx="100000" sy="100000" kx="0" ky="0" algn="bl" rotWithShape="0" blurRad="76200" dist="25400" dir="5400000">
+              <a:srgbClr val="17504E">
+                <a:alpha val="8000"/>
+              </a:srgbClr>
+            </a:outerShdw>
+          </a:effectLst>
+        </p:spPr>
+      </p:sp>
+      <p:sp>
+        <p:nvSpPr>
+          <p:cNvPr id="17" name="Text 15"/>
+          <p:cNvSpPr txBox="1"/>
+          <p:nvPr/>
+        </p:nvSpPr>
+        <p:spPr>
+          <a:xfrm>
+            <a:off x="722376" y="2103120"/>
+            <a:ext cx="2103120" cy="411480"/>
+          </a:xfrm>
+          <a:prstGeom prst="rect">
+            <a:avLst/>
+          </a:prstGeom>
+          <a:noFill/>
+          <a:ln/>
+        </p:spPr>
+        <p:txBody>
+          <a:bodyPr wrap="square" lIns="0" tIns="0" rIns="0" bIns="0" rtlCol="0" anchor="t"/>
+          <a:lstStyle/>
+          <a:p>
+            <a:pPr rtl="1" algn="ctr" indent="0" marL="0">
+              <a:buNone/>
+            </a:pPr>
+            <a:r>
+              <a:rPr lang="ar-SA" altLang="en-US" sz="1500" b="1" dirty="0">
+                <a:solidFill>
+                  <a:srgbClr val="17504E"/>
+                </a:solidFill>
+                <a:latin typeface="Arial" pitchFamily="34" charset="0"/>
+                <a:ea typeface="Arial" pitchFamily="34" charset="-122"/>
+                <a:cs typeface="Arial" pitchFamily="34" charset="-120"/>
+              </a:rPr>
+              <a:t>Neon Postgres</a:t>
+            </a:r>
+            <a:endParaRPr lang="ar-SA" sz="1500" dirty="0"/>
+          </a:p>
+        </p:txBody>
+      </p:sp>
+      <p:sp>
+        <p:nvSpPr>
+          <p:cNvPr id="18" name="Text 16"/>
+          <p:cNvSpPr txBox="1"/>
+          <p:nvPr/>
+        </p:nvSpPr>
+        <p:spPr>
+          <a:xfrm>
+            <a:off x="722376" y="2587752"/>
+            <a:ext cx="2103120" cy="685800"/>
+          </a:xfrm>
+          <a:prstGeom prst="rect">
+            <a:avLst/>
+          </a:prstGeom>
+          <a:noFill/>
+          <a:ln/>
+        </p:spPr>
+        <p:txBody>
+          <a:bodyPr wrap="square" lIns="0" tIns="0" rIns="0" bIns="0" rtlCol="0" anchor="t"/>
+          <a:lstStyle/>
+          <a:p>
+            <a:pPr rtl="1" algn="ctr" indent="0" marL="0">
+              <a:lnSpc>
+                <a:spcPct val="115000"/>
+              </a:lnSpc>
+              <a:buNone/>
+            </a:pPr>
+            <a:r>
+              <a:rPr lang="ar-SA" altLang="en-US" sz="1100" dirty="0">
+                <a:solidFill>
+                  <a:srgbClr val="6B7F7E"/>
+                </a:solidFill>
+                <a:latin typeface="Arial" pitchFamily="34" charset="0"/>
+                <a:ea typeface="Arial" pitchFamily="34" charset="-122"/>
+                <a:cs typeface="Arial" pitchFamily="34" charset="-120"/>
+              </a:rPr>
+              <a:t>الحسابات والرحلات</a:t>
+            </a:r>
+            <a:endParaRPr lang="ar-SA" sz="1100" dirty="0"/>
+          </a:p>
+          <a:p>
+            <a:pPr rtl="1" algn="ctr" indent="0" marL="0">
+              <a:lnSpc>
+                <a:spcPct val="115000"/>
+              </a:lnSpc>
+              <a:buNone/>
+            </a:pPr>
+            <a:r>
+              <a:rPr lang="ar-SA" altLang="en-US" sz="1100" dirty="0">
+                <a:solidFill>
+                  <a:srgbClr val="6B7F7E"/>
+                </a:solidFill>
+                <a:latin typeface="Arial" pitchFamily="34" charset="0"/>
+                <a:ea typeface="Arial" pitchFamily="34" charset="-122"/>
+                <a:cs typeface="Arial" pitchFamily="34" charset="-120"/>
+              </a:rPr>
+              <a:t>والإشعارات</a:t>
+            </a:r>
+            <a:endParaRPr lang="ar-SA" sz="1100" dirty="0"/>
+          </a:p>
+        </p:txBody>
+      </p:sp>
+      <p:sp>
+        <p:nvSpPr>
+          <p:cNvPr id="19" name="Shape 17"/>
+          <p:cNvSpPr/>
+          <p:nvPr/>
+        </p:nvSpPr>
+        <p:spPr>
+          <a:xfrm>
+            <a:off x="6231636" y="3977640"/>
+            <a:ext cx="5408676" cy="1463040"/>
+          </a:xfrm>
+          <a:prstGeom prst="roundRect">
+            <a:avLst>
+              <a:gd name="adj" fmla="val 11250"/>
             </a:avLst>
           </a:prstGeom>
           <a:solidFill>
@@ -2018,168 +2630,104 @@
       </p:sp>
       <p:sp>
         <p:nvSpPr>
-          <p:cNvPr id="5" name="Shape 3"/>
+          <p:cNvPr id="20" name="Text 18"/>
+          <p:cNvSpPr txBox="1"/>
+          <p:nvPr/>
+        </p:nvSpPr>
+        <p:spPr>
+          <a:xfrm>
+            <a:off x="6505956" y="4178808"/>
+            <a:ext cx="4860036" cy="365760"/>
+          </a:xfrm>
+          <a:prstGeom prst="rect">
+            <a:avLst/>
+          </a:prstGeom>
+          <a:noFill/>
+          <a:ln/>
+        </p:spPr>
+        <p:txBody>
+          <a:bodyPr wrap="square" lIns="0" tIns="0" rIns="0" bIns="0" rtlCol="0" anchor="t"/>
+          <a:lstStyle/>
+          <a:p>
+            <a:pPr rtl="1" algn="r" indent="0" marL="0">
+              <a:buNone/>
+            </a:pPr>
+            <a:r>
+              <a:rPr lang="ar-SA" altLang="en-US" sz="1500" b="1" dirty="0">
+                <a:solidFill>
+                  <a:srgbClr val="17504E"/>
+                </a:solidFill>
+                <a:latin typeface="Arial" pitchFamily="34" charset="0"/>
+                <a:ea typeface="Arial" pitchFamily="34" charset="-122"/>
+                <a:cs typeface="Arial" pitchFamily="34" charset="-120"/>
+              </a:rPr>
+              <a:t>📚 قاعدة المعرفة</a:t>
+            </a:r>
+            <a:endParaRPr lang="ar-SA" sz="1500" dirty="0"/>
+          </a:p>
+        </p:txBody>
+      </p:sp>
+      <p:sp>
+        <p:nvSpPr>
+          <p:cNvPr id="21" name="Text 19"/>
+          <p:cNvSpPr txBox="1"/>
+          <p:nvPr/>
+        </p:nvSpPr>
+        <p:spPr>
+          <a:xfrm>
+            <a:off x="6505956" y="4599432"/>
+            <a:ext cx="4860036" cy="731520"/>
+          </a:xfrm>
+          <a:prstGeom prst="rect">
+            <a:avLst/>
+          </a:prstGeom>
+          <a:noFill/>
+          <a:ln/>
+        </p:spPr>
+        <p:txBody>
+          <a:bodyPr wrap="square" lIns="0" tIns="0" rIns="0" bIns="0" rtlCol="0" anchor="t"/>
+          <a:lstStyle/>
+          <a:p>
+            <a:pPr rtl="1" algn="r" indent="0" marL="0">
+              <a:buNone/>
+            </a:pPr>
+            <a:r>
+              <a:rPr lang="ar-SA" altLang="en-US" sz="1200" dirty="0">
+                <a:solidFill>
+                  <a:srgbClr val="6B7F7E"/>
+                </a:solidFill>
+                <a:latin typeface="Arial" pitchFamily="34" charset="0"/>
+                <a:ea typeface="Arial" pitchFamily="34" charset="-122"/>
+                <a:cs typeface="Arial" pitchFamily="34" charset="-120"/>
+              </a:rPr>
+              <a:t>ملفات TypeScript ثابتة: 23 خدمة و17 سيناريو و19 جهة، تُحمَّل مع التطبيق بلا استعلامات خارجية</a:t>
+            </a:r>
+            <a:endParaRPr lang="ar-SA" sz="1200" dirty="0"/>
+          </a:p>
+        </p:txBody>
+      </p:sp>
+      <p:sp>
+        <p:nvSpPr>
+          <p:cNvPr id="22" name="Shape 20"/>
           <p:cNvSpPr/>
           <p:nvPr/>
         </p:nvSpPr>
         <p:spPr>
           <a:xfrm>
-            <a:off x="10954512" y="1874520"/>
-            <a:ext cx="457200" cy="457200"/>
-          </a:xfrm>
-          <a:prstGeom prst="ellipse">
-            <a:avLst/>
-          </a:prstGeom>
-          <a:solidFill>
-            <a:srgbClr val="1F6A68"/>
-          </a:solidFill>
-          <a:ln w="12700">
-            <a:solidFill>
-              <a:srgbClr val="1F6A68"/>
-            </a:solidFill>
-            <a:prstDash val="solid"/>
-          </a:ln>
-        </p:spPr>
-      </p:sp>
-      <p:sp>
-        <p:nvSpPr>
-          <p:cNvPr id="6" name="Text 4"/>
-          <p:cNvSpPr txBox="1"/>
-          <p:nvPr/>
-        </p:nvSpPr>
-        <p:spPr>
-          <a:xfrm>
-            <a:off x="10954512" y="1874520"/>
-            <a:ext cx="457200" cy="457200"/>
-          </a:xfrm>
-          <a:prstGeom prst="rect">
-            <a:avLst/>
-          </a:prstGeom>
-          <a:noFill/>
-          <a:ln/>
-        </p:spPr>
-        <p:txBody>
-          <a:bodyPr wrap="square" lIns="0" tIns="0" rIns="0" bIns="0" rtlCol="0" anchor="ctr"/>
-          <a:lstStyle/>
-          <a:p>
-            <a:pPr rtl="1" algn="ctr" indent="0" marL="0">
-              <a:buNone/>
-            </a:pPr>
-            <a:r>
-              <a:rPr lang="ar-SA" altLang="en-US" sz="1600" b="1" dirty="0">
-                <a:solidFill>
-                  <a:srgbClr val="FFFFFF"/>
-                </a:solidFill>
-                <a:latin typeface="Arial" pitchFamily="34" charset="0"/>
-                <a:ea typeface="Arial" pitchFamily="34" charset="-122"/>
-                <a:cs typeface="Arial" pitchFamily="34" charset="-120"/>
-              </a:rPr>
-              <a:t>1</a:t>
-            </a:r>
-            <a:endParaRPr lang="ar-SA" sz="1600" dirty="0"/>
-          </a:p>
-        </p:txBody>
-      </p:sp>
-      <p:sp>
-        <p:nvSpPr>
-          <p:cNvPr id="7" name="Text 5"/>
-          <p:cNvSpPr txBox="1"/>
-          <p:nvPr/>
-        </p:nvSpPr>
-        <p:spPr>
-          <a:xfrm>
-            <a:off x="8348472" y="2468880"/>
-            <a:ext cx="3063240" cy="640080"/>
-          </a:xfrm>
-          <a:prstGeom prst="rect">
-            <a:avLst/>
-          </a:prstGeom>
-          <a:noFill/>
-          <a:ln/>
-        </p:spPr>
-        <p:txBody>
-          <a:bodyPr wrap="square" lIns="0" tIns="0" rIns="0" bIns="0" rtlCol="0" anchor="t"/>
-          <a:lstStyle/>
-          <a:p>
-            <a:pPr rtl="1" algn="r" indent="0" marL="0">
-              <a:buNone/>
-            </a:pPr>
-            <a:r>
-              <a:rPr lang="ar-SA" altLang="en-US" sz="1400" b="1" dirty="0">
-                <a:solidFill>
-                  <a:srgbClr val="17504E"/>
-                </a:solidFill>
-                <a:latin typeface="Arial" pitchFamily="34" charset="0"/>
-                <a:ea typeface="Arial" pitchFamily="34" charset="-122"/>
-                <a:cs typeface="Arial" pitchFamily="34" charset="-120"/>
-              </a:rPr>
-              <a:t>المستفيد يكتب أو يقول احتياجه بلغته</a:t>
-            </a:r>
-            <a:endParaRPr lang="ar-SA" sz="1400" dirty="0"/>
-          </a:p>
-        </p:txBody>
-      </p:sp>
-      <p:sp>
-        <p:nvSpPr>
-          <p:cNvPr id="8" name="Text 6"/>
-          <p:cNvSpPr txBox="1"/>
-          <p:nvPr/>
-        </p:nvSpPr>
-        <p:spPr>
-          <a:xfrm>
-            <a:off x="8348472" y="3063240"/>
-            <a:ext cx="3063240" cy="411480"/>
-          </a:xfrm>
-          <a:prstGeom prst="rect">
-            <a:avLst/>
-          </a:prstGeom>
-          <a:noFill/>
-          <a:ln/>
-        </p:spPr>
-        <p:txBody>
-          <a:bodyPr wrap="square" lIns="0" tIns="0" rIns="0" bIns="0" rtlCol="0" anchor="t"/>
-          <a:lstStyle/>
-          <a:p>
-            <a:pPr rtl="1" algn="r" indent="0" marL="0">
-              <a:buNone/>
-            </a:pPr>
-            <a:r>
-              <a:rPr lang="ar-SA" altLang="en-US" sz="1100" dirty="0">
-                <a:solidFill>
-                  <a:srgbClr val="6B7F7E"/>
-                </a:solidFill>
-                <a:latin typeface="Arial" pitchFamily="34" charset="0"/>
-                <a:ea typeface="Arial" pitchFamily="34" charset="-122"/>
-                <a:cs typeface="Arial" pitchFamily="34" charset="-120"/>
-              </a:rPr>
-              <a:t>«أبي أبدأ مشروع وما أعرف وش أحتاج»</a:t>
-            </a:r>
-            <a:endParaRPr lang="ar-SA" sz="1100" dirty="0"/>
-          </a:p>
-        </p:txBody>
-      </p:sp>
-      <p:sp>
-        <p:nvSpPr>
-          <p:cNvPr id="9" name="Shape 7"/>
-          <p:cNvSpPr/>
-          <p:nvPr/>
-        </p:nvSpPr>
-        <p:spPr>
-          <a:xfrm>
-            <a:off x="4279392" y="1645920"/>
-            <a:ext cx="3520440" cy="1965960"/>
+            <a:off x="548640" y="3977640"/>
+            <a:ext cx="5408676" cy="1463040"/>
           </a:xfrm>
           <a:prstGeom prst="roundRect">
             <a:avLst>
-              <a:gd name="adj" fmla="val 8372"/>
+              <a:gd name="adj" fmla="val 11250"/>
             </a:avLst>
           </a:prstGeom>
           <a:solidFill>
-            <a:srgbClr val="FFFFFF"/>
+            <a:srgbClr val="FBF3E0"/>
           </a:solidFill>
           <a:ln w="9525">
             <a:solidFill>
-              <a:srgbClr val="DDE7E7"/>
+              <a:srgbClr val="E8D9B5"/>
             </a:solidFill>
             <a:prstDash val="solid"/>
           </a:ln>
@@ -2194,78 +2742,170 @@
       </p:sp>
       <p:sp>
         <p:nvSpPr>
-          <p:cNvPr id="10" name="Shape 8"/>
-          <p:cNvSpPr/>
-          <p:nvPr/>
-        </p:nvSpPr>
-        <p:spPr>
-          <a:xfrm>
-            <a:off x="7114032" y="1874520"/>
-            <a:ext cx="457200" cy="457200"/>
-          </a:xfrm>
-          <a:prstGeom prst="ellipse">
-            <a:avLst/>
-          </a:prstGeom>
-          <a:solidFill>
-            <a:srgbClr val="1F6A68"/>
-          </a:solidFill>
-          <a:ln w="12700">
-            <a:solidFill>
-              <a:srgbClr val="1F6A68"/>
-            </a:solidFill>
-            <a:prstDash val="solid"/>
-          </a:ln>
-        </p:spPr>
-      </p:sp>
-      <p:sp>
-        <p:nvSpPr>
-          <p:cNvPr id="11" name="Text 9"/>
-          <p:cNvSpPr txBox="1"/>
-          <p:nvPr/>
-        </p:nvSpPr>
-        <p:spPr>
-          <a:xfrm>
-            <a:off x="7114032" y="1874520"/>
-            <a:ext cx="457200" cy="457200"/>
-          </a:xfrm>
-          <a:prstGeom prst="rect">
-            <a:avLst/>
-          </a:prstGeom>
-          <a:noFill/>
-          <a:ln/>
-        </p:spPr>
-        <p:txBody>
-          <a:bodyPr wrap="square" lIns="0" tIns="0" rIns="0" bIns="0" rtlCol="0" anchor="ctr"/>
+          <p:cNvPr id="23" name="Text 21"/>
+          <p:cNvSpPr txBox="1"/>
+          <p:nvPr/>
+        </p:nvSpPr>
+        <p:spPr>
+          <a:xfrm>
+            <a:off x="822960" y="4178808"/>
+            <a:ext cx="4860036" cy="365760"/>
+          </a:xfrm>
+          <a:prstGeom prst="rect">
+            <a:avLst/>
+          </a:prstGeom>
+          <a:noFill/>
+          <a:ln/>
+        </p:spPr>
+        <p:txBody>
+          <a:bodyPr wrap="square" lIns="0" tIns="0" rIns="0" bIns="0" rtlCol="0" anchor="t"/>
+          <a:lstStyle/>
+          <a:p>
+            <a:pPr rtl="1" algn="r" indent="0" marL="0">
+              <a:buNone/>
+            </a:pPr>
+            <a:r>
+              <a:rPr lang="ar-SA" altLang="en-US" sz="1500" b="1" dirty="0">
+                <a:solidFill>
+                  <a:srgbClr val="8A6D3B"/>
+                </a:solidFill>
+                <a:latin typeface="Arial" pitchFamily="34" charset="0"/>
+                <a:ea typeface="Arial" pitchFamily="34" charset="-122"/>
+                <a:cs typeface="Arial" pitchFamily="34" charset="-120"/>
+              </a:rPr>
+              <a:t>🔌 طبقة النموذج اللغوي (اختيارية)</a:t>
+            </a:r>
+            <a:endParaRPr lang="ar-SA" sz="1500" dirty="0"/>
+          </a:p>
+        </p:txBody>
+      </p:sp>
+      <p:sp>
+        <p:nvSpPr>
+          <p:cNvPr id="24" name="Text 22"/>
+          <p:cNvSpPr txBox="1"/>
+          <p:nvPr/>
+        </p:nvSpPr>
+        <p:spPr>
+          <a:xfrm>
+            <a:off x="822960" y="4599432"/>
+            <a:ext cx="4860036" cy="731520"/>
+          </a:xfrm>
+          <a:prstGeom prst="rect">
+            <a:avLst/>
+          </a:prstGeom>
+          <a:noFill/>
+          <a:ln/>
+        </p:spPr>
+        <p:txBody>
+          <a:bodyPr wrap="square" lIns="0" tIns="0" rIns="0" bIns="0" rtlCol="0" anchor="t"/>
+          <a:lstStyle/>
+          <a:p>
+            <a:pPr rtl="1" algn="r" indent="0" marL="0">
+              <a:buNone/>
+            </a:pPr>
+            <a:r>
+              <a:rPr lang="ar-SA" altLang="en-US" sz="1200" dirty="0">
+                <a:solidFill>
+                  <a:srgbClr val="6B7F7E"/>
+                </a:solidFill>
+                <a:latin typeface="Arial" pitchFamily="34" charset="0"/>
+                <a:ea typeface="Arial" pitchFamily="34" charset="-122"/>
+                <a:cs typeface="Arial" pitchFamily="34" charset="-120"/>
+              </a:rPr>
+              <a:t>واجهة موحّدة لأربعة مزودات، تُفعَّل بمتغير بيئة واحد. الحالة اليوم: غير مربوطة، والفهم يعمل بالقواعد</a:t>
+            </a:r>
+            <a:endParaRPr lang="ar-SA" sz="1200" dirty="0"/>
+          </a:p>
+        </p:txBody>
+      </p:sp>
+      <p:sp>
+        <p:nvSpPr>
+          <p:cNvPr id="25" name="Text 23"/>
+          <p:cNvSpPr txBox="1"/>
+          <p:nvPr/>
+        </p:nvSpPr>
+        <p:spPr>
+          <a:xfrm>
+            <a:off x="548640" y="5715000"/>
+            <a:ext cx="11091672" cy="365760"/>
+          </a:xfrm>
+          <a:prstGeom prst="rect">
+            <a:avLst/>
+          </a:prstGeom>
+          <a:noFill/>
+          <a:ln/>
+        </p:spPr>
+        <p:txBody>
+          <a:bodyPr wrap="square" lIns="0" tIns="0" rIns="0" bIns="0" rtlCol="0" anchor="t"/>
           <a:lstStyle/>
           <a:p>
             <a:pPr rtl="1" algn="ctr" indent="0" marL="0">
               <a:buNone/>
             </a:pPr>
             <a:r>
-              <a:rPr lang="ar-SA" altLang="en-US" sz="1600" b="1" dirty="0">
-                <a:solidFill>
-                  <a:srgbClr val="FFFFFF"/>
-                </a:solidFill>
-                <a:latin typeface="Arial" pitchFamily="34" charset="0"/>
-                <a:ea typeface="Arial" pitchFamily="34" charset="-122"/>
-                <a:cs typeface="Arial" pitchFamily="34" charset="-120"/>
-              </a:rPr>
-              <a:t>2</a:t>
-            </a:r>
-            <a:endParaRPr lang="ar-SA" sz="1600" dirty="0"/>
-          </a:p>
-        </p:txBody>
-      </p:sp>
-      <p:sp>
-        <p:nvSpPr>
-          <p:cNvPr id="12" name="Text 10"/>
-          <p:cNvSpPr txBox="1"/>
-          <p:nvPr/>
-        </p:nvSpPr>
-        <p:spPr>
-          <a:xfrm>
-            <a:off x="4507992" y="2468880"/>
-            <a:ext cx="3063240" cy="640080"/>
+              <a:rPr lang="ar-SA" altLang="en-US" sz="1200" dirty="0">
+                <a:solidFill>
+                  <a:srgbClr val="6B7F7E"/>
+                </a:solidFill>
+                <a:latin typeface="Arial" pitchFamily="34" charset="0"/>
+                <a:ea typeface="Arial" pitchFamily="34" charset="-122"/>
+                <a:cs typeface="Arial" pitchFamily="34" charset="-120"/>
+              </a:rPr>
+              <a:t>كل شيء في مستودع واحد وتطبيق واحد: لا خوادم منفصلة، ولا خدمات خارجية إلزامية.</a:t>
+            </a:r>
+            <a:endParaRPr lang="ar-SA" sz="1200" dirty="0"/>
+          </a:p>
+        </p:txBody>
+      </p:sp>
+      <p:sp>
+        <p:nvSpPr>
+          <p:cNvPr id="26" name="Text 24"/>
+          <p:cNvSpPr txBox="1"/>
+          <p:nvPr/>
+        </p:nvSpPr>
+        <p:spPr>
+          <a:xfrm>
+            <a:off x="548640" y="6382512"/>
+            <a:ext cx="3657600" cy="274320"/>
+          </a:xfrm>
+          <a:prstGeom prst="rect">
+            <a:avLst/>
+          </a:prstGeom>
+          <a:noFill/>
+          <a:ln/>
+        </p:spPr>
+        <p:txBody>
+          <a:bodyPr wrap="square" lIns="0" tIns="0" rIns="0" bIns="0" rtlCol="0" anchor="t"/>
+          <a:lstStyle/>
+          <a:p>
+            <a:pPr rtl="1" algn="l" indent="0" marL="0">
+              <a:buNone/>
+            </a:pPr>
+            <a:r>
+              <a:rPr lang="ar-SA" altLang="en-US" sz="1000" dirty="0">
+                <a:solidFill>
+                  <a:srgbClr val="6B7F7E"/>
+                </a:solidFill>
+                <a:latin typeface="Arial" pitchFamily="34" charset="0"/>
+                <a:ea typeface="Arial" pitchFamily="34" charset="-122"/>
+                <a:cs typeface="Arial" pitchFamily="34" charset="-120"/>
+              </a:rPr>
+              <a:t>shamal-ai.vercel.app</a:t>
+            </a:r>
+            <a:endParaRPr lang="ar-SA" sz="1000" dirty="0"/>
+          </a:p>
+        </p:txBody>
+      </p:sp>
+      <p:sp>
+        <p:nvSpPr>
+          <p:cNvPr id="27" name="Text 25"/>
+          <p:cNvSpPr txBox="1"/>
+          <p:nvPr/>
+        </p:nvSpPr>
+        <p:spPr>
+          <a:xfrm>
+            <a:off x="7068312" y="6382512"/>
+            <a:ext cx="4572000" cy="274320"/>
           </a:xfrm>
           <a:prstGeom prst="rect">
             <a:avLst/>
@@ -2281,46 +2921,7 @@
               <a:buNone/>
             </a:pPr>
             <a:r>
-              <a:rPr lang="ar-SA" altLang="en-US" sz="1400" b="1" dirty="0">
-                <a:solidFill>
-                  <a:srgbClr val="17504E"/>
-                </a:solidFill>
-                <a:latin typeface="Arial" pitchFamily="34" charset="0"/>
-                <a:ea typeface="Arial" pitchFamily="34" charset="-122"/>
-                <a:cs typeface="Arial" pitchFamily="34" charset="-120"/>
-              </a:rPr>
-              <a:t>التطبيق يفهم القصد ويسأل أسئلة قصيرة</a:t>
-            </a:r>
-            <a:endParaRPr lang="ar-SA" sz="1400" dirty="0"/>
-          </a:p>
-        </p:txBody>
-      </p:sp>
-      <p:sp>
-        <p:nvSpPr>
-          <p:cNvPr id="13" name="Text 11"/>
-          <p:cNvSpPr txBox="1"/>
-          <p:nvPr/>
-        </p:nvSpPr>
-        <p:spPr>
-          <a:xfrm>
-            <a:off x="4507992" y="3063240"/>
-            <a:ext cx="3063240" cy="411480"/>
-          </a:xfrm>
-          <a:prstGeom prst="rect">
-            <a:avLst/>
-          </a:prstGeom>
-          <a:noFill/>
-          <a:ln/>
-        </p:spPr>
-        <p:txBody>
-          <a:bodyPr wrap="square" lIns="0" tIns="0" rIns="0" bIns="0" rtlCol="0" anchor="t"/>
-          <a:lstStyle/>
-          <a:p>
-            <a:pPr rtl="1" algn="r" indent="0" marL="0">
-              <a:buNone/>
-            </a:pPr>
-            <a:r>
-              <a:rPr lang="ar-SA" altLang="en-US" sz="1100" dirty="0">
+              <a:rPr lang="ar-SA" altLang="en-US" sz="1000" dirty="0">
                 <a:solidFill>
                   <a:srgbClr val="6B7F7E"/>
                 </a:solidFill>
@@ -2328,789 +2929,7 @@
                 <a:ea typeface="Arial" pitchFamily="34" charset="-122"/>
                 <a:cs typeface="Arial" pitchFamily="34" charset="-120"/>
               </a:rPr>
-              <a:t>نوع النشاط؟ المدينة؟ شركاء؟</a:t>
-            </a:r>
-            <a:endParaRPr lang="ar-SA" sz="1100" dirty="0"/>
-          </a:p>
-        </p:txBody>
-      </p:sp>
-      <p:sp>
-        <p:nvSpPr>
-          <p:cNvPr id="14" name="Shape 12"/>
-          <p:cNvSpPr/>
-          <p:nvPr/>
-        </p:nvSpPr>
-        <p:spPr>
-          <a:xfrm>
-            <a:off x="438912" y="1645920"/>
-            <a:ext cx="3520440" cy="1965960"/>
-          </a:xfrm>
-          <a:prstGeom prst="roundRect">
-            <a:avLst>
-              <a:gd name="adj" fmla="val 8372"/>
-            </a:avLst>
-          </a:prstGeom>
-          <a:solidFill>
-            <a:srgbClr val="FFFFFF"/>
-          </a:solidFill>
-          <a:ln w="9525">
-            <a:solidFill>
-              <a:srgbClr val="DDE7E7"/>
-            </a:solidFill>
-            <a:prstDash val="solid"/>
-          </a:ln>
-          <a:effectLst>
-            <a:outerShdw sx="100000" sy="100000" kx="0" ky="0" algn="bl" rotWithShape="0" blurRad="76200" dist="25400" dir="5400000">
-              <a:srgbClr val="17504E">
-                <a:alpha val="8000"/>
-              </a:srgbClr>
-            </a:outerShdw>
-          </a:effectLst>
-        </p:spPr>
-      </p:sp>
-      <p:sp>
-        <p:nvSpPr>
-          <p:cNvPr id="15" name="Shape 13"/>
-          <p:cNvSpPr/>
-          <p:nvPr/>
-        </p:nvSpPr>
-        <p:spPr>
-          <a:xfrm>
-            <a:off x="3273552" y="1874520"/>
-            <a:ext cx="457200" cy="457200"/>
-          </a:xfrm>
-          <a:prstGeom prst="ellipse">
-            <a:avLst/>
-          </a:prstGeom>
-          <a:solidFill>
-            <a:srgbClr val="1F6A68"/>
-          </a:solidFill>
-          <a:ln w="12700">
-            <a:solidFill>
-              <a:srgbClr val="1F6A68"/>
-            </a:solidFill>
-            <a:prstDash val="solid"/>
-          </a:ln>
-        </p:spPr>
-      </p:sp>
-      <p:sp>
-        <p:nvSpPr>
-          <p:cNvPr id="16" name="Text 14"/>
-          <p:cNvSpPr txBox="1"/>
-          <p:nvPr/>
-        </p:nvSpPr>
-        <p:spPr>
-          <a:xfrm>
-            <a:off x="3273552" y="1874520"/>
-            <a:ext cx="457200" cy="457200"/>
-          </a:xfrm>
-          <a:prstGeom prst="rect">
-            <a:avLst/>
-          </a:prstGeom>
-          <a:noFill/>
-          <a:ln/>
-        </p:spPr>
-        <p:txBody>
-          <a:bodyPr wrap="square" lIns="0" tIns="0" rIns="0" bIns="0" rtlCol="0" anchor="ctr"/>
-          <a:lstStyle/>
-          <a:p>
-            <a:pPr rtl="1" algn="ctr" indent="0" marL="0">
-              <a:buNone/>
-            </a:pPr>
-            <a:r>
-              <a:rPr lang="ar-SA" altLang="en-US" sz="1600" b="1" dirty="0">
-                <a:solidFill>
-                  <a:srgbClr val="FFFFFF"/>
-                </a:solidFill>
-                <a:latin typeface="Arial" pitchFamily="34" charset="0"/>
-                <a:ea typeface="Arial" pitchFamily="34" charset="-122"/>
-                <a:cs typeface="Arial" pitchFamily="34" charset="-120"/>
-              </a:rPr>
-              <a:t>3</a:t>
-            </a:r>
-            <a:endParaRPr lang="ar-SA" sz="1600" dirty="0"/>
-          </a:p>
-        </p:txBody>
-      </p:sp>
-      <p:sp>
-        <p:nvSpPr>
-          <p:cNvPr id="17" name="Text 15"/>
-          <p:cNvSpPr txBox="1"/>
-          <p:nvPr/>
-        </p:nvSpPr>
-        <p:spPr>
-          <a:xfrm>
-            <a:off x="667512" y="2468880"/>
-            <a:ext cx="3063240" cy="640080"/>
-          </a:xfrm>
-          <a:prstGeom prst="rect">
-            <a:avLst/>
-          </a:prstGeom>
-          <a:noFill/>
-          <a:ln/>
-        </p:spPr>
-        <p:txBody>
-          <a:bodyPr wrap="square" lIns="0" tIns="0" rIns="0" bIns="0" rtlCol="0" anchor="t"/>
-          <a:lstStyle/>
-          <a:p>
-            <a:pPr rtl="1" algn="r" indent="0" marL="0">
-              <a:buNone/>
-            </a:pPr>
-            <a:r>
-              <a:rPr lang="ar-SA" altLang="en-US" sz="1400" b="1" dirty="0">
-                <a:solidFill>
-                  <a:srgbClr val="17504E"/>
-                </a:solidFill>
-                <a:latin typeface="Arial" pitchFamily="34" charset="0"/>
-                <a:ea typeface="Arial" pitchFamily="34" charset="-122"/>
-                <a:cs typeface="Arial" pitchFamily="34" charset="-120"/>
-              </a:rPr>
-              <a:t>يطابق الاحتياج مع الخدمات الرسمية ويبني رحلة مرتبة</a:t>
-            </a:r>
-            <a:endParaRPr lang="ar-SA" sz="1400" dirty="0"/>
-          </a:p>
-        </p:txBody>
-      </p:sp>
-      <p:sp>
-        <p:nvSpPr>
-          <p:cNvPr id="18" name="Text 16"/>
-          <p:cNvSpPr txBox="1"/>
-          <p:nvPr/>
-        </p:nvSpPr>
-        <p:spPr>
-          <a:xfrm>
-            <a:off x="667512" y="3063240"/>
-            <a:ext cx="3063240" cy="411480"/>
-          </a:xfrm>
-          <a:prstGeom prst="rect">
-            <a:avLst/>
-          </a:prstGeom>
-          <a:noFill/>
-          <a:ln/>
-        </p:spPr>
-        <p:txBody>
-          <a:bodyPr wrap="square" lIns="0" tIns="0" rIns="0" bIns="0" rtlCol="0" anchor="t"/>
-          <a:lstStyle/>
-          <a:p>
-            <a:pPr rtl="1" algn="r" indent="0" marL="0">
-              <a:buNone/>
-            </a:pPr>
-            <a:r>
-              <a:rPr lang="ar-SA" altLang="en-US" sz="1100" dirty="0">
-                <a:solidFill>
-                  <a:srgbClr val="6B7F7E"/>
-                </a:solidFill>
-                <a:latin typeface="Arial" pitchFamily="34" charset="0"/>
-                <a:ea typeface="Arial" pitchFamily="34" charset="-122"/>
-                <a:cs typeface="Arial" pitchFamily="34" charset="-120"/>
-              </a:rPr>
-              <a:t>سجل تجاري ← رخصة بلدي ← تراخيص ← ضريبة</a:t>
-            </a:r>
-            <a:endParaRPr lang="ar-SA" sz="1100" dirty="0"/>
-          </a:p>
-        </p:txBody>
-      </p:sp>
-      <p:sp>
-        <p:nvSpPr>
-          <p:cNvPr id="19" name="Shape 17"/>
-          <p:cNvSpPr/>
-          <p:nvPr/>
-        </p:nvSpPr>
-        <p:spPr>
-          <a:xfrm>
-            <a:off x="8119872" y="3931920"/>
-            <a:ext cx="3520440" cy="1965960"/>
-          </a:xfrm>
-          <a:prstGeom prst="roundRect">
-            <a:avLst>
-              <a:gd name="adj" fmla="val 8372"/>
-            </a:avLst>
-          </a:prstGeom>
-          <a:solidFill>
-            <a:srgbClr val="FFFFFF"/>
-          </a:solidFill>
-          <a:ln w="9525">
-            <a:solidFill>
-              <a:srgbClr val="DDE7E7"/>
-            </a:solidFill>
-            <a:prstDash val="solid"/>
-          </a:ln>
-          <a:effectLst>
-            <a:outerShdw sx="100000" sy="100000" kx="0" ky="0" algn="bl" rotWithShape="0" blurRad="76200" dist="25400" dir="5400000">
-              <a:srgbClr val="17504E">
-                <a:alpha val="8000"/>
-              </a:srgbClr>
-            </a:outerShdw>
-          </a:effectLst>
-        </p:spPr>
-      </p:sp>
-      <p:sp>
-        <p:nvSpPr>
-          <p:cNvPr id="20" name="Shape 18"/>
-          <p:cNvSpPr/>
-          <p:nvPr/>
-        </p:nvSpPr>
-        <p:spPr>
-          <a:xfrm>
-            <a:off x="10954512" y="4160520"/>
-            <a:ext cx="457200" cy="457200"/>
-          </a:xfrm>
-          <a:prstGeom prst="ellipse">
-            <a:avLst/>
-          </a:prstGeom>
-          <a:solidFill>
-            <a:srgbClr val="1F6A68"/>
-          </a:solidFill>
-          <a:ln w="12700">
-            <a:solidFill>
-              <a:srgbClr val="1F6A68"/>
-            </a:solidFill>
-            <a:prstDash val="solid"/>
-          </a:ln>
-        </p:spPr>
-      </p:sp>
-      <p:sp>
-        <p:nvSpPr>
-          <p:cNvPr id="21" name="Text 19"/>
-          <p:cNvSpPr txBox="1"/>
-          <p:nvPr/>
-        </p:nvSpPr>
-        <p:spPr>
-          <a:xfrm>
-            <a:off x="10954512" y="4160520"/>
-            <a:ext cx="457200" cy="457200"/>
-          </a:xfrm>
-          <a:prstGeom prst="rect">
-            <a:avLst/>
-          </a:prstGeom>
-          <a:noFill/>
-          <a:ln/>
-        </p:spPr>
-        <p:txBody>
-          <a:bodyPr wrap="square" lIns="0" tIns="0" rIns="0" bIns="0" rtlCol="0" anchor="ctr"/>
-          <a:lstStyle/>
-          <a:p>
-            <a:pPr rtl="1" algn="ctr" indent="0" marL="0">
-              <a:buNone/>
-            </a:pPr>
-            <a:r>
-              <a:rPr lang="ar-SA" altLang="en-US" sz="1600" b="1" dirty="0">
-                <a:solidFill>
-                  <a:srgbClr val="FFFFFF"/>
-                </a:solidFill>
-                <a:latin typeface="Arial" pitchFamily="34" charset="0"/>
-                <a:ea typeface="Arial" pitchFamily="34" charset="-122"/>
-                <a:cs typeface="Arial" pitchFamily="34" charset="-120"/>
-              </a:rPr>
-              <a:t>4</a:t>
-            </a:r>
-            <a:endParaRPr lang="ar-SA" sz="1600" dirty="0"/>
-          </a:p>
-        </p:txBody>
-      </p:sp>
-      <p:sp>
-        <p:nvSpPr>
-          <p:cNvPr id="22" name="Text 20"/>
-          <p:cNvSpPr txBox="1"/>
-          <p:nvPr/>
-        </p:nvSpPr>
-        <p:spPr>
-          <a:xfrm>
-            <a:off x="8348472" y="4754880"/>
-            <a:ext cx="3063240" cy="640080"/>
-          </a:xfrm>
-          <a:prstGeom prst="rect">
-            <a:avLst/>
-          </a:prstGeom>
-          <a:noFill/>
-          <a:ln/>
-        </p:spPr>
-        <p:txBody>
-          <a:bodyPr wrap="square" lIns="0" tIns="0" rIns="0" bIns="0" rtlCol="0" anchor="t"/>
-          <a:lstStyle/>
-          <a:p>
-            <a:pPr rtl="1" algn="r" indent="0" marL="0">
-              <a:buNone/>
-            </a:pPr>
-            <a:r>
-              <a:rPr lang="ar-SA" altLang="en-US" sz="1400" b="1" dirty="0">
-                <a:solidFill>
-                  <a:srgbClr val="17504E"/>
-                </a:solidFill>
-                <a:latin typeface="Arial" pitchFamily="34" charset="0"/>
-                <a:ea typeface="Arial" pitchFamily="34" charset="-122"/>
-                <a:cs typeface="Arial" pitchFamily="34" charset="-120"/>
-              </a:rPr>
-              <a:t>يفحص المتطلبات ويحسب مؤشر الجاهزية</a:t>
-            </a:r>
-            <a:endParaRPr lang="ar-SA" sz="1400" dirty="0"/>
-          </a:p>
-        </p:txBody>
-      </p:sp>
-      <p:sp>
-        <p:nvSpPr>
-          <p:cNvPr id="23" name="Text 21"/>
-          <p:cNvSpPr txBox="1"/>
-          <p:nvPr/>
-        </p:nvSpPr>
-        <p:spPr>
-          <a:xfrm>
-            <a:off x="8348472" y="5349240"/>
-            <a:ext cx="3063240" cy="411480"/>
-          </a:xfrm>
-          <a:prstGeom prst="rect">
-            <a:avLst/>
-          </a:prstGeom>
-          <a:noFill/>
-          <a:ln/>
-        </p:spPr>
-        <p:txBody>
-          <a:bodyPr wrap="square" lIns="0" tIns="0" rIns="0" bIns="0" rtlCol="0" anchor="t"/>
-          <a:lstStyle/>
-          <a:p>
-            <a:pPr rtl="1" algn="r" indent="0" marL="0">
-              <a:buNone/>
-            </a:pPr>
-            <a:r>
-              <a:rPr lang="ar-SA" altLang="en-US" sz="1100" dirty="0">
-                <a:solidFill>
-                  <a:srgbClr val="6B7F7E"/>
-                </a:solidFill>
-                <a:latin typeface="Arial" pitchFamily="34" charset="0"/>
-                <a:ea typeface="Arial" pitchFamily="34" charset="-122"/>
-                <a:cs typeface="Arial" pitchFamily="34" charset="-120"/>
-              </a:rPr>
-              <a:t>🟢 جاهز · 🟡 يحتاج إكمال · 🔴 لا تبدأ الآن</a:t>
-            </a:r>
-            <a:endParaRPr lang="ar-SA" sz="1100" dirty="0"/>
-          </a:p>
-        </p:txBody>
-      </p:sp>
-      <p:sp>
-        <p:nvSpPr>
-          <p:cNvPr id="24" name="Shape 22"/>
-          <p:cNvSpPr/>
-          <p:nvPr/>
-        </p:nvSpPr>
-        <p:spPr>
-          <a:xfrm>
-            <a:off x="4279392" y="3931920"/>
-            <a:ext cx="3520440" cy="1965960"/>
-          </a:xfrm>
-          <a:prstGeom prst="roundRect">
-            <a:avLst>
-              <a:gd name="adj" fmla="val 8372"/>
-            </a:avLst>
-          </a:prstGeom>
-          <a:solidFill>
-            <a:srgbClr val="FFFFFF"/>
-          </a:solidFill>
-          <a:ln w="9525">
-            <a:solidFill>
-              <a:srgbClr val="DDE7E7"/>
-            </a:solidFill>
-            <a:prstDash val="solid"/>
-          </a:ln>
-          <a:effectLst>
-            <a:outerShdw sx="100000" sy="100000" kx="0" ky="0" algn="bl" rotWithShape="0" blurRad="76200" dist="25400" dir="5400000">
-              <a:srgbClr val="17504E">
-                <a:alpha val="8000"/>
-              </a:srgbClr>
-            </a:outerShdw>
-          </a:effectLst>
-        </p:spPr>
-      </p:sp>
-      <p:sp>
-        <p:nvSpPr>
-          <p:cNvPr id="25" name="Shape 23"/>
-          <p:cNvSpPr/>
-          <p:nvPr/>
-        </p:nvSpPr>
-        <p:spPr>
-          <a:xfrm>
-            <a:off x="7114032" y="4160520"/>
-            <a:ext cx="457200" cy="457200"/>
-          </a:xfrm>
-          <a:prstGeom prst="ellipse">
-            <a:avLst/>
-          </a:prstGeom>
-          <a:solidFill>
-            <a:srgbClr val="1F6A68"/>
-          </a:solidFill>
-          <a:ln w="12700">
-            <a:solidFill>
-              <a:srgbClr val="1F6A68"/>
-            </a:solidFill>
-            <a:prstDash val="solid"/>
-          </a:ln>
-        </p:spPr>
-      </p:sp>
-      <p:sp>
-        <p:nvSpPr>
-          <p:cNvPr id="26" name="Text 24"/>
-          <p:cNvSpPr txBox="1"/>
-          <p:nvPr/>
-        </p:nvSpPr>
-        <p:spPr>
-          <a:xfrm>
-            <a:off x="7114032" y="4160520"/>
-            <a:ext cx="457200" cy="457200"/>
-          </a:xfrm>
-          <a:prstGeom prst="rect">
-            <a:avLst/>
-          </a:prstGeom>
-          <a:noFill/>
-          <a:ln/>
-        </p:spPr>
-        <p:txBody>
-          <a:bodyPr wrap="square" lIns="0" tIns="0" rIns="0" bIns="0" rtlCol="0" anchor="ctr"/>
-          <a:lstStyle/>
-          <a:p>
-            <a:pPr rtl="1" algn="ctr" indent="0" marL="0">
-              <a:buNone/>
-            </a:pPr>
-            <a:r>
-              <a:rPr lang="ar-SA" altLang="en-US" sz="1600" b="1" dirty="0">
-                <a:solidFill>
-                  <a:srgbClr val="FFFFFF"/>
-                </a:solidFill>
-                <a:latin typeface="Arial" pitchFamily="34" charset="0"/>
-                <a:ea typeface="Arial" pitchFamily="34" charset="-122"/>
-                <a:cs typeface="Arial" pitchFamily="34" charset="-120"/>
-              </a:rPr>
-              <a:t>5</a:t>
-            </a:r>
-            <a:endParaRPr lang="ar-SA" sz="1600" dirty="0"/>
-          </a:p>
-        </p:txBody>
-      </p:sp>
-      <p:sp>
-        <p:nvSpPr>
-          <p:cNvPr id="27" name="Text 25"/>
-          <p:cNvSpPr txBox="1"/>
-          <p:nvPr/>
-        </p:nvSpPr>
-        <p:spPr>
-          <a:xfrm>
-            <a:off x="4507992" y="4754880"/>
-            <a:ext cx="3063240" cy="640080"/>
-          </a:xfrm>
-          <a:prstGeom prst="rect">
-            <a:avLst/>
-          </a:prstGeom>
-          <a:noFill/>
-          <a:ln/>
-        </p:spPr>
-        <p:txBody>
-          <a:bodyPr wrap="square" lIns="0" tIns="0" rIns="0" bIns="0" rtlCol="0" anchor="t"/>
-          <a:lstStyle/>
-          <a:p>
-            <a:pPr rtl="1" algn="r" indent="0" marL="0">
-              <a:buNone/>
-            </a:pPr>
-            <a:r>
-              <a:rPr lang="ar-SA" altLang="en-US" sz="1400" b="1" dirty="0">
-                <a:solidFill>
-                  <a:srgbClr val="17504E"/>
-                </a:solidFill>
-                <a:latin typeface="Arial" pitchFamily="34" charset="0"/>
-                <a:ea typeface="Arial" pitchFamily="34" charset="-122"/>
-                <a:cs typeface="Arial" pitchFamily="34" charset="-120"/>
-              </a:rPr>
-              <a:t>عند وجود عائق: ميزة «لو ما أقدر؟»</a:t>
-            </a:r>
-            <a:endParaRPr lang="ar-SA" sz="1400" dirty="0"/>
-          </a:p>
-        </p:txBody>
-      </p:sp>
-      <p:sp>
-        <p:nvSpPr>
-          <p:cNvPr id="28" name="Text 26"/>
-          <p:cNvSpPr txBox="1"/>
-          <p:nvPr/>
-        </p:nvSpPr>
-        <p:spPr>
-          <a:xfrm>
-            <a:off x="4507992" y="5349240"/>
-            <a:ext cx="3063240" cy="411480"/>
-          </a:xfrm>
-          <a:prstGeom prst="rect">
-            <a:avLst/>
-          </a:prstGeom>
-          <a:noFill/>
-          <a:ln/>
-        </p:spPr>
-        <p:txBody>
-          <a:bodyPr wrap="square" lIns="0" tIns="0" rIns="0" bIns="0" rtlCol="0" anchor="t"/>
-          <a:lstStyle/>
-          <a:p>
-            <a:pPr rtl="1" algn="r" indent="0" marL="0">
-              <a:buNone/>
-            </a:pPr>
-            <a:r>
-              <a:rPr lang="ar-SA" altLang="en-US" sz="1100" dirty="0">
-                <a:solidFill>
-                  <a:srgbClr val="6B7F7E"/>
-                </a:solidFill>
-                <a:latin typeface="Arial" pitchFamily="34" charset="0"/>
-                <a:ea typeface="Arial" pitchFamily="34" charset="-122"/>
-                <a:cs typeface="Arial" pitchFamily="34" charset="-120"/>
-              </a:rPr>
-              <a:t>تشرح السبب وتعرض المسار الرسمي للحل</a:t>
-            </a:r>
-            <a:endParaRPr lang="ar-SA" sz="1100" dirty="0"/>
-          </a:p>
-        </p:txBody>
-      </p:sp>
-      <p:sp>
-        <p:nvSpPr>
-          <p:cNvPr id="29" name="Shape 27"/>
-          <p:cNvSpPr/>
-          <p:nvPr/>
-        </p:nvSpPr>
-        <p:spPr>
-          <a:xfrm>
-            <a:off x="438912" y="3931920"/>
-            <a:ext cx="3520440" cy="1965960"/>
-          </a:xfrm>
-          <a:prstGeom prst="roundRect">
-            <a:avLst>
-              <a:gd name="adj" fmla="val 8372"/>
-            </a:avLst>
-          </a:prstGeom>
-          <a:solidFill>
-            <a:srgbClr val="FFFFFF"/>
-          </a:solidFill>
-          <a:ln w="9525">
-            <a:solidFill>
-              <a:srgbClr val="DDE7E7"/>
-            </a:solidFill>
-            <a:prstDash val="solid"/>
-          </a:ln>
-          <a:effectLst>
-            <a:outerShdw sx="100000" sy="100000" kx="0" ky="0" algn="bl" rotWithShape="0" blurRad="76200" dist="25400" dir="5400000">
-              <a:srgbClr val="17504E">
-                <a:alpha val="8000"/>
-              </a:srgbClr>
-            </a:outerShdw>
-          </a:effectLst>
-        </p:spPr>
-      </p:sp>
-      <p:sp>
-        <p:nvSpPr>
-          <p:cNvPr id="30" name="Shape 28"/>
-          <p:cNvSpPr/>
-          <p:nvPr/>
-        </p:nvSpPr>
-        <p:spPr>
-          <a:xfrm>
-            <a:off x="3273552" y="4160520"/>
-            <a:ext cx="457200" cy="457200"/>
-          </a:xfrm>
-          <a:prstGeom prst="ellipse">
-            <a:avLst/>
-          </a:prstGeom>
-          <a:solidFill>
-            <a:srgbClr val="1F6A68"/>
-          </a:solidFill>
-          <a:ln w="12700">
-            <a:solidFill>
-              <a:srgbClr val="1F6A68"/>
-            </a:solidFill>
-            <a:prstDash val="solid"/>
-          </a:ln>
-        </p:spPr>
-      </p:sp>
-      <p:sp>
-        <p:nvSpPr>
-          <p:cNvPr id="31" name="Text 29"/>
-          <p:cNvSpPr txBox="1"/>
-          <p:nvPr/>
-        </p:nvSpPr>
-        <p:spPr>
-          <a:xfrm>
-            <a:off x="3273552" y="4160520"/>
-            <a:ext cx="457200" cy="457200"/>
-          </a:xfrm>
-          <a:prstGeom prst="rect">
-            <a:avLst/>
-          </a:prstGeom>
-          <a:noFill/>
-          <a:ln/>
-        </p:spPr>
-        <p:txBody>
-          <a:bodyPr wrap="square" lIns="0" tIns="0" rIns="0" bIns="0" rtlCol="0" anchor="ctr"/>
-          <a:lstStyle/>
-          <a:p>
-            <a:pPr rtl="1" algn="ctr" indent="0" marL="0">
-              <a:buNone/>
-            </a:pPr>
-            <a:r>
-              <a:rPr lang="ar-SA" altLang="en-US" sz="1600" b="1" dirty="0">
-                <a:solidFill>
-                  <a:srgbClr val="FFFFFF"/>
-                </a:solidFill>
-                <a:latin typeface="Arial" pitchFamily="34" charset="0"/>
-                <a:ea typeface="Arial" pitchFamily="34" charset="-122"/>
-                <a:cs typeface="Arial" pitchFamily="34" charset="-120"/>
-              </a:rPr>
-              <a:t>6</a:t>
-            </a:r>
-            <a:endParaRPr lang="ar-SA" sz="1600" dirty="0"/>
-          </a:p>
-        </p:txBody>
-      </p:sp>
-      <p:sp>
-        <p:nvSpPr>
-          <p:cNvPr id="32" name="Text 30"/>
-          <p:cNvSpPr txBox="1"/>
-          <p:nvPr/>
-        </p:nvSpPr>
-        <p:spPr>
-          <a:xfrm>
-            <a:off x="667512" y="4754880"/>
-            <a:ext cx="3063240" cy="640080"/>
-          </a:xfrm>
-          <a:prstGeom prst="rect">
-            <a:avLst/>
-          </a:prstGeom>
-          <a:noFill/>
-          <a:ln/>
-        </p:spPr>
-        <p:txBody>
-          <a:bodyPr wrap="square" lIns="0" tIns="0" rIns="0" bIns="0" rtlCol="0" anchor="t"/>
-          <a:lstStyle/>
-          <a:p>
-            <a:pPr rtl="1" algn="r" indent="0" marL="0">
-              <a:buNone/>
-            </a:pPr>
-            <a:r>
-              <a:rPr lang="ar-SA" altLang="en-US" sz="1400" b="1" dirty="0">
-                <a:solidFill>
-                  <a:srgbClr val="17504E"/>
-                </a:solidFill>
-                <a:latin typeface="Arial" pitchFamily="34" charset="0"/>
-                <a:ea typeface="Arial" pitchFamily="34" charset="-122"/>
-                <a:cs typeface="Arial" pitchFamily="34" charset="-120"/>
-              </a:rPr>
-              <a:t>يحدد خطوتك التالية</a:t>
-            </a:r>
-            <a:endParaRPr lang="ar-SA" sz="1400" dirty="0"/>
-          </a:p>
-        </p:txBody>
-      </p:sp>
-      <p:sp>
-        <p:nvSpPr>
-          <p:cNvPr id="33" name="Text 31"/>
-          <p:cNvSpPr txBox="1"/>
-          <p:nvPr/>
-        </p:nvSpPr>
-        <p:spPr>
-          <a:xfrm>
-            <a:off x="667512" y="5349240"/>
-            <a:ext cx="3063240" cy="411480"/>
-          </a:xfrm>
-          <a:prstGeom prst="rect">
-            <a:avLst/>
-          </a:prstGeom>
-          <a:noFill/>
-          <a:ln/>
-        </p:spPr>
-        <p:txBody>
-          <a:bodyPr wrap="square" lIns="0" tIns="0" rIns="0" bIns="0" rtlCol="0" anchor="t"/>
-          <a:lstStyle/>
-          <a:p>
-            <a:pPr rtl="1" algn="r" indent="0" marL="0">
-              <a:buNone/>
-            </a:pPr>
-            <a:r>
-              <a:rPr lang="ar-SA" altLang="en-US" sz="1100" dirty="0">
-                <a:solidFill>
-                  <a:srgbClr val="6B7F7E"/>
-                </a:solidFill>
-                <a:latin typeface="Arial" pitchFamily="34" charset="0"/>
-                <a:ea typeface="Arial" pitchFamily="34" charset="-122"/>
-                <a:cs typeface="Arial" pitchFamily="34" charset="-120"/>
-              </a:rPr>
-              <a:t>زر ينقلك مباشرة للقناة الرسمية</a:t>
-            </a:r>
-            <a:endParaRPr lang="ar-SA" sz="1100" dirty="0"/>
-          </a:p>
-        </p:txBody>
-      </p:sp>
-      <p:sp>
-        <p:nvSpPr>
-          <p:cNvPr id="34" name="Text 32"/>
-          <p:cNvSpPr txBox="1"/>
-          <p:nvPr/>
-        </p:nvSpPr>
-        <p:spPr>
-          <a:xfrm>
-            <a:off x="548640" y="6355080"/>
-            <a:ext cx="3657600" cy="274320"/>
-          </a:xfrm>
-          <a:prstGeom prst="rect">
-            <a:avLst/>
-          </a:prstGeom>
-          <a:noFill/>
-          <a:ln/>
-        </p:spPr>
-        <p:txBody>
-          <a:bodyPr wrap="square" lIns="0" tIns="0" rIns="0" bIns="0" rtlCol="0" anchor="t"/>
-          <a:lstStyle/>
-          <a:p>
-            <a:pPr rtl="1" algn="l" indent="0" marL="0">
-              <a:buNone/>
-            </a:pPr>
-            <a:r>
-              <a:rPr lang="ar-SA" altLang="en-US" sz="1000" dirty="0">
-                <a:solidFill>
-                  <a:srgbClr val="6B7F7E"/>
-                </a:solidFill>
-                <a:latin typeface="Arial" pitchFamily="34" charset="0"/>
-                <a:ea typeface="Arial" pitchFamily="34" charset="-122"/>
-                <a:cs typeface="Arial" pitchFamily="34" charset="-120"/>
-              </a:rPr>
-              <a:t>shamal-ai.vercel.app</a:t>
-            </a:r>
-            <a:endParaRPr lang="ar-SA" sz="1000" dirty="0"/>
-          </a:p>
-        </p:txBody>
-      </p:sp>
-      <p:sp>
-        <p:nvSpPr>
-          <p:cNvPr id="35" name="Text 33"/>
-          <p:cNvSpPr txBox="1"/>
-          <p:nvPr/>
-        </p:nvSpPr>
-        <p:spPr>
-          <a:xfrm>
-            <a:off x="7068312" y="6355080"/>
-            <a:ext cx="4572000" cy="274320"/>
-          </a:xfrm>
-          <a:prstGeom prst="rect">
-            <a:avLst/>
-          </a:prstGeom>
-          <a:noFill/>
-          <a:ln/>
-        </p:spPr>
-        <p:txBody>
-          <a:bodyPr wrap="square" lIns="0" tIns="0" rIns="0" bIns="0" rtlCol="0" anchor="t"/>
-          <a:lstStyle/>
-          <a:p>
-            <a:pPr rtl="1" algn="r" indent="0" marL="0">
-              <a:buNone/>
-            </a:pPr>
-            <a:r>
-              <a:rPr lang="ar-SA" altLang="en-US" sz="1000" dirty="0">
-                <a:solidFill>
-                  <a:srgbClr val="6B7F7E"/>
-                </a:solidFill>
-                <a:latin typeface="Arial" pitchFamily="34" charset="0"/>
-                <a:ea typeface="Arial" pitchFamily="34" charset="-122"/>
-                <a:cs typeface="Arial" pitchFamily="34" charset="-120"/>
-              </a:rPr>
-              <a:t>شمال AI · ENBTHON 2026 · 2</a:t>
+              <a:t>شمال AI · التقنية · 2</a:t>
             </a:r>
             <a:endParaRPr lang="ar-SA" sz="1000" dirty="0"/>
           </a:p>
@@ -3181,7 +3000,7 @@
                 <a:ea typeface="Arial" pitchFamily="34" charset="-122"/>
                 <a:cs typeface="Arial" pitchFamily="34" charset="-120"/>
               </a:rPr>
-              <a:t>واجهة التطبيق (ما يراه المستخدم)</a:t>
+              <a:t>الواجهة</a:t>
             </a:r>
             <a:endParaRPr lang="ar-SA" sz="3000" dirty="0"/>
           </a:p>
@@ -3220,7 +3039,7 @@
                 <a:ea typeface="Arial" pitchFamily="34" charset="-122"/>
                 <a:cs typeface="Arial" pitchFamily="34" charset="-120"/>
               </a:rPr>
-              <a:t>أدوات مفتوحة المصدر ومشهورة عالمياً</a:t>
+              <a:t>أدوات مفتوحة المصدر، قياسية، ومدعومة عالمياً</a:t>
             </a:r>
             <a:endParaRPr lang="ar-SA" sz="1400" dirty="0"/>
           </a:p>
@@ -3234,12 +3053,12 @@
         </p:nvSpPr>
         <p:spPr>
           <a:xfrm>
-            <a:off x="548640" y="1645920"/>
-            <a:ext cx="11091672" cy="1005840"/>
+            <a:off x="6231636" y="1645920"/>
+            <a:ext cx="5408676" cy="2057400"/>
           </a:xfrm>
           <a:prstGeom prst="roundRect">
             <a:avLst>
-              <a:gd name="adj" fmla="val 16364"/>
+              <a:gd name="adj" fmla="val 8000"/>
             </a:avLst>
           </a:prstGeom>
           <a:solidFill>
@@ -3268,12 +3087,12 @@
         </p:nvSpPr>
         <p:spPr>
           <a:xfrm>
-            <a:off x="10725912" y="1783080"/>
-            <a:ext cx="731520" cy="731520"/>
+            <a:off x="10588752" y="1901952"/>
+            <a:ext cx="777240" cy="777240"/>
           </a:xfrm>
           <a:prstGeom prst="roundRect">
             <a:avLst>
-              <a:gd name="adj" fmla="val 20000"/>
+              <a:gd name="adj" fmla="val 18824"/>
             </a:avLst>
           </a:prstGeom>
           <a:solidFill>
@@ -3295,8 +3114,8 @@
         </p:nvSpPr>
         <p:spPr>
           <a:xfrm>
-            <a:off x="822960" y="1810512"/>
-            <a:ext cx="9811512" cy="365760"/>
+            <a:off x="6505956" y="1965960"/>
+            <a:ext cx="4128516" cy="457200"/>
           </a:xfrm>
           <a:prstGeom prst="rect">
             <a:avLst/>
@@ -3312,7 +3131,7 @@
               <a:buNone/>
             </a:pPr>
             <a:r>
-              <a:rPr lang="ar-SA" altLang="en-US" sz="1800" b="1" dirty="0">
+              <a:rPr lang="ar-SA" altLang="en-US" sz="2200" b="1" dirty="0">
                 <a:solidFill>
                   <a:srgbClr val="17504E"/>
                 </a:solidFill>
@@ -3320,9 +3139,9 @@
                 <a:ea typeface="Arial" pitchFamily="34" charset="-122"/>
                 <a:cs typeface="Arial" pitchFamily="34" charset="-120"/>
               </a:rPr>
-              <a:t>Next.js</a:t>
-            </a:r>
-            <a:endParaRPr lang="ar-SA" sz="1800" dirty="0"/>
+              <a:t>Next.js 16</a:t>
+            </a:r>
+            <a:endParaRPr lang="ar-SA" sz="2200" dirty="0"/>
           </a:p>
         </p:txBody>
       </p:sp>
@@ -3334,8 +3153,8 @@
         </p:nvSpPr>
         <p:spPr>
           <a:xfrm>
-            <a:off x="822960" y="2176272"/>
-            <a:ext cx="9811512" cy="411480"/>
+            <a:off x="6505956" y="2606040"/>
+            <a:ext cx="4860036" cy="914400"/>
           </a:xfrm>
           <a:prstGeom prst="rect">
             <a:avLst/>
@@ -3359,7 +3178,7 @@
                 <a:ea typeface="Arial" pitchFamily="34" charset="-122"/>
                 <a:cs typeface="Arial" pitchFamily="34" charset="-120"/>
               </a:rPr>
-              <a:t>إطار العمل الذي يبني صفحات التطبيق ويجعلها سريعة، ويشغّل خدمات الخادم (تسجيل الدخول والبيانات)</a:t>
+              <a:t>إطار العمل: يبني الصفحات، ويشغّل مسارات الخادم للدخول والبيانات، وينشر على Vercel بأمر واحد</a:t>
             </a:r>
             <a:endParaRPr lang="ar-SA" sz="1300" dirty="0"/>
           </a:p>
@@ -3373,12 +3192,12 @@
         </p:nvSpPr>
         <p:spPr>
           <a:xfrm>
-            <a:off x="548640" y="2852928"/>
-            <a:ext cx="11091672" cy="1005840"/>
+            <a:off x="548640" y="1645920"/>
+            <a:ext cx="5408676" cy="2057400"/>
           </a:xfrm>
           <a:prstGeom prst="roundRect">
             <a:avLst>
-              <a:gd name="adj" fmla="val 16364"/>
+              <a:gd name="adj" fmla="val 8000"/>
             </a:avLst>
           </a:prstGeom>
           <a:solidFill>
@@ -3407,12 +3226,12 @@
         </p:nvSpPr>
         <p:spPr>
           <a:xfrm>
-            <a:off x="10725912" y="2990088"/>
-            <a:ext cx="731520" cy="731520"/>
+            <a:off x="4905756" y="1901952"/>
+            <a:ext cx="777240" cy="777240"/>
           </a:xfrm>
           <a:prstGeom prst="roundRect">
             <a:avLst>
-              <a:gd name="adj" fmla="val 20000"/>
+              <a:gd name="adj" fmla="val 18824"/>
             </a:avLst>
           </a:prstGeom>
           <a:solidFill>
@@ -3434,8 +3253,8 @@
         </p:nvSpPr>
         <p:spPr>
           <a:xfrm>
-            <a:off x="822960" y="3017520"/>
-            <a:ext cx="9811512" cy="365760"/>
+            <a:off x="822960" y="1965960"/>
+            <a:ext cx="4128516" cy="457200"/>
           </a:xfrm>
           <a:prstGeom prst="rect">
             <a:avLst/>
@@ -3451,7 +3270,7 @@
               <a:buNone/>
             </a:pPr>
             <a:r>
-              <a:rPr lang="ar-SA" altLang="en-US" sz="1800" b="1" dirty="0">
+              <a:rPr lang="ar-SA" altLang="en-US" sz="2200" b="1" dirty="0">
                 <a:solidFill>
                   <a:srgbClr val="17504E"/>
                 </a:solidFill>
@@ -3459,9 +3278,9 @@
                 <a:ea typeface="Arial" pitchFamily="34" charset="-122"/>
                 <a:cs typeface="Arial" pitchFamily="34" charset="-120"/>
               </a:rPr>
-              <a:t>React</a:t>
-            </a:r>
-            <a:endParaRPr lang="ar-SA" sz="1800" dirty="0"/>
+              <a:t>React 19</a:t>
+            </a:r>
+            <a:endParaRPr lang="ar-SA" sz="2200" dirty="0"/>
           </a:p>
         </p:txBody>
       </p:sp>
@@ -3473,8 +3292,8 @@
         </p:nvSpPr>
         <p:spPr>
           <a:xfrm>
-            <a:off x="822960" y="3383280"/>
-            <a:ext cx="9811512" cy="411480"/>
+            <a:off x="822960" y="2606040"/>
+            <a:ext cx="4860036" cy="914400"/>
           </a:xfrm>
           <a:prstGeom prst="rect">
             <a:avLst/>
@@ -3498,7 +3317,7 @@
                 <a:ea typeface="Arial" pitchFamily="34" charset="-122"/>
                 <a:cs typeface="Arial" pitchFamily="34" charset="-120"/>
               </a:rPr>
-              <a:t>مكتبة بناء الشاشات التفاعلية: قائمة التحقق، الأزرار، مؤشر الجاهزية</a:t>
+              <a:t>بناء الشاشات التفاعلية: قائمة التحقق، مؤشر الجاهزية، خطوات الرحلة</a:t>
             </a:r>
             <a:endParaRPr lang="ar-SA" sz="1300" dirty="0"/>
           </a:p>
@@ -3512,12 +3331,12 @@
         </p:nvSpPr>
         <p:spPr>
           <a:xfrm>
-            <a:off x="548640" y="4059936"/>
-            <a:ext cx="11091672" cy="1005840"/>
+            <a:off x="6231636" y="3977640"/>
+            <a:ext cx="5408676" cy="2057400"/>
           </a:xfrm>
           <a:prstGeom prst="roundRect">
             <a:avLst>
-              <a:gd name="adj" fmla="val 16364"/>
+              <a:gd name="adj" fmla="val 8000"/>
             </a:avLst>
           </a:prstGeom>
           <a:solidFill>
@@ -3546,12 +3365,12 @@
         </p:nvSpPr>
         <p:spPr>
           <a:xfrm>
-            <a:off x="10725912" y="4197096"/>
-            <a:ext cx="731520" cy="731520"/>
+            <a:off x="10588752" y="4233672"/>
+            <a:ext cx="777240" cy="777240"/>
           </a:xfrm>
           <a:prstGeom prst="roundRect">
             <a:avLst>
-              <a:gd name="adj" fmla="val 20000"/>
+              <a:gd name="adj" fmla="val 18824"/>
             </a:avLst>
           </a:prstGeom>
           <a:solidFill>
@@ -3573,8 +3392,8 @@
         </p:nvSpPr>
         <p:spPr>
           <a:xfrm>
-            <a:off x="822960" y="4224528"/>
-            <a:ext cx="9811512" cy="365760"/>
+            <a:off x="6505956" y="4297680"/>
+            <a:ext cx="4128516" cy="457200"/>
           </a:xfrm>
           <a:prstGeom prst="rect">
             <a:avLst/>
@@ -3590,7 +3409,7 @@
               <a:buNone/>
             </a:pPr>
             <a:r>
-              <a:rPr lang="ar-SA" altLang="en-US" sz="1800" b="1" dirty="0">
+              <a:rPr lang="ar-SA" altLang="en-US" sz="2200" b="1" dirty="0">
                 <a:solidFill>
                   <a:srgbClr val="17504E"/>
                 </a:solidFill>
@@ -3600,7 +3419,7 @@
               </a:rPr>
               <a:t>TypeScript</a:t>
             </a:r>
-            <a:endParaRPr lang="ar-SA" sz="1800" dirty="0"/>
+            <a:endParaRPr lang="ar-SA" sz="2200" dirty="0"/>
           </a:p>
         </p:txBody>
       </p:sp>
@@ -3612,8 +3431,8 @@
         </p:nvSpPr>
         <p:spPr>
           <a:xfrm>
-            <a:off x="822960" y="4590288"/>
-            <a:ext cx="9811512" cy="411480"/>
+            <a:off x="6505956" y="4937760"/>
+            <a:ext cx="4860036" cy="914400"/>
           </a:xfrm>
           <a:prstGeom prst="rect">
             <a:avLst/>
@@ -3637,7 +3456,7 @@
                 <a:ea typeface="Arial" pitchFamily="34" charset="-122"/>
                 <a:cs typeface="Arial" pitchFamily="34" charset="-120"/>
               </a:rPr>
-              <a:t>لغة برمجة تكتشف الأخطاء قبل وصولها للمستخدم</a:t>
+              <a:t>أنواع صارمة لكل خدمة ومتطلب، فتُكتشف الأخطاء وقت الكتابة لا وقت العرض</a:t>
             </a:r>
             <a:endParaRPr lang="ar-SA" sz="1300" dirty="0"/>
           </a:p>
@@ -3651,12 +3470,12 @@
         </p:nvSpPr>
         <p:spPr>
           <a:xfrm>
-            <a:off x="548640" y="5266944"/>
-            <a:ext cx="11091672" cy="1005840"/>
+            <a:off x="548640" y="3977640"/>
+            <a:ext cx="5408676" cy="2057400"/>
           </a:xfrm>
           <a:prstGeom prst="roundRect">
             <a:avLst>
-              <a:gd name="adj" fmla="val 16364"/>
+              <a:gd name="adj" fmla="val 8000"/>
             </a:avLst>
           </a:prstGeom>
           <a:solidFill>
@@ -3685,12 +3504,12 @@
         </p:nvSpPr>
         <p:spPr>
           <a:xfrm>
-            <a:off x="10725912" y="5404104"/>
-            <a:ext cx="731520" cy="731520"/>
+            <a:off x="4905756" y="4233672"/>
+            <a:ext cx="777240" cy="777240"/>
           </a:xfrm>
           <a:prstGeom prst="roundRect">
             <a:avLst>
-              <a:gd name="adj" fmla="val 20000"/>
+              <a:gd name="adj" fmla="val 18824"/>
             </a:avLst>
           </a:prstGeom>
           <a:solidFill>
@@ -3712,8 +3531,8 @@
         </p:nvSpPr>
         <p:spPr>
           <a:xfrm>
-            <a:off x="822960" y="5431536"/>
-            <a:ext cx="9811512" cy="365760"/>
+            <a:off x="822960" y="4297680"/>
+            <a:ext cx="4128516" cy="457200"/>
           </a:xfrm>
           <a:prstGeom prst="rect">
             <a:avLst/>
@@ -3729,7 +3548,7 @@
               <a:buNone/>
             </a:pPr>
             <a:r>
-              <a:rPr lang="ar-SA" altLang="en-US" sz="1800" b="1" dirty="0">
+              <a:rPr lang="ar-SA" altLang="en-US" sz="2200" b="1" dirty="0">
                 <a:solidFill>
                   <a:srgbClr val="17504E"/>
                 </a:solidFill>
@@ -3737,9 +3556,9 @@
                 <a:ea typeface="Arial" pitchFamily="34" charset="-122"/>
                 <a:cs typeface="Arial" pitchFamily="34" charset="-120"/>
               </a:rPr>
-              <a:t>Tailwind CSS</a:t>
-            </a:r>
-            <a:endParaRPr lang="ar-SA" sz="1800" dirty="0"/>
+              <a:t>Tailwind CSS 4</a:t>
+            </a:r>
+            <a:endParaRPr lang="ar-SA" sz="2200" dirty="0"/>
           </a:p>
         </p:txBody>
       </p:sp>
@@ -3751,8 +3570,8 @@
         </p:nvSpPr>
         <p:spPr>
           <a:xfrm>
-            <a:off x="822960" y="5797296"/>
-            <a:ext cx="9811512" cy="411480"/>
+            <a:off x="822960" y="4937760"/>
+            <a:ext cx="4860036" cy="914400"/>
           </a:xfrm>
           <a:prstGeom prst="rect">
             <a:avLst/>
@@ -3776,7 +3595,7 @@
                 <a:ea typeface="Arial" pitchFamily="34" charset="-122"/>
                 <a:cs typeface="Arial" pitchFamily="34" charset="-120"/>
               </a:rPr>
-              <a:t>أداة التصميم التي أعطت التطبيق ألوانه وبطاقاته الدائرية</a:t>
+              <a:t>نظام تصميم بمتغيرات لون واحدة: الأخضر المزرق والبطاقات الدائرية وواجهة RTL</a:t>
             </a:r>
             <a:endParaRPr lang="ar-SA" sz="1300" dirty="0"/>
           </a:p>
@@ -3784,30 +3603,42 @@
       </p:sp>
       <p:sp>
         <p:nvSpPr>
-          <p:cNvPr id="20" name="Shape 18"/>
-          <p:cNvSpPr/>
-          <p:nvPr/>
-        </p:nvSpPr>
-        <p:spPr>
-          <a:xfrm>
-            <a:off x="548640" y="5852160"/>
-            <a:ext cx="11091672" cy="411480"/>
-          </a:xfrm>
-          <a:prstGeom prst="roundRect">
-            <a:avLst>
-              <a:gd name="adj" fmla="val 55556"/>
-            </a:avLst>
-          </a:prstGeom>
-          <a:solidFill>
-            <a:srgbClr val="E3F0EF"/>
-          </a:solidFill>
-          <a:ln w="12700">
-            <a:solidFill>
-              <a:srgbClr val="E3F0EF"/>
-            </a:solidFill>
-            <a:prstDash val="solid"/>
-          </a:ln>
-        </p:spPr>
+          <p:cNvPr id="20" name="Text 18"/>
+          <p:cNvSpPr txBox="1"/>
+          <p:nvPr/>
+        </p:nvSpPr>
+        <p:spPr>
+          <a:xfrm>
+            <a:off x="548640" y="6382512"/>
+            <a:ext cx="3657600" cy="274320"/>
+          </a:xfrm>
+          <a:prstGeom prst="rect">
+            <a:avLst/>
+          </a:prstGeom>
+          <a:noFill/>
+          <a:ln/>
+        </p:spPr>
+        <p:txBody>
+          <a:bodyPr wrap="square" lIns="0" tIns="0" rIns="0" bIns="0" rtlCol="0" anchor="t"/>
+          <a:lstStyle/>
+          <a:p>
+            <a:pPr rtl="1" algn="l" indent="0" marL="0">
+              <a:buNone/>
+            </a:pPr>
+            <a:r>
+              <a:rPr lang="ar-SA" altLang="en-US" sz="1000" dirty="0">
+                <a:solidFill>
+                  <a:srgbClr val="6B7F7E"/>
+                </a:solidFill>
+                <a:latin typeface="Arial" pitchFamily="34" charset="0"/>
+                <a:ea typeface="Arial" pitchFamily="34" charset="-122"/>
+                <a:cs typeface="Arial" pitchFamily="34" charset="-120"/>
+              </a:rPr>
+              <a:t>shamal-ai.vercel.app</a:t>
+            </a:r>
+            <a:endParaRPr lang="ar-SA" sz="1000" dirty="0"/>
+          </a:p>
+        </p:txBody>
       </p:sp>
       <p:sp>
         <p:nvSpPr>
@@ -3817,59 +3648,20 @@
         </p:nvSpPr>
         <p:spPr>
           <a:xfrm>
-            <a:off x="548640" y="5852160"/>
-            <a:ext cx="11091672" cy="411480"/>
-          </a:xfrm>
-          <a:prstGeom prst="rect">
-            <a:avLst/>
-          </a:prstGeom>
-          <a:noFill/>
-          <a:ln/>
-        </p:spPr>
-        <p:txBody>
-          <a:bodyPr wrap="square" lIns="0" tIns="0" rIns="0" bIns="0" rtlCol="0" anchor="ctr"/>
-          <a:lstStyle/>
-          <a:p>
-            <a:pPr rtl="1" algn="ctr" indent="0" marL="0">
-              <a:buNone/>
-            </a:pPr>
-            <a:r>
-              <a:rPr lang="ar-SA" altLang="en-US" sz="1200" b="1" dirty="0">
-                <a:solidFill>
-                  <a:srgbClr val="17504E"/>
-                </a:solidFill>
-                <a:latin typeface="Arial" pitchFamily="34" charset="0"/>
-                <a:ea typeface="Arial" pitchFamily="34" charset="-122"/>
-                <a:cs typeface="Arial" pitchFamily="34" charset="-120"/>
-              </a:rPr>
-              <a:t>تصميم جوال أولاً: يعمل على أي هاتف أو متصفح بدون تحميل تطبيق</a:t>
-            </a:r>
-            <a:endParaRPr lang="ar-SA" sz="1200" dirty="0"/>
-          </a:p>
-        </p:txBody>
-      </p:sp>
-      <p:sp>
-        <p:nvSpPr>
-          <p:cNvPr id="22" name="Text 20"/>
-          <p:cNvSpPr txBox="1"/>
-          <p:nvPr/>
-        </p:nvSpPr>
-        <p:spPr>
-          <a:xfrm>
-            <a:off x="548640" y="6355080"/>
-            <a:ext cx="3657600" cy="274320"/>
-          </a:xfrm>
-          <a:prstGeom prst="rect">
-            <a:avLst/>
-          </a:prstGeom>
-          <a:noFill/>
-          <a:ln/>
-        </p:spPr>
-        <p:txBody>
-          <a:bodyPr wrap="square" lIns="0" tIns="0" rIns="0" bIns="0" rtlCol="0" anchor="t"/>
-          <a:lstStyle/>
-          <a:p>
-            <a:pPr rtl="1" algn="l" indent="0" marL="0">
+            <a:off x="7068312" y="6382512"/>
+            <a:ext cx="4572000" cy="274320"/>
+          </a:xfrm>
+          <a:prstGeom prst="rect">
+            <a:avLst/>
+          </a:prstGeom>
+          <a:noFill/>
+          <a:ln/>
+        </p:spPr>
+        <p:txBody>
+          <a:bodyPr wrap="square" lIns="0" tIns="0" rIns="0" bIns="0" rtlCol="0" anchor="t"/>
+          <a:lstStyle/>
+          <a:p>
+            <a:pPr rtl="1" algn="r" indent="0" marL="0">
               <a:buNone/>
             </a:pPr>
             <a:r>
@@ -3881,46 +3673,7 @@
                 <a:ea typeface="Arial" pitchFamily="34" charset="-122"/>
                 <a:cs typeface="Arial" pitchFamily="34" charset="-120"/>
               </a:rPr>
-              <a:t>shamal-ai.vercel.app</a:t>
-            </a:r>
-            <a:endParaRPr lang="ar-SA" sz="1000" dirty="0"/>
-          </a:p>
-        </p:txBody>
-      </p:sp>
-      <p:sp>
-        <p:nvSpPr>
-          <p:cNvPr id="23" name="Text 21"/>
-          <p:cNvSpPr txBox="1"/>
-          <p:nvPr/>
-        </p:nvSpPr>
-        <p:spPr>
-          <a:xfrm>
-            <a:off x="7068312" y="6355080"/>
-            <a:ext cx="4572000" cy="274320"/>
-          </a:xfrm>
-          <a:prstGeom prst="rect">
-            <a:avLst/>
-          </a:prstGeom>
-          <a:noFill/>
-          <a:ln/>
-        </p:spPr>
-        <p:txBody>
-          <a:bodyPr wrap="square" lIns="0" tIns="0" rIns="0" bIns="0" rtlCol="0" anchor="t"/>
-          <a:lstStyle/>
-          <a:p>
-            <a:pPr rtl="1" algn="r" indent="0" marL="0">
-              <a:buNone/>
-            </a:pPr>
-            <a:r>
-              <a:rPr lang="ar-SA" altLang="en-US" sz="1000" dirty="0">
-                <a:solidFill>
-                  <a:srgbClr val="6B7F7E"/>
-                </a:solidFill>
-                <a:latin typeface="Arial" pitchFamily="34" charset="0"/>
-                <a:ea typeface="Arial" pitchFamily="34" charset="-122"/>
-                <a:cs typeface="Arial" pitchFamily="34" charset="-120"/>
-              </a:rPr>
-              <a:t>شمال AI · ENBTHON 2026 · 3</a:t>
+              <a:t>شمال AI · التقنية · 3</a:t>
             </a:r>
             <a:endParaRPr lang="ar-SA" sz="1000" dirty="0"/>
           </a:p>
@@ -3991,7 +3744,7 @@
                 <a:ea typeface="Arial" pitchFamily="34" charset="-122"/>
                 <a:cs typeface="Arial" pitchFamily="34" charset="-120"/>
               </a:rPr>
-              <a:t>الاستضافة والبيانات</a:t>
+              <a:t>الخادم والبيانات</a:t>
             </a:r>
             <a:endParaRPr lang="ar-SA" sz="3000" dirty="0"/>
           </a:p>
@@ -4030,7 +3783,7 @@
                 <a:ea typeface="Arial" pitchFamily="34" charset="-122"/>
                 <a:cs typeface="Arial" pitchFamily="34" charset="-120"/>
               </a:rPr>
-              <a:t>أين يعيش التطبيق وكيف نحمي بيانات المستخدم</a:t>
+              <a:t>استضافة واحدة، قاعدة بيانات واحدة، ومصادقة مبنية داخل التطبيق</a:t>
             </a:r>
             <a:endParaRPr lang="ar-SA" sz="1400" dirty="0"/>
           </a:p>
@@ -4045,11 +3798,11 @@
         <p:spPr>
           <a:xfrm>
             <a:off x="6245352" y="1645920"/>
-            <a:ext cx="5394960" cy="2103120"/>
+            <a:ext cx="5394960" cy="2011680"/>
           </a:xfrm>
           <a:prstGeom prst="roundRect">
             <a:avLst>
-              <a:gd name="adj" fmla="val 7826"/>
+              <a:gd name="adj" fmla="val 8182"/>
             </a:avLst>
           </a:prstGeom>
           <a:solidFill>
@@ -4078,12 +3831,12 @@
         </p:nvSpPr>
         <p:spPr>
           <a:xfrm>
-            <a:off x="10451592" y="1920240"/>
-            <a:ext cx="914400" cy="914400"/>
+            <a:off x="10497312" y="1920240"/>
+            <a:ext cx="868680" cy="868680"/>
           </a:xfrm>
           <a:prstGeom prst="roundRect">
             <a:avLst>
-              <a:gd name="adj" fmla="val 16000"/>
+              <a:gd name="adj" fmla="val 16842"/>
             </a:avLst>
           </a:prstGeom>
           <a:solidFill>
@@ -4105,8 +3858,8 @@
         </p:nvSpPr>
         <p:spPr>
           <a:xfrm>
-            <a:off x="6519672" y="1965960"/>
-            <a:ext cx="3749040" cy="457200"/>
+            <a:off x="6519672" y="1993392"/>
+            <a:ext cx="3931920" cy="457200"/>
           </a:xfrm>
           <a:prstGeom prst="rect">
             <a:avLst/>
@@ -4144,8 +3897,8 @@
         </p:nvSpPr>
         <p:spPr>
           <a:xfrm>
-            <a:off x="6519672" y="2560320"/>
-            <a:ext cx="4846320" cy="1005840"/>
+            <a:off x="6519672" y="2606040"/>
+            <a:ext cx="4846320" cy="914400"/>
           </a:xfrm>
           <a:prstGeom prst="rect">
             <a:avLst/>
@@ -4169,7 +3922,7 @@
                 <a:ea typeface="Arial" pitchFamily="34" charset="-122"/>
                 <a:cs typeface="Arial" pitchFamily="34" charset="-120"/>
               </a:rPr>
-              <a:t>يستضيف التطبيق على الإنترنت ويعطينا رابطاً عاماً يفتح من أي جهاز، وينشر التحديثات خلال دقيقة</a:t>
+              <a:t>استضافة التطبيق ومسارات الخادم، نشر في أقل من دقيقة، ورابط عام يفتح من أي جهاز</a:t>
             </a:r>
             <a:endParaRPr lang="ar-SA" sz="1300" dirty="0"/>
           </a:p>
@@ -4184,11 +3937,11 @@
         <p:spPr>
           <a:xfrm>
             <a:off x="548640" y="1645920"/>
-            <a:ext cx="5394960" cy="2103120"/>
+            <a:ext cx="5394960" cy="2011680"/>
           </a:xfrm>
           <a:prstGeom prst="roundRect">
             <a:avLst>
-              <a:gd name="adj" fmla="val 7826"/>
+              <a:gd name="adj" fmla="val 8182"/>
             </a:avLst>
           </a:prstGeom>
           <a:solidFill>
@@ -4217,12 +3970,12 @@
         </p:nvSpPr>
         <p:spPr>
           <a:xfrm>
-            <a:off x="4754880" y="1920240"/>
-            <a:ext cx="914400" cy="914400"/>
+            <a:off x="4800600" y="1920240"/>
+            <a:ext cx="868680" cy="868680"/>
           </a:xfrm>
           <a:prstGeom prst="roundRect">
             <a:avLst>
-              <a:gd name="adj" fmla="val 16000"/>
+              <a:gd name="adj" fmla="val 16842"/>
             </a:avLst>
           </a:prstGeom>
           <a:solidFill>
@@ -4244,8 +3997,8 @@
         </p:nvSpPr>
         <p:spPr>
           <a:xfrm>
-            <a:off x="822960" y="1965960"/>
-            <a:ext cx="3749040" cy="457200"/>
+            <a:off x="822960" y="1993392"/>
+            <a:ext cx="3931920" cy="457200"/>
           </a:xfrm>
           <a:prstGeom prst="rect">
             <a:avLst/>
@@ -4283,8 +4036,8 @@
         </p:nvSpPr>
         <p:spPr>
           <a:xfrm>
-            <a:off x="822960" y="2560320"/>
-            <a:ext cx="4846320" cy="1005840"/>
+            <a:off x="822960" y="2606040"/>
+            <a:ext cx="4846320" cy="914400"/>
           </a:xfrm>
           <a:prstGeom prst="rect">
             <a:avLst/>
@@ -4308,7 +4061,7 @@
                 <a:ea typeface="Arial" pitchFamily="34" charset="-122"/>
                 <a:cs typeface="Arial" pitchFamily="34" charset="-120"/>
               </a:rPr>
-              <a:t>قاعدة البيانات التي تحفظ الحسابات والرحلات والإشعارات، ومرتبطة مباشرة بـ Vercel</a:t>
+              <a:t>قاعدة بيانات Postgres بلا خادم، مربوطة من Vercel Storage، والجداول تُنشأ تلقائياً عند أول طلب</a:t>
             </a:r>
             <a:endParaRPr lang="ar-SA" sz="1300" dirty="0"/>
           </a:p>
@@ -4322,12 +4075,12 @@
         </p:nvSpPr>
         <p:spPr>
           <a:xfrm>
-            <a:off x="8125968" y="4069080"/>
-            <a:ext cx="3514344" cy="1554480"/>
+            <a:off x="9073134" y="3977640"/>
+            <a:ext cx="2567178" cy="1600200"/>
           </a:xfrm>
           <a:prstGeom prst="roundRect">
             <a:avLst>
-              <a:gd name="adj" fmla="val 10588"/>
+              <a:gd name="adj" fmla="val 10286"/>
             </a:avLst>
           </a:prstGeom>
           <a:solidFill>
@@ -4335,7 +4088,7 @@
           </a:solidFill>
           <a:ln w="9525">
             <a:solidFill>
-              <a:srgbClr val="DDE7E7"/>
+              <a:srgbClr val="CFE3E1"/>
             </a:solidFill>
             <a:prstDash val="solid"/>
           </a:ln>
@@ -4356,24 +4109,24 @@
         </p:nvSpPr>
         <p:spPr>
           <a:xfrm>
-            <a:off x="8354568" y="4297680"/>
-            <a:ext cx="3057144" cy="457200"/>
-          </a:xfrm>
-          <a:prstGeom prst="rect">
-            <a:avLst/>
-          </a:prstGeom>
-          <a:noFill/>
-          <a:ln/>
-        </p:spPr>
-        <p:txBody>
-          <a:bodyPr wrap="square" lIns="0" tIns="0" rIns="0" bIns="0" rtlCol="0" anchor="t"/>
-          <a:lstStyle/>
-          <a:p>
-            <a:pPr rtl="1" algn="r" indent="0" marL="0">
-              <a:buNone/>
-            </a:pPr>
-            <a:r>
-              <a:rPr lang="ar-SA" altLang="en-US" sz="1500" b="1" dirty="0">
+            <a:off x="9274302" y="4233672"/>
+            <a:ext cx="2164842" cy="411480"/>
+          </a:xfrm>
+          <a:prstGeom prst="rect">
+            <a:avLst/>
+          </a:prstGeom>
+          <a:noFill/>
+          <a:ln/>
+        </p:spPr>
+        <p:txBody>
+          <a:bodyPr wrap="square" lIns="0" tIns="0" rIns="0" bIns="0" rtlCol="0" anchor="t"/>
+          <a:lstStyle/>
+          <a:p>
+            <a:pPr rtl="1" algn="ctr" indent="0" marL="0">
+              <a:buNone/>
+            </a:pPr>
+            <a:r>
+              <a:rPr lang="ar-SA" altLang="en-US" sz="1600" b="1" dirty="0">
                 <a:solidFill>
                   <a:srgbClr val="17504E"/>
                 </a:solidFill>
@@ -4381,9 +4134,9 @@
                 <a:ea typeface="Arial" pitchFamily="34" charset="-122"/>
                 <a:cs typeface="Arial" pitchFamily="34" charset="-120"/>
               </a:rPr>
-              <a:t>🔒 كلمات المرور مشفرة</a:t>
-            </a:r>
-            <a:endParaRPr lang="ar-SA" sz="1500" dirty="0"/>
+              <a:t>bcrypt</a:t>
+            </a:r>
+            <a:endParaRPr lang="ar-SA" sz="1600" dirty="0"/>
           </a:p>
         </p:txBody>
       </p:sp>
@@ -4395,24 +4148,24 @@
         </p:nvSpPr>
         <p:spPr>
           <a:xfrm>
-            <a:off x="8354568" y="4800600"/>
-            <a:ext cx="3057144" cy="731520"/>
-          </a:xfrm>
-          <a:prstGeom prst="rect">
-            <a:avLst/>
-          </a:prstGeom>
-          <a:noFill/>
-          <a:ln/>
-        </p:spPr>
-        <p:txBody>
-          <a:bodyPr wrap="square" lIns="0" tIns="0" rIns="0" bIns="0" rtlCol="0" anchor="t"/>
-          <a:lstStyle/>
-          <a:p>
-            <a:pPr rtl="1" algn="r" indent="0" marL="0">
-              <a:buNone/>
-            </a:pPr>
-            <a:r>
-              <a:rPr lang="ar-SA" altLang="en-US" sz="1200" dirty="0">
+            <a:off x="9274302" y="4754880"/>
+            <a:ext cx="2164842" cy="731520"/>
+          </a:xfrm>
+          <a:prstGeom prst="rect">
+            <a:avLst/>
+          </a:prstGeom>
+          <a:noFill/>
+          <a:ln/>
+        </p:spPr>
+        <p:txBody>
+          <a:bodyPr wrap="square" lIns="0" tIns="0" rIns="0" bIns="0" rtlCol="0" anchor="t"/>
+          <a:lstStyle/>
+          <a:p>
+            <a:pPr rtl="1" algn="ctr" indent="0" marL="0">
+              <a:buNone/>
+            </a:pPr>
+            <a:r>
+              <a:rPr lang="ar-SA" altLang="en-US" sz="1100" dirty="0">
                 <a:solidFill>
                   <a:srgbClr val="6B7F7E"/>
                 </a:solidFill>
@@ -4420,9 +4173,9 @@
                 <a:ea typeface="Arial" pitchFamily="34" charset="-122"/>
                 <a:cs typeface="Arial" pitchFamily="34" charset="-120"/>
               </a:rPr>
-              <a:t>بخوارزمية bcrypt ولا تُخزن كنص أبداً</a:t>
-            </a:r>
-            <a:endParaRPr lang="ar-SA" sz="1200" dirty="0"/>
+              <a:t>كلمات المرور مُجزّأة ولا تُخزن كنص أبداً</a:t>
+            </a:r>
+            <a:endParaRPr lang="ar-SA" sz="1100" dirty="0"/>
           </a:p>
         </p:txBody>
       </p:sp>
@@ -4434,12 +4187,12 @@
         </p:nvSpPr>
         <p:spPr>
           <a:xfrm>
-            <a:off x="4337304" y="4069080"/>
-            <a:ext cx="3514344" cy="1554480"/>
+            <a:off x="6231636" y="3977640"/>
+            <a:ext cx="2567178" cy="1600200"/>
           </a:xfrm>
           <a:prstGeom prst="roundRect">
             <a:avLst>
-              <a:gd name="adj" fmla="val 10588"/>
+              <a:gd name="adj" fmla="val 10286"/>
             </a:avLst>
           </a:prstGeom>
           <a:solidFill>
@@ -4447,7 +4200,7 @@
           </a:solidFill>
           <a:ln w="9525">
             <a:solidFill>
-              <a:srgbClr val="DDE7E7"/>
+              <a:srgbClr val="CFE3E1"/>
             </a:solidFill>
             <a:prstDash val="solid"/>
           </a:ln>
@@ -4468,24 +4221,24 @@
         </p:nvSpPr>
         <p:spPr>
           <a:xfrm>
-            <a:off x="4565904" y="4297680"/>
-            <a:ext cx="3057144" cy="457200"/>
-          </a:xfrm>
-          <a:prstGeom prst="rect">
-            <a:avLst/>
-          </a:prstGeom>
-          <a:noFill/>
-          <a:ln/>
-        </p:spPr>
-        <p:txBody>
-          <a:bodyPr wrap="square" lIns="0" tIns="0" rIns="0" bIns="0" rtlCol="0" anchor="t"/>
-          <a:lstStyle/>
-          <a:p>
-            <a:pPr rtl="1" algn="r" indent="0" marL="0">
-              <a:buNone/>
-            </a:pPr>
-            <a:r>
-              <a:rPr lang="ar-SA" altLang="en-US" sz="1500" b="1" dirty="0">
+            <a:off x="6432804" y="4233672"/>
+            <a:ext cx="2164842" cy="411480"/>
+          </a:xfrm>
+          <a:prstGeom prst="rect">
+            <a:avLst/>
+          </a:prstGeom>
+          <a:noFill/>
+          <a:ln/>
+        </p:spPr>
+        <p:txBody>
+          <a:bodyPr wrap="square" lIns="0" tIns="0" rIns="0" bIns="0" rtlCol="0" anchor="t"/>
+          <a:lstStyle/>
+          <a:p>
+            <a:pPr rtl="1" algn="ctr" indent="0" marL="0">
+              <a:buNone/>
+            </a:pPr>
+            <a:r>
+              <a:rPr lang="ar-SA" altLang="en-US" sz="1600" b="1" dirty="0">
                 <a:solidFill>
                   <a:srgbClr val="17504E"/>
                 </a:solidFill>
@@ -4493,9 +4246,9 @@
                 <a:ea typeface="Arial" pitchFamily="34" charset="-122"/>
                 <a:cs typeface="Arial" pitchFamily="34" charset="-120"/>
               </a:rPr>
-              <a:t>🪪 جلسة دخول موقّعة</a:t>
-            </a:r>
-            <a:endParaRPr lang="ar-SA" sz="1500" dirty="0"/>
+              <a:t>JWT + كوكي</a:t>
+            </a:r>
+            <a:endParaRPr lang="ar-SA" sz="1600" dirty="0"/>
           </a:p>
         </p:txBody>
       </p:sp>
@@ -4507,24 +4260,24 @@
         </p:nvSpPr>
         <p:spPr>
           <a:xfrm>
-            <a:off x="4565904" y="4800600"/>
-            <a:ext cx="3057144" cy="731520"/>
-          </a:xfrm>
-          <a:prstGeom prst="rect">
-            <a:avLst/>
-          </a:prstGeom>
-          <a:noFill/>
-          <a:ln/>
-        </p:spPr>
-        <p:txBody>
-          <a:bodyPr wrap="square" lIns="0" tIns="0" rIns="0" bIns="0" rtlCol="0" anchor="t"/>
-          <a:lstStyle/>
-          <a:p>
-            <a:pPr rtl="1" algn="r" indent="0" marL="0">
-              <a:buNone/>
-            </a:pPr>
-            <a:r>
-              <a:rPr lang="ar-SA" altLang="en-US" sz="1200" dirty="0">
+            <a:off x="6432804" y="4754880"/>
+            <a:ext cx="2164842" cy="731520"/>
+          </a:xfrm>
+          <a:prstGeom prst="rect">
+            <a:avLst/>
+          </a:prstGeom>
+          <a:noFill/>
+          <a:ln/>
+        </p:spPr>
+        <p:txBody>
+          <a:bodyPr wrap="square" lIns="0" tIns="0" rIns="0" bIns="0" rtlCol="0" anchor="t"/>
+          <a:lstStyle/>
+          <a:p>
+            <a:pPr rtl="1" algn="ctr" indent="0" marL="0">
+              <a:buNone/>
+            </a:pPr>
+            <a:r>
+              <a:rPr lang="ar-SA" altLang="en-US" sz="1100" dirty="0">
                 <a:solidFill>
                   <a:srgbClr val="6B7F7E"/>
                 </a:solidFill>
@@ -4532,9 +4285,9 @@
                 <a:ea typeface="Arial" pitchFamily="34" charset="-122"/>
                 <a:cs typeface="Arial" pitchFamily="34" charset="-120"/>
               </a:rPr>
-              <a:t>رمز JWT صالح 30 يوماً داخل كوكي آمن</a:t>
-            </a:r>
-            <a:endParaRPr lang="ar-SA" sz="1200" dirty="0"/>
+              <a:t>جلسة موقّعة، HttpOnly، صالحة 30 يوماً</a:t>
+            </a:r>
+            <a:endParaRPr lang="ar-SA" sz="1100" dirty="0"/>
           </a:p>
         </p:txBody>
       </p:sp>
@@ -4546,12 +4299,12 @@
         </p:nvSpPr>
         <p:spPr>
           <a:xfrm>
-            <a:off x="548640" y="4069080"/>
-            <a:ext cx="3514344" cy="1554480"/>
+            <a:off x="3390138" y="3977640"/>
+            <a:ext cx="2567178" cy="1600200"/>
           </a:xfrm>
           <a:prstGeom prst="roundRect">
             <a:avLst>
-              <a:gd name="adj" fmla="val 10588"/>
+              <a:gd name="adj" fmla="val 10286"/>
             </a:avLst>
           </a:prstGeom>
           <a:solidFill>
@@ -4559,7 +4312,7 @@
           </a:solidFill>
           <a:ln w="9525">
             <a:solidFill>
-              <a:srgbClr val="DDE7E7"/>
+              <a:srgbClr val="CFE3E1"/>
             </a:solidFill>
             <a:prstDash val="solid"/>
           </a:ln>
@@ -4580,8 +4333,237 @@
         </p:nvSpPr>
         <p:spPr>
           <a:xfrm>
-            <a:off x="777240" y="4297680"/>
-            <a:ext cx="3057144" cy="457200"/>
+            <a:off x="3591306" y="4233672"/>
+            <a:ext cx="2164842" cy="411480"/>
+          </a:xfrm>
+          <a:prstGeom prst="rect">
+            <a:avLst/>
+          </a:prstGeom>
+          <a:noFill/>
+          <a:ln/>
+        </p:spPr>
+        <p:txBody>
+          <a:bodyPr wrap="square" lIns="0" tIns="0" rIns="0" bIns="0" rtlCol="0" anchor="t"/>
+          <a:lstStyle/>
+          <a:p>
+            <a:pPr rtl="1" algn="ctr" indent="0" marL="0">
+              <a:buNone/>
+            </a:pPr>
+            <a:r>
+              <a:rPr lang="ar-SA" altLang="en-US" sz="1600" b="1" dirty="0">
+                <a:solidFill>
+                  <a:srgbClr val="17504E"/>
+                </a:solidFill>
+                <a:latin typeface="Arial" pitchFamily="34" charset="0"/>
+                <a:ea typeface="Arial" pitchFamily="34" charset="-122"/>
+                <a:cs typeface="Arial" pitchFamily="34" charset="-120"/>
+              </a:rPr>
+              <a:t>عزل لكل مستخدم</a:t>
+            </a:r>
+            <a:endParaRPr lang="ar-SA" sz="1600" dirty="0"/>
+          </a:p>
+        </p:txBody>
+      </p:sp>
+      <p:sp>
+        <p:nvSpPr>
+          <p:cNvPr id="20" name="Text 18"/>
+          <p:cNvSpPr txBox="1"/>
+          <p:nvPr/>
+        </p:nvSpPr>
+        <p:spPr>
+          <a:xfrm>
+            <a:off x="3591306" y="4754880"/>
+            <a:ext cx="2164842" cy="731520"/>
+          </a:xfrm>
+          <a:prstGeom prst="rect">
+            <a:avLst/>
+          </a:prstGeom>
+          <a:noFill/>
+          <a:ln/>
+        </p:spPr>
+        <p:txBody>
+          <a:bodyPr wrap="square" lIns="0" tIns="0" rIns="0" bIns="0" rtlCol="0" anchor="t"/>
+          <a:lstStyle/>
+          <a:p>
+            <a:pPr rtl="1" algn="ctr" indent="0" marL="0">
+              <a:buNone/>
+            </a:pPr>
+            <a:r>
+              <a:rPr lang="ar-SA" altLang="en-US" sz="1100" dirty="0">
+                <a:solidFill>
+                  <a:srgbClr val="6B7F7E"/>
+                </a:solidFill>
+                <a:latin typeface="Arial" pitchFamily="34" charset="0"/>
+                <a:ea typeface="Arial" pitchFamily="34" charset="-122"/>
+                <a:cs typeface="Arial" pitchFamily="34" charset="-120"/>
+              </a:rPr>
+              <a:t>كل استعلام مقيّد بمعرّف صاحب الجلسة</a:t>
+            </a:r>
+            <a:endParaRPr lang="ar-SA" sz="1100" dirty="0"/>
+          </a:p>
+        </p:txBody>
+      </p:sp>
+      <p:sp>
+        <p:nvSpPr>
+          <p:cNvPr id="21" name="Shape 19"/>
+          <p:cNvSpPr/>
+          <p:nvPr/>
+        </p:nvSpPr>
+        <p:spPr>
+          <a:xfrm>
+            <a:off x="548640" y="3977640"/>
+            <a:ext cx="2567178" cy="1600200"/>
+          </a:xfrm>
+          <a:prstGeom prst="roundRect">
+            <a:avLst>
+              <a:gd name="adj" fmla="val 10286"/>
+            </a:avLst>
+          </a:prstGeom>
+          <a:solidFill>
+            <a:srgbClr val="E3F0EF"/>
+          </a:solidFill>
+          <a:ln w="9525">
+            <a:solidFill>
+              <a:srgbClr val="CFE3E1"/>
+            </a:solidFill>
+            <a:prstDash val="solid"/>
+          </a:ln>
+          <a:effectLst>
+            <a:outerShdw sx="100000" sy="100000" kx="0" ky="0" algn="bl" rotWithShape="0" blurRad="76200" dist="25400" dir="5400000">
+              <a:srgbClr val="17504E">
+                <a:alpha val="8000"/>
+              </a:srgbClr>
+            </a:outerShdw>
+          </a:effectLst>
+        </p:spPr>
+      </p:sp>
+      <p:sp>
+        <p:nvSpPr>
+          <p:cNvPr id="22" name="Text 20"/>
+          <p:cNvSpPr txBox="1"/>
+          <p:nvPr/>
+        </p:nvSpPr>
+        <p:spPr>
+          <a:xfrm>
+            <a:off x="749808" y="4233672"/>
+            <a:ext cx="2164842" cy="411480"/>
+          </a:xfrm>
+          <a:prstGeom prst="rect">
+            <a:avLst/>
+          </a:prstGeom>
+          <a:noFill/>
+          <a:ln/>
+        </p:spPr>
+        <p:txBody>
+          <a:bodyPr wrap="square" lIns="0" tIns="0" rIns="0" bIns="0" rtlCol="0" anchor="t"/>
+          <a:lstStyle/>
+          <a:p>
+            <a:pPr rtl="1" algn="ctr" indent="0" marL="0">
+              <a:buNone/>
+            </a:pPr>
+            <a:r>
+              <a:rPr lang="ar-SA" altLang="en-US" sz="1600" b="1" dirty="0">
+                <a:solidFill>
+                  <a:srgbClr val="17504E"/>
+                </a:solidFill>
+                <a:latin typeface="Arial" pitchFamily="34" charset="0"/>
+                <a:ea typeface="Arial" pitchFamily="34" charset="-122"/>
+                <a:cs typeface="Arial" pitchFamily="34" charset="-120"/>
+              </a:rPr>
+              <a:t>بلا مستندات</a:t>
+            </a:r>
+            <a:endParaRPr lang="ar-SA" sz="1600" dirty="0"/>
+          </a:p>
+        </p:txBody>
+      </p:sp>
+      <p:sp>
+        <p:nvSpPr>
+          <p:cNvPr id="23" name="Text 21"/>
+          <p:cNvSpPr txBox="1"/>
+          <p:nvPr/>
+        </p:nvSpPr>
+        <p:spPr>
+          <a:xfrm>
+            <a:off x="749808" y="4754880"/>
+            <a:ext cx="2164842" cy="731520"/>
+          </a:xfrm>
+          <a:prstGeom prst="rect">
+            <a:avLst/>
+          </a:prstGeom>
+          <a:noFill/>
+          <a:ln/>
+        </p:spPr>
+        <p:txBody>
+          <a:bodyPr wrap="square" lIns="0" tIns="0" rIns="0" bIns="0" rtlCol="0" anchor="t"/>
+          <a:lstStyle/>
+          <a:p>
+            <a:pPr rtl="1" algn="ctr" indent="0" marL="0">
+              <a:buNone/>
+            </a:pPr>
+            <a:r>
+              <a:rPr lang="ar-SA" altLang="en-US" sz="1100" dirty="0">
+                <a:solidFill>
+                  <a:srgbClr val="6B7F7E"/>
+                </a:solidFill>
+                <a:latin typeface="Arial" pitchFamily="34" charset="0"/>
+                <a:ea typeface="Arial" pitchFamily="34" charset="-122"/>
+                <a:cs typeface="Arial" pitchFamily="34" charset="-120"/>
+              </a:rPr>
+              <a:t>لا نرفع ولا نخزن أي وثيقة رسمية</a:t>
+            </a:r>
+            <a:endParaRPr lang="ar-SA" sz="1100" dirty="0"/>
+          </a:p>
+        </p:txBody>
+      </p:sp>
+      <p:sp>
+        <p:nvSpPr>
+          <p:cNvPr id="24" name="Text 22"/>
+          <p:cNvSpPr txBox="1"/>
+          <p:nvPr/>
+        </p:nvSpPr>
+        <p:spPr>
+          <a:xfrm>
+            <a:off x="548640" y="6382512"/>
+            <a:ext cx="3657600" cy="274320"/>
+          </a:xfrm>
+          <a:prstGeom prst="rect">
+            <a:avLst/>
+          </a:prstGeom>
+          <a:noFill/>
+          <a:ln/>
+        </p:spPr>
+        <p:txBody>
+          <a:bodyPr wrap="square" lIns="0" tIns="0" rIns="0" bIns="0" rtlCol="0" anchor="t"/>
+          <a:lstStyle/>
+          <a:p>
+            <a:pPr rtl="1" algn="l" indent="0" marL="0">
+              <a:buNone/>
+            </a:pPr>
+            <a:r>
+              <a:rPr lang="ar-SA" altLang="en-US" sz="1000" dirty="0">
+                <a:solidFill>
+                  <a:srgbClr val="6B7F7E"/>
+                </a:solidFill>
+                <a:latin typeface="Arial" pitchFamily="34" charset="0"/>
+                <a:ea typeface="Arial" pitchFamily="34" charset="-122"/>
+                <a:cs typeface="Arial" pitchFamily="34" charset="-120"/>
+              </a:rPr>
+              <a:t>shamal-ai.vercel.app</a:t>
+            </a:r>
+            <a:endParaRPr lang="ar-SA" sz="1000" dirty="0"/>
+          </a:p>
+        </p:txBody>
+      </p:sp>
+      <p:sp>
+        <p:nvSpPr>
+          <p:cNvPr id="25" name="Text 23"/>
+          <p:cNvSpPr txBox="1"/>
+          <p:nvPr/>
+        </p:nvSpPr>
+        <p:spPr>
+          <a:xfrm>
+            <a:off x="7068312" y="6382512"/>
+            <a:ext cx="4572000" cy="274320"/>
           </a:xfrm>
           <a:prstGeom prst="rect">
             <a:avLst/>
@@ -4597,46 +4579,7 @@
               <a:buNone/>
             </a:pPr>
             <a:r>
-              <a:rPr lang="ar-SA" altLang="en-US" sz="1500" b="1" dirty="0">
-                <a:solidFill>
-                  <a:srgbClr val="17504E"/>
-                </a:solidFill>
-                <a:latin typeface="Arial" pitchFamily="34" charset="0"/>
-                <a:ea typeface="Arial" pitchFamily="34" charset="-122"/>
-                <a:cs typeface="Arial" pitchFamily="34" charset="-120"/>
-              </a:rPr>
-              <a:t>🗂️ لا نخزن مستنداتك</a:t>
-            </a:r>
-            <a:endParaRPr lang="ar-SA" sz="1500" dirty="0"/>
-          </a:p>
-        </p:txBody>
-      </p:sp>
-      <p:sp>
-        <p:nvSpPr>
-          <p:cNvPr id="20" name="Text 18"/>
-          <p:cNvSpPr txBox="1"/>
-          <p:nvPr/>
-        </p:nvSpPr>
-        <p:spPr>
-          <a:xfrm>
-            <a:off x="777240" y="4800600"/>
-            <a:ext cx="3057144" cy="731520"/>
-          </a:xfrm>
-          <a:prstGeom prst="rect">
-            <a:avLst/>
-          </a:prstGeom>
-          <a:noFill/>
-          <a:ln/>
-        </p:spPr>
-        <p:txBody>
-          <a:bodyPr wrap="square" lIns="0" tIns="0" rIns="0" bIns="0" rtlCol="0" anchor="t"/>
-          <a:lstStyle/>
-          <a:p>
-            <a:pPr rtl="1" algn="r" indent="0" marL="0">
-              <a:buNone/>
-            </a:pPr>
-            <a:r>
-              <a:rPr lang="ar-SA" altLang="en-US" sz="1200" dirty="0">
+              <a:rPr lang="ar-SA" altLang="en-US" sz="1000" dirty="0">
                 <a:solidFill>
                   <a:srgbClr val="6B7F7E"/>
                 </a:solidFill>
@@ -4644,85 +4587,7 @@
                 <a:ea typeface="Arial" pitchFamily="34" charset="-122"/>
                 <a:cs typeface="Arial" pitchFamily="34" charset="-120"/>
               </a:rPr>
-              <a:t>فقط حالة رحلتك والمتطلبات التي تحددها بنفسك</a:t>
-            </a:r>
-            <a:endParaRPr lang="ar-SA" sz="1200" dirty="0"/>
-          </a:p>
-        </p:txBody>
-      </p:sp>
-      <p:sp>
-        <p:nvSpPr>
-          <p:cNvPr id="21" name="Text 19"/>
-          <p:cNvSpPr txBox="1"/>
-          <p:nvPr/>
-        </p:nvSpPr>
-        <p:spPr>
-          <a:xfrm>
-            <a:off x="548640" y="6355080"/>
-            <a:ext cx="3657600" cy="274320"/>
-          </a:xfrm>
-          <a:prstGeom prst="rect">
-            <a:avLst/>
-          </a:prstGeom>
-          <a:noFill/>
-          <a:ln/>
-        </p:spPr>
-        <p:txBody>
-          <a:bodyPr wrap="square" lIns="0" tIns="0" rIns="0" bIns="0" rtlCol="0" anchor="t"/>
-          <a:lstStyle/>
-          <a:p>
-            <a:pPr rtl="1" algn="l" indent="0" marL="0">
-              <a:buNone/>
-            </a:pPr>
-            <a:r>
-              <a:rPr lang="ar-SA" altLang="en-US" sz="1000" dirty="0">
-                <a:solidFill>
-                  <a:srgbClr val="6B7F7E"/>
-                </a:solidFill>
-                <a:latin typeface="Arial" pitchFamily="34" charset="0"/>
-                <a:ea typeface="Arial" pitchFamily="34" charset="-122"/>
-                <a:cs typeface="Arial" pitchFamily="34" charset="-120"/>
-              </a:rPr>
-              <a:t>shamal-ai.vercel.app</a:t>
-            </a:r>
-            <a:endParaRPr lang="ar-SA" sz="1000" dirty="0"/>
-          </a:p>
-        </p:txBody>
-      </p:sp>
-      <p:sp>
-        <p:nvSpPr>
-          <p:cNvPr id="22" name="Text 20"/>
-          <p:cNvSpPr txBox="1"/>
-          <p:nvPr/>
-        </p:nvSpPr>
-        <p:spPr>
-          <a:xfrm>
-            <a:off x="7068312" y="6355080"/>
-            <a:ext cx="4572000" cy="274320"/>
-          </a:xfrm>
-          <a:prstGeom prst="rect">
-            <a:avLst/>
-          </a:prstGeom>
-          <a:noFill/>
-          <a:ln/>
-        </p:spPr>
-        <p:txBody>
-          <a:bodyPr wrap="square" lIns="0" tIns="0" rIns="0" bIns="0" rtlCol="0" anchor="t"/>
-          <a:lstStyle/>
-          <a:p>
-            <a:pPr rtl="1" algn="r" indent="0" marL="0">
-              <a:buNone/>
-            </a:pPr>
-            <a:r>
-              <a:rPr lang="ar-SA" altLang="en-US" sz="1000" dirty="0">
-                <a:solidFill>
-                  <a:srgbClr val="6B7F7E"/>
-                </a:solidFill>
-                <a:latin typeface="Arial" pitchFamily="34" charset="0"/>
-                <a:ea typeface="Arial" pitchFamily="34" charset="-122"/>
-                <a:cs typeface="Arial" pitchFamily="34" charset="-120"/>
-              </a:rPr>
-              <a:t>شمال AI · ENBTHON 2026 · 4</a:t>
+              <a:t>شمال AI · التقنية · 4</a:t>
             </a:r>
             <a:endParaRPr lang="ar-SA" sz="1000" dirty="0"/>
           </a:p>
@@ -4793,7 +4658,7 @@
                 <a:ea typeface="Arial" pitchFamily="34" charset="-122"/>
                 <a:cs typeface="Arial" pitchFamily="34" charset="-120"/>
               </a:rPr>
-              <a:t>الذكاء في التطبيق</a:t>
+              <a:t>محرك الرحلة</a:t>
             </a:r>
             <a:endParaRPr lang="ar-SA" sz="3000" dirty="0"/>
           </a:p>
@@ -4832,7 +4697,7 @@
                 <a:ea typeface="Arial" pitchFamily="34" charset="-122"/>
                 <a:cs typeface="Arial" pitchFamily="34" charset="-120"/>
               </a:rPr>
-              <a:t>محرك رحلة، وليس مجرد شات بوت</a:t>
+              <a:t>الجزء الأصلي في المشروع: منطق خالص بلا اعتماد خارجي</a:t>
             </a:r>
             <a:endParaRPr lang="ar-SA" sz="1400" dirty="0"/>
           </a:p>
@@ -4846,12 +4711,12 @@
         </p:nvSpPr>
         <p:spPr>
           <a:xfrm>
-            <a:off x="6231636" y="1645920"/>
-            <a:ext cx="5408676" cy="1325880"/>
+            <a:off x="8125968" y="1645920"/>
+            <a:ext cx="3514344" cy="1783080"/>
           </a:xfrm>
           <a:prstGeom prst="roundRect">
             <a:avLst>
-              <a:gd name="adj" fmla="val 12414"/>
+              <a:gd name="adj" fmla="val 9231"/>
             </a:avLst>
           </a:prstGeom>
           <a:solidFill>
@@ -4874,14 +4739,78 @@
       </p:sp>
       <p:sp>
         <p:nvSpPr>
-          <p:cNvPr id="5" name="Text 3"/>
-          <p:cNvSpPr txBox="1"/>
-          <p:nvPr/>
-        </p:nvSpPr>
-        <p:spPr>
-          <a:xfrm>
-            <a:off x="6505956" y="1847088"/>
-            <a:ext cx="4860036" cy="411480"/>
+          <p:cNvPr id="5" name="Shape 3"/>
+          <p:cNvSpPr/>
+          <p:nvPr/>
+        </p:nvSpPr>
+        <p:spPr>
+          <a:xfrm>
+            <a:off x="10927080" y="1847088"/>
+            <a:ext cx="457200" cy="457200"/>
+          </a:xfrm>
+          <a:prstGeom prst="ellipse">
+            <a:avLst/>
+          </a:prstGeom>
+          <a:solidFill>
+            <a:srgbClr val="1F6A68"/>
+          </a:solidFill>
+          <a:ln w="12700">
+            <a:solidFill>
+              <a:srgbClr val="1F6A68"/>
+            </a:solidFill>
+            <a:prstDash val="solid"/>
+          </a:ln>
+        </p:spPr>
+      </p:sp>
+      <p:sp>
+        <p:nvSpPr>
+          <p:cNvPr id="6" name="Text 4"/>
+          <p:cNvSpPr txBox="1"/>
+          <p:nvPr/>
+        </p:nvSpPr>
+        <p:spPr>
+          <a:xfrm>
+            <a:off x="10927080" y="1847088"/>
+            <a:ext cx="457200" cy="457200"/>
+          </a:xfrm>
+          <a:prstGeom prst="rect">
+            <a:avLst/>
+          </a:prstGeom>
+          <a:noFill/>
+          <a:ln/>
+        </p:spPr>
+        <p:txBody>
+          <a:bodyPr wrap="square" lIns="0" tIns="0" rIns="0" bIns="0" rtlCol="0" anchor="ctr"/>
+          <a:lstStyle/>
+          <a:p>
+            <a:pPr rtl="1" algn="ctr" indent="0" marL="0">
+              <a:buNone/>
+            </a:pPr>
+            <a:r>
+              <a:rPr lang="ar-SA" altLang="en-US" sz="1600" b="1" dirty="0">
+                <a:solidFill>
+                  <a:srgbClr val="FFFFFF"/>
+                </a:solidFill>
+                <a:latin typeface="Arial" pitchFamily="34" charset="0"/>
+                <a:ea typeface="Arial" pitchFamily="34" charset="-122"/>
+                <a:cs typeface="Arial" pitchFamily="34" charset="-120"/>
+              </a:rPr>
+              <a:t>1</a:t>
+            </a:r>
+            <a:endParaRPr lang="ar-SA" sz="1600" dirty="0"/>
+          </a:p>
+        </p:txBody>
+      </p:sp>
+      <p:sp>
+        <p:nvSpPr>
+          <p:cNvPr id="7" name="Text 5"/>
+          <p:cNvSpPr txBox="1"/>
+          <p:nvPr/>
+        </p:nvSpPr>
+        <p:spPr>
+          <a:xfrm>
+            <a:off x="8354568" y="2377440"/>
+            <a:ext cx="3057144" cy="365760"/>
           </a:xfrm>
           <a:prstGeom prst="rect">
             <a:avLst/>
@@ -4905,7 +4834,7 @@
                 <a:ea typeface="Arial" pitchFamily="34" charset="-122"/>
                 <a:cs typeface="Arial" pitchFamily="34" charset="-120"/>
               </a:rPr>
-              <a:t>🧭 محرك الرحلة</a:t>
+              <a:t>ترتيب طوبولوجي</a:t>
             </a:r>
             <a:endParaRPr lang="ar-SA" sz="1600" dirty="0"/>
           </a:p>
@@ -4913,14 +4842,14 @@
       </p:sp>
       <p:sp>
         <p:nvSpPr>
-          <p:cNvPr id="6" name="Text 4"/>
-          <p:cNvSpPr txBox="1"/>
-          <p:nvPr/>
-        </p:nvSpPr>
-        <p:spPr>
-          <a:xfrm>
-            <a:off x="6505956" y="2286000"/>
-            <a:ext cx="4860036" cy="640080"/>
+          <p:cNvPr id="8" name="Text 6"/>
+          <p:cNvSpPr txBox="1"/>
+          <p:nvPr/>
+        </p:nvSpPr>
+        <p:spPr>
+          <a:xfrm>
+            <a:off x="8354568" y="2788920"/>
+            <a:ext cx="3057144" cy="548640"/>
           </a:xfrm>
           <a:prstGeom prst="rect">
             <a:avLst/>
@@ -4936,7 +4865,7 @@
               <a:buNone/>
             </a:pPr>
             <a:r>
-              <a:rPr lang="ar-SA" altLang="en-US" sz="1200" dirty="0">
+              <a:rPr lang="ar-SA" altLang="en-US" sz="1100" dirty="0">
                 <a:solidFill>
                   <a:srgbClr val="6B7F7E"/>
                 </a:solidFill>
@@ -4944,26 +4873,26 @@
                 <a:ea typeface="Arial" pitchFamily="34" charset="-122"/>
                 <a:cs typeface="Arial" pitchFamily="34" charset="-120"/>
               </a:rPr>
-              <a:t>يرتب الخدمات حسب تبعياتها، يحسب مؤشر الجاهزية، ويكتشف العوائق ويقترح مسارها الرسمي</a:t>
-            </a:r>
-            <a:endParaRPr lang="ar-SA" sz="1200" dirty="0"/>
-          </a:p>
-        </p:txBody>
-      </p:sp>
-      <p:sp>
-        <p:nvSpPr>
-          <p:cNvPr id="7" name="Shape 5"/>
+              <a:t>يرتب خدمات السيناريو حسب تبعياتها، فلا تظهر رخصة البلدية قبل السجل التجاري</a:t>
+            </a:r>
+            <a:endParaRPr lang="ar-SA" sz="1100" dirty="0"/>
+          </a:p>
+        </p:txBody>
+      </p:sp>
+      <p:sp>
+        <p:nvSpPr>
+          <p:cNvPr id="9" name="Shape 7"/>
           <p:cNvSpPr/>
           <p:nvPr/>
         </p:nvSpPr>
         <p:spPr>
           <a:xfrm>
-            <a:off x="548640" y="1645920"/>
-            <a:ext cx="5408676" cy="1325880"/>
+            <a:off x="4337304" y="1645920"/>
+            <a:ext cx="3514344" cy="1783080"/>
           </a:xfrm>
           <a:prstGeom prst="roundRect">
             <a:avLst>
-              <a:gd name="adj" fmla="val 12414"/>
+              <a:gd name="adj" fmla="val 9231"/>
             </a:avLst>
           </a:prstGeom>
           <a:solidFill>
@@ -4986,96 +4915,160 @@
       </p:sp>
       <p:sp>
         <p:nvSpPr>
-          <p:cNvPr id="8" name="Text 6"/>
-          <p:cNvSpPr txBox="1"/>
-          <p:nvPr/>
-        </p:nvSpPr>
-        <p:spPr>
-          <a:xfrm>
-            <a:off x="822960" y="1847088"/>
-            <a:ext cx="4860036" cy="411480"/>
-          </a:xfrm>
-          <a:prstGeom prst="rect">
-            <a:avLst/>
-          </a:prstGeom>
-          <a:noFill/>
-          <a:ln/>
-        </p:spPr>
-        <p:txBody>
-          <a:bodyPr wrap="square" lIns="0" tIns="0" rIns="0" bIns="0" rtlCol="0" anchor="t"/>
-          <a:lstStyle/>
-          <a:p>
-            <a:pPr rtl="1" algn="r" indent="0" marL="0">
-              <a:buNone/>
-            </a:pPr>
-            <a:r>
-              <a:rPr lang="ar-SA" altLang="en-US" sz="1600" b="1" dirty="0">
-                <a:solidFill>
-                  <a:srgbClr val="17504E"/>
-                </a:solidFill>
-                <a:latin typeface="Arial" pitchFamily="34" charset="0"/>
-                <a:ea typeface="Arial" pitchFamily="34" charset="-122"/>
-                <a:cs typeface="Arial" pitchFamily="34" charset="-120"/>
-              </a:rPr>
-              <a:t>💬 فهم اللغة</a:t>
-            </a:r>
-            <a:endParaRPr lang="ar-SA" sz="1600" dirty="0"/>
-          </a:p>
-        </p:txBody>
-      </p:sp>
-      <p:sp>
-        <p:nvSpPr>
-          <p:cNvPr id="9" name="Text 7"/>
-          <p:cNvSpPr txBox="1"/>
-          <p:nvPr/>
-        </p:nvSpPr>
-        <p:spPr>
-          <a:xfrm>
-            <a:off x="822960" y="2286000"/>
-            <a:ext cx="4860036" cy="640080"/>
-          </a:xfrm>
-          <a:prstGeom prst="rect">
-            <a:avLst/>
-          </a:prstGeom>
-          <a:noFill/>
-          <a:ln/>
-        </p:spPr>
-        <p:txBody>
-          <a:bodyPr wrap="square" lIns="0" tIns="0" rIns="0" bIns="0" rtlCol="0" anchor="t"/>
-          <a:lstStyle/>
-          <a:p>
-            <a:pPr rtl="1" algn="r" indent="0" marL="0">
-              <a:buNone/>
-            </a:pPr>
-            <a:r>
-              <a:rPr lang="ar-SA" altLang="en-US" sz="1200" dirty="0">
-                <a:solidFill>
-                  <a:srgbClr val="6B7F7E"/>
-                </a:solidFill>
-                <a:latin typeface="Arial" pitchFamily="34" charset="0"/>
-                <a:ea typeface="Arial" pitchFamily="34" charset="-122"/>
-                <a:cs typeface="Arial" pitchFamily="34" charset="-120"/>
-              </a:rPr>
-              <a:t>مطابقة باللهجة السعودية بالكلمات المفتاحية، مع ربط نموذج لغوي مستضاف على Oracle لفهم أدق</a:t>
-            </a:r>
-            <a:endParaRPr lang="ar-SA" sz="1200" dirty="0"/>
-          </a:p>
-        </p:txBody>
-      </p:sp>
-      <p:sp>
-        <p:nvSpPr>
           <p:cNvPr id="10" name="Shape 8"/>
           <p:cNvSpPr/>
           <p:nvPr/>
         </p:nvSpPr>
         <p:spPr>
           <a:xfrm>
-            <a:off x="6231636" y="3200400"/>
-            <a:ext cx="5408676" cy="1325880"/>
+            <a:off x="7138416" y="1847088"/>
+            <a:ext cx="457200" cy="457200"/>
+          </a:xfrm>
+          <a:prstGeom prst="ellipse">
+            <a:avLst/>
+          </a:prstGeom>
+          <a:solidFill>
+            <a:srgbClr val="1F6A68"/>
+          </a:solidFill>
+          <a:ln w="12700">
+            <a:solidFill>
+              <a:srgbClr val="1F6A68"/>
+            </a:solidFill>
+            <a:prstDash val="solid"/>
+          </a:ln>
+        </p:spPr>
+      </p:sp>
+      <p:sp>
+        <p:nvSpPr>
+          <p:cNvPr id="11" name="Text 9"/>
+          <p:cNvSpPr txBox="1"/>
+          <p:nvPr/>
+        </p:nvSpPr>
+        <p:spPr>
+          <a:xfrm>
+            <a:off x="7138416" y="1847088"/>
+            <a:ext cx="457200" cy="457200"/>
+          </a:xfrm>
+          <a:prstGeom prst="rect">
+            <a:avLst/>
+          </a:prstGeom>
+          <a:noFill/>
+          <a:ln/>
+        </p:spPr>
+        <p:txBody>
+          <a:bodyPr wrap="square" lIns="0" tIns="0" rIns="0" bIns="0" rtlCol="0" anchor="ctr"/>
+          <a:lstStyle/>
+          <a:p>
+            <a:pPr rtl="1" algn="ctr" indent="0" marL="0">
+              <a:buNone/>
+            </a:pPr>
+            <a:r>
+              <a:rPr lang="ar-SA" altLang="en-US" sz="1600" b="1" dirty="0">
+                <a:solidFill>
+                  <a:srgbClr val="FFFFFF"/>
+                </a:solidFill>
+                <a:latin typeface="Arial" pitchFamily="34" charset="0"/>
+                <a:ea typeface="Arial" pitchFamily="34" charset="-122"/>
+                <a:cs typeface="Arial" pitchFamily="34" charset="-120"/>
+              </a:rPr>
+              <a:t>2</a:t>
+            </a:r>
+            <a:endParaRPr lang="ar-SA" sz="1600" dirty="0"/>
+          </a:p>
+        </p:txBody>
+      </p:sp>
+      <p:sp>
+        <p:nvSpPr>
+          <p:cNvPr id="12" name="Text 10"/>
+          <p:cNvSpPr txBox="1"/>
+          <p:nvPr/>
+        </p:nvSpPr>
+        <p:spPr>
+          <a:xfrm>
+            <a:off x="4565904" y="2377440"/>
+            <a:ext cx="3057144" cy="365760"/>
+          </a:xfrm>
+          <a:prstGeom prst="rect">
+            <a:avLst/>
+          </a:prstGeom>
+          <a:noFill/>
+          <a:ln/>
+        </p:spPr>
+        <p:txBody>
+          <a:bodyPr wrap="square" lIns="0" tIns="0" rIns="0" bIns="0" rtlCol="0" anchor="t"/>
+          <a:lstStyle/>
+          <a:p>
+            <a:pPr rtl="1" algn="r" indent="0" marL="0">
+              <a:buNone/>
+            </a:pPr>
+            <a:r>
+              <a:rPr lang="ar-SA" altLang="en-US" sz="1600" b="1" dirty="0">
+                <a:solidFill>
+                  <a:srgbClr val="17504E"/>
+                </a:solidFill>
+                <a:latin typeface="Arial" pitchFamily="34" charset="0"/>
+                <a:ea typeface="Arial" pitchFamily="34" charset="-122"/>
+                <a:cs typeface="Arial" pitchFamily="34" charset="-120"/>
+              </a:rPr>
+              <a:t>قائمة تحقق مركّبة</a:t>
+            </a:r>
+            <a:endParaRPr lang="ar-SA" sz="1600" dirty="0"/>
+          </a:p>
+        </p:txBody>
+      </p:sp>
+      <p:sp>
+        <p:nvSpPr>
+          <p:cNvPr id="13" name="Text 11"/>
+          <p:cNvSpPr txBox="1"/>
+          <p:nvPr/>
+        </p:nvSpPr>
+        <p:spPr>
+          <a:xfrm>
+            <a:off x="4565904" y="2788920"/>
+            <a:ext cx="3057144" cy="548640"/>
+          </a:xfrm>
+          <a:prstGeom prst="rect">
+            <a:avLst/>
+          </a:prstGeom>
+          <a:noFill/>
+          <a:ln/>
+        </p:spPr>
+        <p:txBody>
+          <a:bodyPr wrap="square" lIns="0" tIns="0" rIns="0" bIns="0" rtlCol="0" anchor="t"/>
+          <a:lstStyle/>
+          <a:p>
+            <a:pPr rtl="1" algn="r" indent="0" marL="0">
+              <a:buNone/>
+            </a:pPr>
+            <a:r>
+              <a:rPr lang="ar-SA" altLang="en-US" sz="1100" dirty="0">
+                <a:solidFill>
+                  <a:srgbClr val="6B7F7E"/>
+                </a:solidFill>
+                <a:latin typeface="Arial" pitchFamily="34" charset="0"/>
+                <a:ea typeface="Arial" pitchFamily="34" charset="-122"/>
+                <a:cs typeface="Arial" pitchFamily="34" charset="-120"/>
+              </a:rPr>
+              <a:t>يدمج متطلبات الخدمة مع الخطوات السابقة غير المكتملة في قائمة واحدة</a:t>
+            </a:r>
+            <a:endParaRPr lang="ar-SA" sz="1100" dirty="0"/>
+          </a:p>
+        </p:txBody>
+      </p:sp>
+      <p:sp>
+        <p:nvSpPr>
+          <p:cNvPr id="14" name="Shape 12"/>
+          <p:cNvSpPr/>
+          <p:nvPr/>
+        </p:nvSpPr>
+        <p:spPr>
+          <a:xfrm>
+            <a:off x="548640" y="1645920"/>
+            <a:ext cx="3514344" cy="1783080"/>
           </a:xfrm>
           <a:prstGeom prst="roundRect">
             <a:avLst>
-              <a:gd name="adj" fmla="val 12414"/>
+              <a:gd name="adj" fmla="val 9231"/>
             </a:avLst>
           </a:prstGeom>
           <a:solidFill>
@@ -5098,14 +5091,78 @@
       </p:sp>
       <p:sp>
         <p:nvSpPr>
-          <p:cNvPr id="11" name="Text 9"/>
-          <p:cNvSpPr txBox="1"/>
-          <p:nvPr/>
-        </p:nvSpPr>
-        <p:spPr>
-          <a:xfrm>
-            <a:off x="6505956" y="3401568"/>
-            <a:ext cx="4860036" cy="411480"/>
+          <p:cNvPr id="15" name="Shape 13"/>
+          <p:cNvSpPr/>
+          <p:nvPr/>
+        </p:nvSpPr>
+        <p:spPr>
+          <a:xfrm>
+            <a:off x="3349752" y="1847088"/>
+            <a:ext cx="457200" cy="457200"/>
+          </a:xfrm>
+          <a:prstGeom prst="ellipse">
+            <a:avLst/>
+          </a:prstGeom>
+          <a:solidFill>
+            <a:srgbClr val="1F6A68"/>
+          </a:solidFill>
+          <a:ln w="12700">
+            <a:solidFill>
+              <a:srgbClr val="1F6A68"/>
+            </a:solidFill>
+            <a:prstDash val="solid"/>
+          </a:ln>
+        </p:spPr>
+      </p:sp>
+      <p:sp>
+        <p:nvSpPr>
+          <p:cNvPr id="16" name="Text 14"/>
+          <p:cNvSpPr txBox="1"/>
+          <p:nvPr/>
+        </p:nvSpPr>
+        <p:spPr>
+          <a:xfrm>
+            <a:off x="3349752" y="1847088"/>
+            <a:ext cx="457200" cy="457200"/>
+          </a:xfrm>
+          <a:prstGeom prst="rect">
+            <a:avLst/>
+          </a:prstGeom>
+          <a:noFill/>
+          <a:ln/>
+        </p:spPr>
+        <p:txBody>
+          <a:bodyPr wrap="square" lIns="0" tIns="0" rIns="0" bIns="0" rtlCol="0" anchor="ctr"/>
+          <a:lstStyle/>
+          <a:p>
+            <a:pPr rtl="1" algn="ctr" indent="0" marL="0">
+              <a:buNone/>
+            </a:pPr>
+            <a:r>
+              <a:rPr lang="ar-SA" altLang="en-US" sz="1600" b="1" dirty="0">
+                <a:solidFill>
+                  <a:srgbClr val="FFFFFF"/>
+                </a:solidFill>
+                <a:latin typeface="Arial" pitchFamily="34" charset="0"/>
+                <a:ea typeface="Arial" pitchFamily="34" charset="-122"/>
+                <a:cs typeface="Arial" pitchFamily="34" charset="-120"/>
+              </a:rPr>
+              <a:t>3</a:t>
+            </a:r>
+            <a:endParaRPr lang="ar-SA" sz="1600" dirty="0"/>
+          </a:p>
+        </p:txBody>
+      </p:sp>
+      <p:sp>
+        <p:nvSpPr>
+          <p:cNvPr id="17" name="Text 15"/>
+          <p:cNvSpPr txBox="1"/>
+          <p:nvPr/>
+        </p:nvSpPr>
+        <p:spPr>
+          <a:xfrm>
+            <a:off x="777240" y="2377440"/>
+            <a:ext cx="3057144" cy="365760"/>
           </a:xfrm>
           <a:prstGeom prst="rect">
             <a:avLst/>
@@ -5129,7 +5186,7 @@
                 <a:ea typeface="Arial" pitchFamily="34" charset="-122"/>
                 <a:cs typeface="Arial" pitchFamily="34" charset="-120"/>
               </a:rPr>
-              <a:t>🛟 خطة بديلة</a:t>
+              <a:t>مؤشر الجاهزية</a:t>
             </a:r>
             <a:endParaRPr lang="ar-SA" sz="1600" dirty="0"/>
           </a:p>
@@ -5137,14 +5194,14 @@
       </p:sp>
       <p:sp>
         <p:nvSpPr>
-          <p:cNvPr id="12" name="Text 10"/>
-          <p:cNvSpPr txBox="1"/>
-          <p:nvPr/>
-        </p:nvSpPr>
-        <p:spPr>
-          <a:xfrm>
-            <a:off x="6505956" y="3840480"/>
-            <a:ext cx="4860036" cy="640080"/>
+          <p:cNvPr id="18" name="Text 16"/>
+          <p:cNvSpPr txBox="1"/>
+          <p:nvPr/>
+        </p:nvSpPr>
+        <p:spPr>
+          <a:xfrm>
+            <a:off x="777240" y="2788920"/>
+            <a:ext cx="3057144" cy="548640"/>
           </a:xfrm>
           <a:prstGeom prst="rect">
             <a:avLst/>
@@ -5160,7 +5217,7 @@
               <a:buNone/>
             </a:pPr>
             <a:r>
-              <a:rPr lang="ar-SA" altLang="en-US" sz="1200" dirty="0">
+              <a:rPr lang="ar-SA" altLang="en-US" sz="1100" dirty="0">
                 <a:solidFill>
                   <a:srgbClr val="6B7F7E"/>
                 </a:solidFill>
@@ -5168,26 +5225,26 @@
                 <a:ea typeface="Arial" pitchFamily="34" charset="-122"/>
                 <a:cs typeface="Arial" pitchFamily="34" charset="-120"/>
               </a:rPr>
-              <a:t>الفهم بالقواعد يعمل حتى لو انقطع الاتصال بالنموذج، فلا يتوقف العرض</a:t>
-            </a:r>
-            <a:endParaRPr lang="ar-SA" sz="1200" dirty="0"/>
-          </a:p>
-        </p:txBody>
-      </p:sp>
-      <p:sp>
-        <p:nvSpPr>
-          <p:cNvPr id="13" name="Shape 11"/>
+              <a:t>نسبة مئوية وثلاث حالات: أخضر جاهز، أصفر ناقص، أحمر خطوة سابقة لم تكتمل</a:t>
+            </a:r>
+            <a:endParaRPr lang="ar-SA" sz="1100" dirty="0"/>
+          </a:p>
+        </p:txBody>
+      </p:sp>
+      <p:sp>
+        <p:nvSpPr>
+          <p:cNvPr id="19" name="Shape 17"/>
           <p:cNvSpPr/>
           <p:nvPr/>
         </p:nvSpPr>
         <p:spPr>
           <a:xfrm>
-            <a:off x="548640" y="3200400"/>
-            <a:ext cx="5408676" cy="1325880"/>
+            <a:off x="8125968" y="3703320"/>
+            <a:ext cx="3514344" cy="1783080"/>
           </a:xfrm>
           <a:prstGeom prst="roundRect">
             <a:avLst>
-              <a:gd name="adj" fmla="val 12414"/>
+              <a:gd name="adj" fmla="val 9231"/>
             </a:avLst>
           </a:prstGeom>
           <a:solidFill>
@@ -5210,14 +5267,78 @@
       </p:sp>
       <p:sp>
         <p:nvSpPr>
-          <p:cNvPr id="14" name="Text 12"/>
-          <p:cNvSpPr txBox="1"/>
-          <p:nvPr/>
-        </p:nvSpPr>
-        <p:spPr>
-          <a:xfrm>
-            <a:off x="822960" y="3401568"/>
-            <a:ext cx="4860036" cy="411480"/>
+          <p:cNvPr id="20" name="Shape 18"/>
+          <p:cNvSpPr/>
+          <p:nvPr/>
+        </p:nvSpPr>
+        <p:spPr>
+          <a:xfrm>
+            <a:off x="10927080" y="3904488"/>
+            <a:ext cx="457200" cy="457200"/>
+          </a:xfrm>
+          <a:prstGeom prst="ellipse">
+            <a:avLst/>
+          </a:prstGeom>
+          <a:solidFill>
+            <a:srgbClr val="1F6A68"/>
+          </a:solidFill>
+          <a:ln w="12700">
+            <a:solidFill>
+              <a:srgbClr val="1F6A68"/>
+            </a:solidFill>
+            <a:prstDash val="solid"/>
+          </a:ln>
+        </p:spPr>
+      </p:sp>
+      <p:sp>
+        <p:nvSpPr>
+          <p:cNvPr id="21" name="Text 19"/>
+          <p:cNvSpPr txBox="1"/>
+          <p:nvPr/>
+        </p:nvSpPr>
+        <p:spPr>
+          <a:xfrm>
+            <a:off x="10927080" y="3904488"/>
+            <a:ext cx="457200" cy="457200"/>
+          </a:xfrm>
+          <a:prstGeom prst="rect">
+            <a:avLst/>
+          </a:prstGeom>
+          <a:noFill/>
+          <a:ln/>
+        </p:spPr>
+        <p:txBody>
+          <a:bodyPr wrap="square" lIns="0" tIns="0" rIns="0" bIns="0" rtlCol="0" anchor="ctr"/>
+          <a:lstStyle/>
+          <a:p>
+            <a:pPr rtl="1" algn="ctr" indent="0" marL="0">
+              <a:buNone/>
+            </a:pPr>
+            <a:r>
+              <a:rPr lang="ar-SA" altLang="en-US" sz="1600" b="1" dirty="0">
+                <a:solidFill>
+                  <a:srgbClr val="FFFFFF"/>
+                </a:solidFill>
+                <a:latin typeface="Arial" pitchFamily="34" charset="0"/>
+                <a:ea typeface="Arial" pitchFamily="34" charset="-122"/>
+                <a:cs typeface="Arial" pitchFamily="34" charset="-120"/>
+              </a:rPr>
+              <a:t>4</a:t>
+            </a:r>
+            <a:endParaRPr lang="ar-SA" sz="1600" dirty="0"/>
+          </a:p>
+        </p:txBody>
+      </p:sp>
+      <p:sp>
+        <p:nvSpPr>
+          <p:cNvPr id="22" name="Text 20"/>
+          <p:cNvSpPr txBox="1"/>
+          <p:nvPr/>
+        </p:nvSpPr>
+        <p:spPr>
+          <a:xfrm>
+            <a:off x="8354568" y="4434840"/>
+            <a:ext cx="3057144" cy="365760"/>
           </a:xfrm>
           <a:prstGeom prst="rect">
             <a:avLst/>
@@ -5241,7 +5362,7 @@
                 <a:ea typeface="Arial" pitchFamily="34" charset="-122"/>
                 <a:cs typeface="Arial" pitchFamily="34" charset="-120"/>
               </a:rPr>
-              <a:t>🎤 الإدخال الصوتي</a:t>
+              <a:t>كشف العائق</a:t>
             </a:r>
             <a:endParaRPr lang="ar-SA" sz="1600" dirty="0"/>
           </a:p>
@@ -5249,14 +5370,14 @@
       </p:sp>
       <p:sp>
         <p:nvSpPr>
-          <p:cNvPr id="15" name="Text 13"/>
-          <p:cNvSpPr txBox="1"/>
-          <p:nvPr/>
-        </p:nvSpPr>
-        <p:spPr>
-          <a:xfrm>
-            <a:off x="822960" y="3840480"/>
-            <a:ext cx="4860036" cy="640080"/>
+          <p:cNvPr id="23" name="Text 21"/>
+          <p:cNvSpPr txBox="1"/>
+          <p:nvPr/>
+        </p:nvSpPr>
+        <p:spPr>
+          <a:xfrm>
+            <a:off x="8354568" y="4846320"/>
+            <a:ext cx="3057144" cy="548640"/>
           </a:xfrm>
           <a:prstGeom prst="rect">
             <a:avLst/>
@@ -5272,7 +5393,7 @@
               <a:buNone/>
             </a:pPr>
             <a:r>
-              <a:rPr lang="ar-SA" altLang="en-US" sz="1200" dirty="0">
+              <a:rPr lang="ar-SA" altLang="en-US" sz="1100" dirty="0">
                 <a:solidFill>
                   <a:srgbClr val="6B7F7E"/>
                 </a:solidFill>
@@ -5280,26 +5401,26 @@
                 <a:ea typeface="Arial" pitchFamily="34" charset="-122"/>
                 <a:cs typeface="Arial" pitchFamily="34" charset="-120"/>
               </a:rPr>
-              <a:t>تقنية Web Speech في المتصفح تحوّل الكلام العربي إلى نص فوراً</a:t>
-            </a:r>
-            <a:endParaRPr lang="ar-SA" sz="1200" dirty="0"/>
-          </a:p>
-        </p:txBody>
-      </p:sp>
-      <p:sp>
-        <p:nvSpPr>
-          <p:cNvPr id="16" name="Shape 14"/>
+              <a:t>أول متطلب ناقص يصبح العائق، ومعه سببه ومساره الرسمي وجهته</a:t>
+            </a:r>
+            <a:endParaRPr lang="ar-SA" sz="1100" dirty="0"/>
+          </a:p>
+        </p:txBody>
+      </p:sp>
+      <p:sp>
+        <p:nvSpPr>
+          <p:cNvPr id="24" name="Shape 22"/>
           <p:cNvSpPr/>
           <p:nvPr/>
         </p:nvSpPr>
         <p:spPr>
           <a:xfrm>
-            <a:off x="6231636" y="4754880"/>
-            <a:ext cx="5408676" cy="1325880"/>
+            <a:off x="4337304" y="3703320"/>
+            <a:ext cx="3514344" cy="1783080"/>
           </a:xfrm>
           <a:prstGeom prst="roundRect">
             <a:avLst>
-              <a:gd name="adj" fmla="val 12414"/>
+              <a:gd name="adj" fmla="val 9231"/>
             </a:avLst>
           </a:prstGeom>
           <a:solidFill>
@@ -5322,14 +5443,78 @@
       </p:sp>
       <p:sp>
         <p:nvSpPr>
-          <p:cNvPr id="17" name="Text 15"/>
-          <p:cNvSpPr txBox="1"/>
-          <p:nvPr/>
-        </p:nvSpPr>
-        <p:spPr>
-          <a:xfrm>
-            <a:off x="6505956" y="4956048"/>
-            <a:ext cx="4860036" cy="411480"/>
+          <p:cNvPr id="25" name="Shape 23"/>
+          <p:cNvSpPr/>
+          <p:nvPr/>
+        </p:nvSpPr>
+        <p:spPr>
+          <a:xfrm>
+            <a:off x="7138416" y="3904488"/>
+            <a:ext cx="457200" cy="457200"/>
+          </a:xfrm>
+          <a:prstGeom prst="ellipse">
+            <a:avLst/>
+          </a:prstGeom>
+          <a:solidFill>
+            <a:srgbClr val="1F6A68"/>
+          </a:solidFill>
+          <a:ln w="12700">
+            <a:solidFill>
+              <a:srgbClr val="1F6A68"/>
+            </a:solidFill>
+            <a:prstDash val="solid"/>
+          </a:ln>
+        </p:spPr>
+      </p:sp>
+      <p:sp>
+        <p:nvSpPr>
+          <p:cNvPr id="26" name="Text 24"/>
+          <p:cNvSpPr txBox="1"/>
+          <p:nvPr/>
+        </p:nvSpPr>
+        <p:spPr>
+          <a:xfrm>
+            <a:off x="7138416" y="3904488"/>
+            <a:ext cx="457200" cy="457200"/>
+          </a:xfrm>
+          <a:prstGeom prst="rect">
+            <a:avLst/>
+          </a:prstGeom>
+          <a:noFill/>
+          <a:ln/>
+        </p:spPr>
+        <p:txBody>
+          <a:bodyPr wrap="square" lIns="0" tIns="0" rIns="0" bIns="0" rtlCol="0" anchor="ctr"/>
+          <a:lstStyle/>
+          <a:p>
+            <a:pPr rtl="1" algn="ctr" indent="0" marL="0">
+              <a:buNone/>
+            </a:pPr>
+            <a:r>
+              <a:rPr lang="ar-SA" altLang="en-US" sz="1600" b="1" dirty="0">
+                <a:solidFill>
+                  <a:srgbClr val="FFFFFF"/>
+                </a:solidFill>
+                <a:latin typeface="Arial" pitchFamily="34" charset="0"/>
+                <a:ea typeface="Arial" pitchFamily="34" charset="-122"/>
+                <a:cs typeface="Arial" pitchFamily="34" charset="-120"/>
+              </a:rPr>
+              <a:t>5</a:t>
+            </a:r>
+            <a:endParaRPr lang="ar-SA" sz="1600" dirty="0"/>
+          </a:p>
+        </p:txBody>
+      </p:sp>
+      <p:sp>
+        <p:nvSpPr>
+          <p:cNvPr id="27" name="Text 25"/>
+          <p:cNvSpPr txBox="1"/>
+          <p:nvPr/>
+        </p:nvSpPr>
+        <p:spPr>
+          <a:xfrm>
+            <a:off x="4565904" y="4434840"/>
+            <a:ext cx="3057144" cy="365760"/>
           </a:xfrm>
           <a:prstGeom prst="rect">
             <a:avLst/>
@@ -5353,7 +5538,7 @@
                 <a:ea typeface="Arial" pitchFamily="34" charset="-122"/>
                 <a:cs typeface="Arial" pitchFamily="34" charset="-120"/>
               </a:rPr>
-              <a:t>📚 مساعد سياقي</a:t>
+              <a:t>الخطوة التالية</a:t>
             </a:r>
             <a:endParaRPr lang="ar-SA" sz="1600" dirty="0"/>
           </a:p>
@@ -5361,14 +5546,14 @@
       </p:sp>
       <p:sp>
         <p:nvSpPr>
-          <p:cNvPr id="18" name="Text 16"/>
-          <p:cNvSpPr txBox="1"/>
-          <p:nvPr/>
-        </p:nvSpPr>
-        <p:spPr>
-          <a:xfrm>
-            <a:off x="6505956" y="5394960"/>
-            <a:ext cx="4860036" cy="640080"/>
+          <p:cNvPr id="28" name="Text 26"/>
+          <p:cNvSpPr txBox="1"/>
+          <p:nvPr/>
+        </p:nvSpPr>
+        <p:spPr>
+          <a:xfrm>
+            <a:off x="4565904" y="4846320"/>
+            <a:ext cx="3057144" cy="548640"/>
           </a:xfrm>
           <a:prstGeom prst="rect">
             <a:avLst/>
@@ -5384,7 +5569,7 @@
               <a:buNone/>
             </a:pPr>
             <a:r>
-              <a:rPr lang="ar-SA" altLang="en-US" sz="1200" dirty="0">
+              <a:rPr lang="ar-SA" altLang="en-US" sz="1100" dirty="0">
                 <a:solidFill>
                   <a:srgbClr val="6B7F7E"/>
                 </a:solidFill>
@@ -5392,88 +5577,134 @@
                 <a:ea typeface="Arial" pitchFamily="34" charset="-122"/>
                 <a:cs typeface="Arial" pitchFamily="34" charset="-120"/>
               </a:rPr>
-              <a:t>يجيب داخل الرحلة من قاعدة المعرفة الرسمية فقط، ولا يقترح تجاوز الأنظمة</a:t>
-            </a:r>
-            <a:endParaRPr lang="ar-SA" sz="1200" dirty="0"/>
-          </a:p>
-        </p:txBody>
-      </p:sp>
-      <p:sp>
-        <p:nvSpPr>
-          <p:cNvPr id="19" name="Shape 17"/>
+              <a:t>إما إكمال متطلب أو التقديم، مع رابط القناة الرسمية والمدة المتوقعة</a:t>
+            </a:r>
+            <a:endParaRPr lang="ar-SA" sz="1100" dirty="0"/>
+          </a:p>
+        </p:txBody>
+      </p:sp>
+      <p:sp>
+        <p:nvSpPr>
+          <p:cNvPr id="29" name="Shape 27"/>
           <p:cNvSpPr/>
           <p:nvPr/>
         </p:nvSpPr>
         <p:spPr>
           <a:xfrm>
-            <a:off x="822960" y="5166360"/>
-            <a:ext cx="1463040" cy="457200"/>
+            <a:off x="548640" y="3703320"/>
+            <a:ext cx="3514344" cy="1783080"/>
           </a:xfrm>
           <a:prstGeom prst="roundRect">
             <a:avLst>
-              <a:gd name="adj" fmla="val 50000"/>
+              <a:gd name="adj" fmla="val 9231"/>
             </a:avLst>
           </a:prstGeom>
           <a:solidFill>
             <a:srgbClr val="E3F0EF"/>
           </a:solidFill>
-          <a:ln w="12700">
+          <a:ln w="9525">
             <a:solidFill>
-              <a:srgbClr val="E3F0EF"/>
+              <a:srgbClr val="CFE3E1"/>
             </a:solidFill>
             <a:prstDash val="solid"/>
           </a:ln>
-        </p:spPr>
-      </p:sp>
-      <p:sp>
-        <p:nvSpPr>
-          <p:cNvPr id="20" name="Text 18"/>
-          <p:cNvSpPr txBox="1"/>
-          <p:nvPr/>
-        </p:nvSpPr>
-        <p:spPr>
-          <a:xfrm>
-            <a:off x="822960" y="5166360"/>
-            <a:ext cx="1463040" cy="457200"/>
-          </a:xfrm>
-          <a:prstGeom prst="rect">
-            <a:avLst/>
-          </a:prstGeom>
-          <a:noFill/>
-          <a:ln/>
-        </p:spPr>
-        <p:txBody>
-          <a:bodyPr wrap="square" lIns="0" tIns="0" rIns="0" bIns="0" rtlCol="0" anchor="ctr"/>
-          <a:lstStyle/>
-          <a:p>
-            <a:pPr rtl="1" algn="ctr" indent="0" marL="0">
-              <a:buNone/>
-            </a:pPr>
-            <a:r>
-              <a:rPr lang="ar-SA" altLang="en-US" sz="1200" b="1" dirty="0">
-                <a:solidFill>
-                  <a:srgbClr val="1F6A68"/>
-                </a:solidFill>
-                <a:latin typeface="Arial" pitchFamily="34" charset="0"/>
-                <a:ea typeface="Arial" pitchFamily="34" charset="-122"/>
-                <a:cs typeface="Arial" pitchFamily="34" charset="-120"/>
-              </a:rPr>
-              <a:t>ORACLE</a:t>
-            </a:r>
-            <a:endParaRPr lang="ar-SA" sz="1200" dirty="0"/>
-          </a:p>
-        </p:txBody>
-      </p:sp>
-      <p:sp>
-        <p:nvSpPr>
-          <p:cNvPr id="21" name="Text 19"/>
-          <p:cNvSpPr txBox="1"/>
-          <p:nvPr/>
-        </p:nvSpPr>
-        <p:spPr>
-          <a:xfrm>
-            <a:off x="2468880" y="5212080"/>
-            <a:ext cx="3214116" cy="365760"/>
+          <a:effectLst>
+            <a:outerShdw sx="100000" sy="100000" kx="0" ky="0" algn="bl" rotWithShape="0" blurRad="76200" dist="25400" dir="5400000">
+              <a:srgbClr val="17504E">
+                <a:alpha val="8000"/>
+              </a:srgbClr>
+            </a:outerShdw>
+          </a:effectLst>
+        </p:spPr>
+      </p:sp>
+      <p:sp>
+        <p:nvSpPr>
+          <p:cNvPr id="30" name="Text 28"/>
+          <p:cNvSpPr txBox="1"/>
+          <p:nvPr/>
+        </p:nvSpPr>
+        <p:spPr>
+          <a:xfrm>
+            <a:off x="777240" y="3977640"/>
+            <a:ext cx="3057144" cy="365760"/>
+          </a:xfrm>
+          <a:prstGeom prst="rect">
+            <a:avLst/>
+          </a:prstGeom>
+          <a:noFill/>
+          <a:ln/>
+        </p:spPr>
+        <p:txBody>
+          <a:bodyPr wrap="square" lIns="0" tIns="0" rIns="0" bIns="0" rtlCol="0" anchor="t"/>
+          <a:lstStyle/>
+          <a:p>
+            <a:pPr rtl="1" algn="r" indent="0" marL="0">
+              <a:buNone/>
+            </a:pPr>
+            <a:r>
+              <a:rPr lang="ar-SA" altLang="en-US" sz="1600" b="1" dirty="0">
+                <a:solidFill>
+                  <a:srgbClr val="17504E"/>
+                </a:solidFill>
+                <a:latin typeface="Arial" pitchFamily="34" charset="0"/>
+                <a:ea typeface="Arial" pitchFamily="34" charset="-122"/>
+                <a:cs typeface="Arial" pitchFamily="34" charset="-120"/>
+              </a:rPr>
+              <a:t>✅ مغطّى باختبارات</a:t>
+            </a:r>
+            <a:endParaRPr lang="ar-SA" sz="1600" dirty="0"/>
+          </a:p>
+        </p:txBody>
+      </p:sp>
+      <p:sp>
+        <p:nvSpPr>
+          <p:cNvPr id="31" name="Text 29"/>
+          <p:cNvSpPr txBox="1"/>
+          <p:nvPr/>
+        </p:nvSpPr>
+        <p:spPr>
+          <a:xfrm>
+            <a:off x="777240" y="4434840"/>
+            <a:ext cx="3057144" cy="914400"/>
+          </a:xfrm>
+          <a:prstGeom prst="rect">
+            <a:avLst/>
+          </a:prstGeom>
+          <a:noFill/>
+          <a:ln/>
+        </p:spPr>
+        <p:txBody>
+          <a:bodyPr wrap="square" lIns="0" tIns="0" rIns="0" bIns="0" rtlCol="0" anchor="t"/>
+          <a:lstStyle/>
+          <a:p>
+            <a:pPr rtl="1" algn="r" indent="0" marL="0">
+              <a:buNone/>
+            </a:pPr>
+            <a:r>
+              <a:rPr lang="ar-SA" altLang="en-US" sz="1100" dirty="0">
+                <a:solidFill>
+                  <a:srgbClr val="6B7F7E"/>
+                </a:solidFill>
+                <a:latin typeface="Arial" pitchFamily="34" charset="0"/>
+                <a:ea typeface="Arial" pitchFamily="34" charset="-122"/>
+                <a:cs typeface="Arial" pitchFamily="34" charset="-120"/>
+              </a:rPr>
+              <a:t>30 اختباراً آلياً تشمل سلامة القاعدة، ومطابقة 18 عبارة باللهجة، ومسار العائق كاملاً حتى العودة للرحلة</a:t>
+            </a:r>
+            <a:endParaRPr lang="ar-SA" sz="1100" dirty="0"/>
+          </a:p>
+        </p:txBody>
+      </p:sp>
+      <p:sp>
+        <p:nvSpPr>
+          <p:cNvPr id="32" name="Text 30"/>
+          <p:cNvSpPr txBox="1"/>
+          <p:nvPr/>
+        </p:nvSpPr>
+        <p:spPr>
+          <a:xfrm>
+            <a:off x="548640" y="6382512"/>
+            <a:ext cx="3657600" cy="274320"/>
           </a:xfrm>
           <a:prstGeom prst="rect">
             <a:avLst/>
@@ -5489,7 +5720,7 @@
               <a:buNone/>
             </a:pPr>
             <a:r>
-              <a:rPr lang="ar-SA" altLang="en-US" sz="1200" dirty="0">
+              <a:rPr lang="ar-SA" altLang="en-US" sz="1000" dirty="0">
                 <a:solidFill>
                   <a:srgbClr val="6B7F7E"/>
                 </a:solidFill>
@@ -5497,34 +5728,34 @@
                 <a:ea typeface="Arial" pitchFamily="34" charset="-122"/>
                 <a:cs typeface="Arial" pitchFamily="34" charset="-120"/>
               </a:rPr>
-              <a:t>نموذج لغوي مستضاف لدى Oracle</a:t>
-            </a:r>
-            <a:endParaRPr lang="ar-SA" sz="1200" dirty="0"/>
-          </a:p>
-        </p:txBody>
-      </p:sp>
-      <p:sp>
-        <p:nvSpPr>
-          <p:cNvPr id="22" name="Text 20"/>
-          <p:cNvSpPr txBox="1"/>
-          <p:nvPr/>
-        </p:nvSpPr>
-        <p:spPr>
-          <a:xfrm>
-            <a:off x="548640" y="6355080"/>
-            <a:ext cx="3657600" cy="274320"/>
-          </a:xfrm>
-          <a:prstGeom prst="rect">
-            <a:avLst/>
-          </a:prstGeom>
-          <a:noFill/>
-          <a:ln/>
-        </p:spPr>
-        <p:txBody>
-          <a:bodyPr wrap="square" lIns="0" tIns="0" rIns="0" bIns="0" rtlCol="0" anchor="t"/>
-          <a:lstStyle/>
-          <a:p>
-            <a:pPr rtl="1" algn="l" indent="0" marL="0">
+              <a:t>shamal-ai.vercel.app</a:t>
+            </a:r>
+            <a:endParaRPr lang="ar-SA" sz="1000" dirty="0"/>
+          </a:p>
+        </p:txBody>
+      </p:sp>
+      <p:sp>
+        <p:nvSpPr>
+          <p:cNvPr id="33" name="Text 31"/>
+          <p:cNvSpPr txBox="1"/>
+          <p:nvPr/>
+        </p:nvSpPr>
+        <p:spPr>
+          <a:xfrm>
+            <a:off x="7068312" y="6382512"/>
+            <a:ext cx="4572000" cy="274320"/>
+          </a:xfrm>
+          <a:prstGeom prst="rect">
+            <a:avLst/>
+          </a:prstGeom>
+          <a:noFill/>
+          <a:ln/>
+        </p:spPr>
+        <p:txBody>
+          <a:bodyPr wrap="square" lIns="0" tIns="0" rIns="0" bIns="0" rtlCol="0" anchor="t"/>
+          <a:lstStyle/>
+          <a:p>
+            <a:pPr rtl="1" algn="r" indent="0" marL="0">
               <a:buNone/>
             </a:pPr>
             <a:r>
@@ -5536,46 +5767,7 @@
                 <a:ea typeface="Arial" pitchFamily="34" charset="-122"/>
                 <a:cs typeface="Arial" pitchFamily="34" charset="-120"/>
               </a:rPr>
-              <a:t>shamal-ai.vercel.app</a:t>
-            </a:r>
-            <a:endParaRPr lang="ar-SA" sz="1000" dirty="0"/>
-          </a:p>
-        </p:txBody>
-      </p:sp>
-      <p:sp>
-        <p:nvSpPr>
-          <p:cNvPr id="23" name="Text 21"/>
-          <p:cNvSpPr txBox="1"/>
-          <p:nvPr/>
-        </p:nvSpPr>
-        <p:spPr>
-          <a:xfrm>
-            <a:off x="7068312" y="6355080"/>
-            <a:ext cx="4572000" cy="274320"/>
-          </a:xfrm>
-          <a:prstGeom prst="rect">
-            <a:avLst/>
-          </a:prstGeom>
-          <a:noFill/>
-          <a:ln/>
-        </p:spPr>
-        <p:txBody>
-          <a:bodyPr wrap="square" lIns="0" tIns="0" rIns="0" bIns="0" rtlCol="0" anchor="t"/>
-          <a:lstStyle/>
-          <a:p>
-            <a:pPr rtl="1" algn="r" indent="0" marL="0">
-              <a:buNone/>
-            </a:pPr>
-            <a:r>
-              <a:rPr lang="ar-SA" altLang="en-US" sz="1000" dirty="0">
-                <a:solidFill>
-                  <a:srgbClr val="6B7F7E"/>
-                </a:solidFill>
-                <a:latin typeface="Arial" pitchFamily="34" charset="0"/>
-                <a:ea typeface="Arial" pitchFamily="34" charset="-122"/>
-                <a:cs typeface="Arial" pitchFamily="34" charset="-120"/>
-              </a:rPr>
-              <a:t>شمال AI · ENBTHON 2026 · 5</a:t>
+              <a:t>شمال AI · التقنية · 5</a:t>
             </a:r>
             <a:endParaRPr lang="ar-SA" sz="1000" dirty="0"/>
           </a:p>
@@ -5646,7 +5838,7 @@
                 <a:ea typeface="Arial" pitchFamily="34" charset="-122"/>
                 <a:cs typeface="Arial" pitchFamily="34" charset="-120"/>
               </a:rPr>
-              <a:t>قاعدة المعرفة الحكومية</a:t>
+              <a:t>فهم اللغة والصوت</a:t>
             </a:r>
             <a:endParaRPr lang="ar-SA" sz="3000" dirty="0"/>
           </a:p>
@@ -5685,7 +5877,7 @@
                 <a:ea typeface="Arial" pitchFamily="34" charset="-122"/>
                 <a:cs typeface="Arial" pitchFamily="34" charset="-120"/>
               </a:rPr>
-              <a:t>كل معلومة في التطبيق موثقة من مصدرها الرسمي</a:t>
+              <a:t>ما يعمل اليوم، وما هو مُجهَّز للربط</a:t>
             </a:r>
             <a:endParaRPr lang="ar-SA" sz="1400" dirty="0"/>
           </a:p>
@@ -5699,12 +5891,368 @@
         </p:nvSpPr>
         <p:spPr>
           <a:xfrm>
-            <a:off x="9262872" y="1645920"/>
-            <a:ext cx="2377440" cy="1554480"/>
+            <a:off x="6231636" y="1645920"/>
+            <a:ext cx="5408676" cy="2148840"/>
           </a:xfrm>
           <a:prstGeom prst="roundRect">
             <a:avLst>
-              <a:gd name="adj" fmla="val 10588"/>
+              <a:gd name="adj" fmla="val 7660"/>
+            </a:avLst>
+          </a:prstGeom>
+          <a:solidFill>
+            <a:srgbClr val="E4F0EA"/>
+          </a:solidFill>
+          <a:ln w="9525">
+            <a:solidFill>
+              <a:srgbClr val="CFE3E1"/>
+            </a:solidFill>
+            <a:prstDash val="solid"/>
+          </a:ln>
+          <a:effectLst>
+            <a:outerShdw sx="100000" sy="100000" kx="0" ky="0" algn="bl" rotWithShape="0" blurRad="76200" dist="25400" dir="5400000">
+              <a:srgbClr val="17504E">
+                <a:alpha val="8000"/>
+              </a:srgbClr>
+            </a:outerShdw>
+          </a:effectLst>
+        </p:spPr>
+      </p:sp>
+      <p:sp>
+        <p:nvSpPr>
+          <p:cNvPr id="5" name="Shape 3"/>
+          <p:cNvSpPr/>
+          <p:nvPr/>
+        </p:nvSpPr>
+        <p:spPr>
+          <a:xfrm>
+            <a:off x="9994392" y="1828800"/>
+            <a:ext cx="1371600" cy="347472"/>
+          </a:xfrm>
+          <a:prstGeom prst="roundRect">
+            <a:avLst>
+              <a:gd name="adj" fmla="val 50000"/>
+            </a:avLst>
+          </a:prstGeom>
+          <a:solidFill>
+            <a:srgbClr val="1F6A68"/>
+          </a:solidFill>
+          <a:ln w="12700">
+            <a:solidFill>
+              <a:srgbClr val="1F6A68"/>
+            </a:solidFill>
+            <a:prstDash val="solid"/>
+          </a:ln>
+        </p:spPr>
+      </p:sp>
+      <p:sp>
+        <p:nvSpPr>
+          <p:cNvPr id="6" name="Text 4"/>
+          <p:cNvSpPr txBox="1"/>
+          <p:nvPr/>
+        </p:nvSpPr>
+        <p:spPr>
+          <a:xfrm>
+            <a:off x="9994392" y="1828800"/>
+            <a:ext cx="1371600" cy="347472"/>
+          </a:xfrm>
+          <a:prstGeom prst="rect">
+            <a:avLst/>
+          </a:prstGeom>
+          <a:noFill/>
+          <a:ln/>
+        </p:spPr>
+        <p:txBody>
+          <a:bodyPr wrap="square" lIns="0" tIns="0" rIns="0" bIns="0" rtlCol="0" anchor="ctr"/>
+          <a:lstStyle/>
+          <a:p>
+            <a:pPr rtl="1" algn="ctr" indent="0" marL="0">
+              <a:buNone/>
+            </a:pPr>
+            <a:r>
+              <a:rPr lang="ar-SA" altLang="en-US" sz="1100" b="1" dirty="0">
+                <a:solidFill>
+                  <a:srgbClr val="FFFFFF"/>
+                </a:solidFill>
+                <a:latin typeface="Arial" pitchFamily="34" charset="0"/>
+                <a:ea typeface="Arial" pitchFamily="34" charset="-122"/>
+                <a:cs typeface="Arial" pitchFamily="34" charset="-120"/>
+              </a:rPr>
+              <a:t>يعمل اليوم</a:t>
+            </a:r>
+            <a:endParaRPr lang="ar-SA" sz="1100" dirty="0"/>
+          </a:p>
+        </p:txBody>
+      </p:sp>
+      <p:sp>
+        <p:nvSpPr>
+          <p:cNvPr id="7" name="Text 5"/>
+          <p:cNvSpPr txBox="1"/>
+          <p:nvPr/>
+        </p:nvSpPr>
+        <p:spPr>
+          <a:xfrm>
+            <a:off x="6505956" y="1874520"/>
+            <a:ext cx="3488436" cy="411480"/>
+          </a:xfrm>
+          <a:prstGeom prst="rect">
+            <a:avLst/>
+          </a:prstGeom>
+          <a:noFill/>
+          <a:ln/>
+        </p:spPr>
+        <p:txBody>
+          <a:bodyPr wrap="square" lIns="0" tIns="0" rIns="0" bIns="0" rtlCol="0" anchor="t"/>
+          <a:lstStyle/>
+          <a:p>
+            <a:pPr rtl="1" algn="r" indent="0" marL="0">
+              <a:buNone/>
+            </a:pPr>
+            <a:r>
+              <a:rPr lang="ar-SA" altLang="en-US" sz="1900" b="1" dirty="0">
+                <a:solidFill>
+                  <a:srgbClr val="17504E"/>
+                </a:solidFill>
+                <a:latin typeface="Arial" pitchFamily="34" charset="0"/>
+                <a:ea typeface="Arial" pitchFamily="34" charset="-122"/>
+                <a:cs typeface="Arial" pitchFamily="34" charset="-120"/>
+              </a:rPr>
+              <a:t>محرك مطابقة عربي</a:t>
+            </a:r>
+            <a:endParaRPr lang="ar-SA" sz="1900" dirty="0"/>
+          </a:p>
+        </p:txBody>
+      </p:sp>
+      <p:sp>
+        <p:nvSpPr>
+          <p:cNvPr id="8" name="Text 6"/>
+          <p:cNvSpPr txBox="1"/>
+          <p:nvPr/>
+        </p:nvSpPr>
+        <p:spPr>
+          <a:xfrm>
+            <a:off x="6505956" y="2377440"/>
+            <a:ext cx="4860036" cy="1097280"/>
+          </a:xfrm>
+          <a:prstGeom prst="rect">
+            <a:avLst/>
+          </a:prstGeom>
+          <a:noFill/>
+          <a:ln/>
+        </p:spPr>
+        <p:txBody>
+          <a:bodyPr wrap="square" lIns="0" tIns="0" rIns="0" bIns="0" rtlCol="0" anchor="t"/>
+          <a:lstStyle/>
+          <a:p>
+            <a:pPr rtl="1" algn="r" indent="0" marL="0">
+              <a:buNone/>
+            </a:pPr>
+            <a:r>
+              <a:rPr lang="ar-SA" altLang="en-US" sz="1300" dirty="0">
+                <a:solidFill>
+                  <a:srgbClr val="6B7F7E"/>
+                </a:solidFill>
+                <a:latin typeface="Arial" pitchFamily="34" charset="0"/>
+                <a:ea typeface="Arial" pitchFamily="34" charset="-122"/>
+                <a:cs typeface="Arial" pitchFamily="34" charset="-120"/>
+              </a:rPr>
+              <a:t>يوزّن الكلمات المفتاحية بطولها، فيتفوق «علامة تجارية» على «مشروع». يطبّع الهمزات والتاء المربوطة، ويغطي 17 سيناريو باللهجة السعودية.</a:t>
+            </a:r>
+            <a:endParaRPr lang="ar-SA" sz="1300" dirty="0"/>
+          </a:p>
+        </p:txBody>
+      </p:sp>
+      <p:sp>
+        <p:nvSpPr>
+          <p:cNvPr id="9" name="Shape 7"/>
+          <p:cNvSpPr/>
+          <p:nvPr/>
+        </p:nvSpPr>
+        <p:spPr>
+          <a:xfrm>
+            <a:off x="548640" y="1645920"/>
+            <a:ext cx="5408676" cy="2148840"/>
+          </a:xfrm>
+          <a:prstGeom prst="roundRect">
+            <a:avLst>
+              <a:gd name="adj" fmla="val 7660"/>
+            </a:avLst>
+          </a:prstGeom>
+          <a:solidFill>
+            <a:srgbClr val="FBF3E0"/>
+          </a:solidFill>
+          <a:ln w="9525">
+            <a:solidFill>
+              <a:srgbClr val="E8D9B5"/>
+            </a:solidFill>
+            <a:prstDash val="solid"/>
+          </a:ln>
+          <a:effectLst>
+            <a:outerShdw sx="100000" sy="100000" kx="0" ky="0" algn="bl" rotWithShape="0" blurRad="76200" dist="25400" dir="5400000">
+              <a:srgbClr val="17504E">
+                <a:alpha val="8000"/>
+              </a:srgbClr>
+            </a:outerShdw>
+          </a:effectLst>
+        </p:spPr>
+      </p:sp>
+      <p:sp>
+        <p:nvSpPr>
+          <p:cNvPr id="10" name="Shape 8"/>
+          <p:cNvSpPr/>
+          <p:nvPr/>
+        </p:nvSpPr>
+        <p:spPr>
+          <a:xfrm>
+            <a:off x="3854196" y="1828800"/>
+            <a:ext cx="1828800" cy="347472"/>
+          </a:xfrm>
+          <a:prstGeom prst="roundRect">
+            <a:avLst>
+              <a:gd name="adj" fmla="val 50000"/>
+            </a:avLst>
+          </a:prstGeom>
+          <a:solidFill>
+            <a:srgbClr val="8A6D3B"/>
+          </a:solidFill>
+          <a:ln w="12700">
+            <a:solidFill>
+              <a:srgbClr val="8A6D3B"/>
+            </a:solidFill>
+            <a:prstDash val="solid"/>
+          </a:ln>
+        </p:spPr>
+      </p:sp>
+      <p:sp>
+        <p:nvSpPr>
+          <p:cNvPr id="11" name="Text 9"/>
+          <p:cNvSpPr txBox="1"/>
+          <p:nvPr/>
+        </p:nvSpPr>
+        <p:spPr>
+          <a:xfrm>
+            <a:off x="3854196" y="1828800"/>
+            <a:ext cx="1828800" cy="347472"/>
+          </a:xfrm>
+          <a:prstGeom prst="rect">
+            <a:avLst/>
+          </a:prstGeom>
+          <a:noFill/>
+          <a:ln/>
+        </p:spPr>
+        <p:txBody>
+          <a:bodyPr wrap="square" lIns="0" tIns="0" rIns="0" bIns="0" rtlCol="0" anchor="ctr"/>
+          <a:lstStyle/>
+          <a:p>
+            <a:pPr rtl="1" algn="ctr" indent="0" marL="0">
+              <a:buNone/>
+            </a:pPr>
+            <a:r>
+              <a:rPr lang="ar-SA" altLang="en-US" sz="1100" b="1" dirty="0">
+                <a:solidFill>
+                  <a:srgbClr val="FFFFFF"/>
+                </a:solidFill>
+                <a:latin typeface="Arial" pitchFamily="34" charset="0"/>
+                <a:ea typeface="Arial" pitchFamily="34" charset="-122"/>
+                <a:cs typeface="Arial" pitchFamily="34" charset="-120"/>
+              </a:rPr>
+              <a:t>مُجهَّز، غير مربوط</a:t>
+            </a:r>
+            <a:endParaRPr lang="ar-SA" sz="1100" dirty="0"/>
+          </a:p>
+        </p:txBody>
+      </p:sp>
+      <p:sp>
+        <p:nvSpPr>
+          <p:cNvPr id="12" name="Text 10"/>
+          <p:cNvSpPr txBox="1"/>
+          <p:nvPr/>
+        </p:nvSpPr>
+        <p:spPr>
+          <a:xfrm>
+            <a:off x="822960" y="1874520"/>
+            <a:ext cx="3031236" cy="411480"/>
+          </a:xfrm>
+          <a:prstGeom prst="rect">
+            <a:avLst/>
+          </a:prstGeom>
+          <a:noFill/>
+          <a:ln/>
+        </p:spPr>
+        <p:txBody>
+          <a:bodyPr wrap="square" lIns="0" tIns="0" rIns="0" bIns="0" rtlCol="0" anchor="t"/>
+          <a:lstStyle/>
+          <a:p>
+            <a:pPr rtl="1" algn="r" indent="0" marL="0">
+              <a:buNone/>
+            </a:pPr>
+            <a:r>
+              <a:rPr lang="ar-SA" altLang="en-US" sz="1900" b="1" dirty="0">
+                <a:solidFill>
+                  <a:srgbClr val="17504E"/>
+                </a:solidFill>
+                <a:latin typeface="Arial" pitchFamily="34" charset="0"/>
+                <a:ea typeface="Arial" pitchFamily="34" charset="-122"/>
+                <a:cs typeface="Arial" pitchFamily="34" charset="-120"/>
+              </a:rPr>
+              <a:t>طبقة النموذج اللغوي</a:t>
+            </a:r>
+            <a:endParaRPr lang="ar-SA" sz="1900" dirty="0"/>
+          </a:p>
+        </p:txBody>
+      </p:sp>
+      <p:sp>
+        <p:nvSpPr>
+          <p:cNvPr id="13" name="Text 11"/>
+          <p:cNvSpPr txBox="1"/>
+          <p:nvPr/>
+        </p:nvSpPr>
+        <p:spPr>
+          <a:xfrm>
+            <a:off x="822960" y="2377440"/>
+            <a:ext cx="4860036" cy="1097280"/>
+          </a:xfrm>
+          <a:prstGeom prst="rect">
+            <a:avLst/>
+          </a:prstGeom>
+          <a:noFill/>
+          <a:ln/>
+        </p:spPr>
+        <p:txBody>
+          <a:bodyPr wrap="square" lIns="0" tIns="0" rIns="0" bIns="0" rtlCol="0" anchor="t"/>
+          <a:lstStyle/>
+          <a:p>
+            <a:pPr rtl="1" algn="r" indent="0" marL="0">
+              <a:buNone/>
+            </a:pPr>
+            <a:r>
+              <a:rPr lang="ar-SA" altLang="en-US" sz="1300" dirty="0">
+                <a:solidFill>
+                  <a:srgbClr val="6B7F7E"/>
+                </a:solidFill>
+                <a:latin typeface="Arial" pitchFamily="34" charset="0"/>
+                <a:ea typeface="Arial" pitchFamily="34" charset="-122"/>
+                <a:cs typeface="Arial" pitchFamily="34" charset="-120"/>
+              </a:rPr>
+              <a:t>واجهة واحدة تدعم: Oracle، وAnthropic، وأي نقطة نهاية متوافقة مع OpenAI. تُفعَّل بمتغير بيئة واحد، وعند تعطلها يرجع الفهم للقواعد تلقائياً.</a:t>
+            </a:r>
+            <a:endParaRPr lang="ar-SA" sz="1300" dirty="0"/>
+          </a:p>
+        </p:txBody>
+      </p:sp>
+      <p:sp>
+        <p:nvSpPr>
+          <p:cNvPr id="14" name="Shape 12"/>
+          <p:cNvSpPr/>
+          <p:nvPr/>
+        </p:nvSpPr>
+        <p:spPr>
+          <a:xfrm>
+            <a:off x="548640" y="4023360"/>
+            <a:ext cx="11091672" cy="1417320"/>
+          </a:xfrm>
+          <a:prstGeom prst="roundRect">
+            <a:avLst>
+              <a:gd name="adj" fmla="val 11613"/>
             </a:avLst>
           </a:prstGeom>
           <a:solidFill>
@@ -5727,14 +6275,92 @@
       </p:sp>
       <p:sp>
         <p:nvSpPr>
-          <p:cNvPr id="5" name="Text 3"/>
-          <p:cNvSpPr txBox="1"/>
-          <p:nvPr/>
-        </p:nvSpPr>
-        <p:spPr>
-          <a:xfrm>
-            <a:off x="9262872" y="1783080"/>
-            <a:ext cx="2377440" cy="822960"/>
+          <p:cNvPr id="15" name="Text 13"/>
+          <p:cNvSpPr txBox="1"/>
+          <p:nvPr/>
+        </p:nvSpPr>
+        <p:spPr>
+          <a:xfrm>
+            <a:off x="822960" y="4224528"/>
+            <a:ext cx="2926080" cy="411480"/>
+          </a:xfrm>
+          <a:prstGeom prst="rect">
+            <a:avLst/>
+          </a:prstGeom>
+          <a:noFill/>
+          <a:ln/>
+        </p:spPr>
+        <p:txBody>
+          <a:bodyPr wrap="square" lIns="0" tIns="0" rIns="0" bIns="0" rtlCol="0" anchor="t"/>
+          <a:lstStyle/>
+          <a:p>
+            <a:pPr rtl="1" algn="r" indent="0" marL="0">
+              <a:buNone/>
+            </a:pPr>
+            <a:r>
+              <a:rPr lang="ar-SA" altLang="en-US" sz="1900" b="1" dirty="0">
+                <a:solidFill>
+                  <a:srgbClr val="17504E"/>
+                </a:solidFill>
+                <a:latin typeface="Arial" pitchFamily="34" charset="0"/>
+                <a:ea typeface="Arial" pitchFamily="34" charset="-122"/>
+                <a:cs typeface="Arial" pitchFamily="34" charset="-120"/>
+              </a:rPr>
+              <a:t>🎤 الإدخال الصوتي</a:t>
+            </a:r>
+            <a:endParaRPr lang="ar-SA" sz="1900" dirty="0"/>
+          </a:p>
+        </p:txBody>
+      </p:sp>
+      <p:sp>
+        <p:nvSpPr>
+          <p:cNvPr id="16" name="Text 14"/>
+          <p:cNvSpPr txBox="1"/>
+          <p:nvPr/>
+        </p:nvSpPr>
+        <p:spPr>
+          <a:xfrm>
+            <a:off x="822960" y="4681728"/>
+            <a:ext cx="10543032" cy="640080"/>
+          </a:xfrm>
+          <a:prstGeom prst="rect">
+            <a:avLst/>
+          </a:prstGeom>
+          <a:noFill/>
+          <a:ln/>
+        </p:spPr>
+        <p:txBody>
+          <a:bodyPr wrap="square" lIns="0" tIns="0" rIns="0" bIns="0" rtlCol="0" anchor="t"/>
+          <a:lstStyle/>
+          <a:p>
+            <a:pPr rtl="1" algn="r" indent="0" marL="0">
+              <a:buNone/>
+            </a:pPr>
+            <a:r>
+              <a:rPr lang="ar-SA" altLang="en-US" sz="1300" dirty="0">
+                <a:solidFill>
+                  <a:srgbClr val="6B7F7E"/>
+                </a:solidFill>
+                <a:latin typeface="Arial" pitchFamily="34" charset="0"/>
+                <a:ea typeface="Arial" pitchFamily="34" charset="-122"/>
+                <a:cs typeface="Arial" pitchFamily="34" charset="-120"/>
+              </a:rPr>
+              <a:t>Web Speech API داخل المتصفح بلغة ar-SA: يحوّل الكلام العربي إلى نص فوراً، بلا خدمة خارجية وبلا تكلفة. يعمل في Chrome وEdge، ومع رفض الإذن تظهر رسالة عربية واضحة بدل الفشل الصامت.</a:t>
+            </a:r>
+            <a:endParaRPr lang="ar-SA" sz="1300" dirty="0"/>
+          </a:p>
+        </p:txBody>
+      </p:sp>
+      <p:sp>
+        <p:nvSpPr>
+          <p:cNvPr id="17" name="Text 15"/>
+          <p:cNvSpPr txBox="1"/>
+          <p:nvPr/>
+        </p:nvSpPr>
+        <p:spPr>
+          <a:xfrm>
+            <a:off x="548640" y="5669280"/>
+            <a:ext cx="11091672" cy="365760"/>
           </a:xfrm>
           <a:prstGeom prst="rect">
             <a:avLst/>
@@ -5750,7 +6376,7 @@
               <a:buNone/>
             </a:pPr>
             <a:r>
-              <a:rPr lang="ar-SA" altLang="en-US" sz="4800" b="1" dirty="0">
+              <a:rPr lang="ar-SA" altLang="en-US" sz="1200" b="1" dirty="0">
                 <a:solidFill>
                   <a:srgbClr val="1F6A68"/>
                 </a:solidFill>
@@ -5758,38 +6384,38 @@
                 <a:ea typeface="Arial" pitchFamily="34" charset="-122"/>
                 <a:cs typeface="Arial" pitchFamily="34" charset="-120"/>
               </a:rPr>
-              <a:t>23</a:t>
-            </a:r>
-            <a:endParaRPr lang="ar-SA" sz="4800" dirty="0"/>
-          </a:p>
-        </p:txBody>
-      </p:sp>
-      <p:sp>
-        <p:nvSpPr>
-          <p:cNvPr id="6" name="Text 4"/>
-          <p:cNvSpPr txBox="1"/>
-          <p:nvPr/>
-        </p:nvSpPr>
-        <p:spPr>
-          <a:xfrm>
-            <a:off x="9262872" y="2651760"/>
-            <a:ext cx="2377440" cy="365760"/>
-          </a:xfrm>
-          <a:prstGeom prst="rect">
-            <a:avLst/>
-          </a:prstGeom>
-          <a:noFill/>
-          <a:ln/>
-        </p:spPr>
-        <p:txBody>
-          <a:bodyPr wrap="square" lIns="0" tIns="0" rIns="0" bIns="0" rtlCol="0" anchor="t"/>
-          <a:lstStyle/>
-          <a:p>
-            <a:pPr rtl="1" algn="ctr" indent="0" marL="0">
-              <a:buNone/>
-            </a:pPr>
-            <a:r>
-              <a:rPr lang="ar-SA" altLang="en-US" sz="1300" dirty="0">
+              <a:t>المبدأ: لا شيء في العرض يعتمد على اتصال خارجي قد ينقطع أمام اللجنة.</a:t>
+            </a:r>
+            <a:endParaRPr lang="ar-SA" sz="1200" dirty="0"/>
+          </a:p>
+        </p:txBody>
+      </p:sp>
+      <p:sp>
+        <p:nvSpPr>
+          <p:cNvPr id="18" name="Text 16"/>
+          <p:cNvSpPr txBox="1"/>
+          <p:nvPr/>
+        </p:nvSpPr>
+        <p:spPr>
+          <a:xfrm>
+            <a:off x="548640" y="6382512"/>
+            <a:ext cx="3657600" cy="274320"/>
+          </a:xfrm>
+          <a:prstGeom prst="rect">
+            <a:avLst/>
+          </a:prstGeom>
+          <a:noFill/>
+          <a:ln/>
+        </p:spPr>
+        <p:txBody>
+          <a:bodyPr wrap="square" lIns="0" tIns="0" rIns="0" bIns="0" rtlCol="0" anchor="t"/>
+          <a:lstStyle/>
+          <a:p>
+            <a:pPr rtl="1" algn="l" indent="0" marL="0">
+              <a:buNone/>
+            </a:pPr>
+            <a:r>
+              <a:rPr lang="ar-SA" altLang="en-US" sz="1000" dirty="0">
                 <a:solidFill>
                   <a:srgbClr val="6B7F7E"/>
                 </a:solidFill>
@@ -5797,111 +6423,38 @@
                 <a:ea typeface="Arial" pitchFamily="34" charset="-122"/>
                 <a:cs typeface="Arial" pitchFamily="34" charset="-120"/>
               </a:rPr>
-              <a:t>خدمة حكومية</a:t>
-            </a:r>
-            <a:endParaRPr lang="ar-SA" sz="1300" dirty="0"/>
-          </a:p>
-        </p:txBody>
-      </p:sp>
-      <p:sp>
-        <p:nvSpPr>
-          <p:cNvPr id="7" name="Shape 5"/>
-          <p:cNvSpPr/>
-          <p:nvPr/>
-        </p:nvSpPr>
-        <p:spPr>
-          <a:xfrm>
-            <a:off x="6611112" y="1645920"/>
-            <a:ext cx="2377440" cy="1554480"/>
-          </a:xfrm>
-          <a:prstGeom prst="roundRect">
-            <a:avLst>
-              <a:gd name="adj" fmla="val 10588"/>
-            </a:avLst>
-          </a:prstGeom>
-          <a:solidFill>
-            <a:srgbClr val="FFFFFF"/>
-          </a:solidFill>
-          <a:ln w="9525">
-            <a:solidFill>
-              <a:srgbClr val="DDE7E7"/>
-            </a:solidFill>
-            <a:prstDash val="solid"/>
-          </a:ln>
-          <a:effectLst>
-            <a:outerShdw sx="100000" sy="100000" kx="0" ky="0" algn="bl" rotWithShape="0" blurRad="76200" dist="25400" dir="5400000">
-              <a:srgbClr val="17504E">
-                <a:alpha val="8000"/>
-              </a:srgbClr>
-            </a:outerShdw>
-          </a:effectLst>
-        </p:spPr>
-      </p:sp>
-      <p:sp>
-        <p:nvSpPr>
-          <p:cNvPr id="8" name="Text 6"/>
-          <p:cNvSpPr txBox="1"/>
-          <p:nvPr/>
-        </p:nvSpPr>
-        <p:spPr>
-          <a:xfrm>
-            <a:off x="6611112" y="1783080"/>
-            <a:ext cx="2377440" cy="822960"/>
-          </a:xfrm>
-          <a:prstGeom prst="rect">
-            <a:avLst/>
-          </a:prstGeom>
-          <a:noFill/>
-          <a:ln/>
-        </p:spPr>
-        <p:txBody>
-          <a:bodyPr wrap="square" lIns="0" tIns="0" rIns="0" bIns="0" rtlCol="0" anchor="t"/>
-          <a:lstStyle/>
-          <a:p>
-            <a:pPr rtl="1" algn="ctr" indent="0" marL="0">
-              <a:buNone/>
-            </a:pPr>
-            <a:r>
-              <a:rPr lang="ar-SA" altLang="en-US" sz="4800" b="1" dirty="0">
-                <a:solidFill>
-                  <a:srgbClr val="1F6A68"/>
-                </a:solidFill>
-                <a:latin typeface="Arial" pitchFamily="34" charset="0"/>
-                <a:ea typeface="Arial" pitchFamily="34" charset="-122"/>
-                <a:cs typeface="Arial" pitchFamily="34" charset="-120"/>
-              </a:rPr>
-              <a:t>17</a:t>
-            </a:r>
-            <a:endParaRPr lang="ar-SA" sz="4800" dirty="0"/>
-          </a:p>
-        </p:txBody>
-      </p:sp>
-      <p:sp>
-        <p:nvSpPr>
-          <p:cNvPr id="9" name="Text 7"/>
-          <p:cNvSpPr txBox="1"/>
-          <p:nvPr/>
-        </p:nvSpPr>
-        <p:spPr>
-          <a:xfrm>
-            <a:off x="6611112" y="2651760"/>
-            <a:ext cx="2377440" cy="365760"/>
-          </a:xfrm>
-          <a:prstGeom prst="rect">
-            <a:avLst/>
-          </a:prstGeom>
-          <a:noFill/>
-          <a:ln/>
-        </p:spPr>
-        <p:txBody>
-          <a:bodyPr wrap="square" lIns="0" tIns="0" rIns="0" bIns="0" rtlCol="0" anchor="t"/>
-          <a:lstStyle/>
-          <a:p>
-            <a:pPr rtl="1" algn="ctr" indent="0" marL="0">
-              <a:buNone/>
-            </a:pPr>
-            <a:r>
-              <a:rPr lang="ar-SA" altLang="en-US" sz="1300" dirty="0">
+              <a:t>shamal-ai.vercel.app</a:t>
+            </a:r>
+            <a:endParaRPr lang="ar-SA" sz="1000" dirty="0"/>
+          </a:p>
+        </p:txBody>
+      </p:sp>
+      <p:sp>
+        <p:nvSpPr>
+          <p:cNvPr id="19" name="Text 17"/>
+          <p:cNvSpPr txBox="1"/>
+          <p:nvPr/>
+        </p:nvSpPr>
+        <p:spPr>
+          <a:xfrm>
+            <a:off x="7068312" y="6382512"/>
+            <a:ext cx="4572000" cy="274320"/>
+          </a:xfrm>
+          <a:prstGeom prst="rect">
+            <a:avLst/>
+          </a:prstGeom>
+          <a:noFill/>
+          <a:ln/>
+        </p:spPr>
+        <p:txBody>
+          <a:bodyPr wrap="square" lIns="0" tIns="0" rIns="0" bIns="0" rtlCol="0" anchor="t"/>
+          <a:lstStyle/>
+          <a:p>
+            <a:pPr rtl="1" algn="r" indent="0" marL="0">
+              <a:buNone/>
+            </a:pPr>
+            <a:r>
+              <a:rPr lang="ar-SA" altLang="en-US" sz="1000" dirty="0">
                 <a:solidFill>
                   <a:srgbClr val="6B7F7E"/>
                 </a:solidFill>
@@ -5909,410 +6462,7 @@
                 <a:ea typeface="Arial" pitchFamily="34" charset="-122"/>
                 <a:cs typeface="Arial" pitchFamily="34" charset="-120"/>
               </a:rPr>
-              <a:t>سيناريو احتياج</a:t>
-            </a:r>
-            <a:endParaRPr lang="ar-SA" sz="1300" dirty="0"/>
-          </a:p>
-        </p:txBody>
-      </p:sp>
-      <p:sp>
-        <p:nvSpPr>
-          <p:cNvPr id="10" name="Shape 8"/>
-          <p:cNvSpPr/>
-          <p:nvPr/>
-        </p:nvSpPr>
-        <p:spPr>
-          <a:xfrm>
-            <a:off x="3959352" y="1645920"/>
-            <a:ext cx="2377440" cy="1554480"/>
-          </a:xfrm>
-          <a:prstGeom prst="roundRect">
-            <a:avLst>
-              <a:gd name="adj" fmla="val 10588"/>
-            </a:avLst>
-          </a:prstGeom>
-          <a:solidFill>
-            <a:srgbClr val="FFFFFF"/>
-          </a:solidFill>
-          <a:ln w="9525">
-            <a:solidFill>
-              <a:srgbClr val="DDE7E7"/>
-            </a:solidFill>
-            <a:prstDash val="solid"/>
-          </a:ln>
-          <a:effectLst>
-            <a:outerShdw sx="100000" sy="100000" kx="0" ky="0" algn="bl" rotWithShape="0" blurRad="76200" dist="25400" dir="5400000">
-              <a:srgbClr val="17504E">
-                <a:alpha val="8000"/>
-              </a:srgbClr>
-            </a:outerShdw>
-          </a:effectLst>
-        </p:spPr>
-      </p:sp>
-      <p:sp>
-        <p:nvSpPr>
-          <p:cNvPr id="11" name="Text 9"/>
-          <p:cNvSpPr txBox="1"/>
-          <p:nvPr/>
-        </p:nvSpPr>
-        <p:spPr>
-          <a:xfrm>
-            <a:off x="3959352" y="1783080"/>
-            <a:ext cx="2377440" cy="822960"/>
-          </a:xfrm>
-          <a:prstGeom prst="rect">
-            <a:avLst/>
-          </a:prstGeom>
-          <a:noFill/>
-          <a:ln/>
-        </p:spPr>
-        <p:txBody>
-          <a:bodyPr wrap="square" lIns="0" tIns="0" rIns="0" bIns="0" rtlCol="0" anchor="t"/>
-          <a:lstStyle/>
-          <a:p>
-            <a:pPr rtl="1" algn="ctr" indent="0" marL="0">
-              <a:buNone/>
-            </a:pPr>
-            <a:r>
-              <a:rPr lang="ar-SA" altLang="en-US" sz="4800" b="1" dirty="0">
-                <a:solidFill>
-                  <a:srgbClr val="1F6A68"/>
-                </a:solidFill>
-                <a:latin typeface="Arial" pitchFamily="34" charset="0"/>
-                <a:ea typeface="Arial" pitchFamily="34" charset="-122"/>
-                <a:cs typeface="Arial" pitchFamily="34" charset="-120"/>
-              </a:rPr>
-              <a:t>19</a:t>
-            </a:r>
-            <a:endParaRPr lang="ar-SA" sz="4800" dirty="0"/>
-          </a:p>
-        </p:txBody>
-      </p:sp>
-      <p:sp>
-        <p:nvSpPr>
-          <p:cNvPr id="12" name="Text 10"/>
-          <p:cNvSpPr txBox="1"/>
-          <p:nvPr/>
-        </p:nvSpPr>
-        <p:spPr>
-          <a:xfrm>
-            <a:off x="3959352" y="2651760"/>
-            <a:ext cx="2377440" cy="365760"/>
-          </a:xfrm>
-          <a:prstGeom prst="rect">
-            <a:avLst/>
-          </a:prstGeom>
-          <a:noFill/>
-          <a:ln/>
-        </p:spPr>
-        <p:txBody>
-          <a:bodyPr wrap="square" lIns="0" tIns="0" rIns="0" bIns="0" rtlCol="0" anchor="t"/>
-          <a:lstStyle/>
-          <a:p>
-            <a:pPr rtl="1" algn="ctr" indent="0" marL="0">
-              <a:buNone/>
-            </a:pPr>
-            <a:r>
-              <a:rPr lang="ar-SA" altLang="en-US" sz="1300" dirty="0">
-                <a:solidFill>
-                  <a:srgbClr val="6B7F7E"/>
-                </a:solidFill>
-                <a:latin typeface="Arial" pitchFamily="34" charset="0"/>
-                <a:ea typeface="Arial" pitchFamily="34" charset="-122"/>
-                <a:cs typeface="Arial" pitchFamily="34" charset="-120"/>
-              </a:rPr>
-              <a:t>جهة رسمية</a:t>
-            </a:r>
-            <a:endParaRPr lang="ar-SA" sz="1300" dirty="0"/>
-          </a:p>
-        </p:txBody>
-      </p:sp>
-      <p:sp>
-        <p:nvSpPr>
-          <p:cNvPr id="13" name="Shape 11"/>
-          <p:cNvSpPr/>
-          <p:nvPr/>
-        </p:nvSpPr>
-        <p:spPr>
-          <a:xfrm>
-            <a:off x="548640" y="1645920"/>
-            <a:ext cx="3136392" cy="4206240"/>
-          </a:xfrm>
-          <a:prstGeom prst="roundRect">
-            <a:avLst>
-              <a:gd name="adj" fmla="val 5248"/>
-            </a:avLst>
-          </a:prstGeom>
-          <a:solidFill>
-            <a:srgbClr val="FFFFFF"/>
-          </a:solidFill>
-          <a:ln w="9525">
-            <a:solidFill>
-              <a:srgbClr val="DDE7E7"/>
-            </a:solidFill>
-            <a:prstDash val="solid"/>
-          </a:ln>
-          <a:effectLst>
-            <a:outerShdw sx="100000" sy="100000" kx="0" ky="0" algn="bl" rotWithShape="0" blurRad="76200" dist="25400" dir="5400000">
-              <a:srgbClr val="17504E">
-                <a:alpha val="8000"/>
-              </a:srgbClr>
-            </a:outerShdw>
-          </a:effectLst>
-        </p:spPr>
-      </p:sp>
-      <p:sp>
-        <p:nvSpPr>
-          <p:cNvPr id="14" name="Text 12"/>
-          <p:cNvSpPr txBox="1"/>
-          <p:nvPr/>
-        </p:nvSpPr>
-        <p:spPr>
-          <a:xfrm>
-            <a:off x="777240" y="1874520"/>
-            <a:ext cx="2679192" cy="3840480"/>
-          </a:xfrm>
-          <a:prstGeom prst="rect">
-            <a:avLst/>
-          </a:prstGeom>
-          <a:noFill/>
-          <a:ln/>
-        </p:spPr>
-        <p:txBody>
-          <a:bodyPr wrap="square" lIns="0" tIns="0" rIns="0" bIns="0" rtlCol="0" anchor="t"/>
-          <a:lstStyle/>
-          <a:p>
-            <a:pPr algn="r" marL="342900" indent="-342900">
-              <a:spcAft>
-                <a:spcPts val="1000"/>
-              </a:spcAft>
-              <a:buSzPct val="100000"/>
-              <a:buChar char="•"/>
-            </a:pPr>
-            <a:r>
-              <a:rPr lang="ar-SA" altLang="en-US" sz="1400" dirty="0">
-                <a:solidFill>
-                  <a:srgbClr val="16302F"/>
-                </a:solidFill>
-                <a:latin typeface="Arial" pitchFamily="34" charset="0"/>
-                <a:ea typeface="Arial" pitchFamily="34" charset="-122"/>
-                <a:cs typeface="Arial" pitchFamily="34" charset="-120"/>
-              </a:rPr>
-              <a:t>كل خدمة تحمل: الشروط، المستندات، الخطوات، الرسوم، المدة، ورابط القناة الرسمية</a:t>
-            </a:r>
-            <a:endParaRPr lang="ar-SA" sz="1400" dirty="0"/>
-          </a:p>
-          <a:p>
-            <a:pPr algn="r" marL="342900" indent="-342900">
-              <a:spcAft>
-                <a:spcPts val="1000"/>
-              </a:spcAft>
-              <a:buSzPct val="100000"/>
-              <a:buChar char="•"/>
-            </a:pPr>
-            <a:r>
-              <a:rPr lang="ar-SA" altLang="en-US" sz="1400" dirty="0">
-                <a:solidFill>
-                  <a:srgbClr val="16302F"/>
-                </a:solidFill>
-                <a:latin typeface="Arial" pitchFamily="34" charset="0"/>
-                <a:ea typeface="Arial" pitchFamily="34" charset="-122"/>
-                <a:cs typeface="Arial" pitchFamily="34" charset="-120"/>
-              </a:rPr>
-              <a:t>تم التحقق من كل معلومة من الصفحة الرسمية بتاريخ 12 سبتمبر 2026</a:t>
-            </a:r>
-            <a:endParaRPr lang="ar-SA" sz="1400" dirty="0"/>
-          </a:p>
-          <a:p>
-            <a:pPr algn="r" marL="342900" indent="-342900">
-              <a:spcAft>
-                <a:spcPts val="1000"/>
-              </a:spcAft>
-              <a:buSzPct val="100000"/>
-              <a:buChar char="•"/>
-            </a:pPr>
-            <a:r>
-              <a:rPr lang="ar-SA" altLang="en-US" sz="1400" dirty="0">
-                <a:solidFill>
-                  <a:srgbClr val="16302F"/>
-                </a:solidFill>
-                <a:latin typeface="Arial" pitchFamily="34" charset="0"/>
-                <a:ea typeface="Arial" pitchFamily="34" charset="-122"/>
-                <a:cs typeface="Arial" pitchFamily="34" charset="-120"/>
-              </a:rPr>
-              <a:t>كل معلومة غير مؤكدة حُذفت أو وُسمت بوضوح</a:t>
-            </a:r>
-            <a:endParaRPr lang="ar-SA" sz="1400" dirty="0"/>
-          </a:p>
-          <a:p>
-            <a:pPr algn="r" marL="342900" indent="-342900">
-              <a:spcAft>
-                <a:spcPts val="1000"/>
-              </a:spcAft>
-              <a:buSzPct val="100000"/>
-              <a:buChar char="•"/>
-            </a:pPr>
-            <a:r>
-              <a:rPr lang="ar-SA" altLang="en-US" sz="1400" dirty="0">
-                <a:solidFill>
-                  <a:srgbClr val="16302F"/>
-                </a:solidFill>
-                <a:latin typeface="Arial" pitchFamily="34" charset="0"/>
-                <a:ea typeface="Arial" pitchFamily="34" charset="-122"/>
-                <a:cs typeface="Arial" pitchFamily="34" charset="-120"/>
-              </a:rPr>
-              <a:t>تُعرض روابط المصادر داخل التطبيق في صفحة كل خدمة</a:t>
-            </a:r>
-            <a:endParaRPr lang="ar-SA" sz="1400" dirty="0"/>
-          </a:p>
-        </p:txBody>
-      </p:sp>
-      <p:sp>
-        <p:nvSpPr>
-          <p:cNvPr id="15" name="Shape 13"/>
-          <p:cNvSpPr/>
-          <p:nvPr/>
-        </p:nvSpPr>
-        <p:spPr>
-          <a:xfrm>
-            <a:off x="3959352" y="3474720"/>
-            <a:ext cx="7680960" cy="2377440"/>
-          </a:xfrm>
-          <a:prstGeom prst="roundRect">
-            <a:avLst>
-              <a:gd name="adj" fmla="val 6923"/>
-            </a:avLst>
-          </a:prstGeom>
-          <a:solidFill>
-            <a:srgbClr val="E3F0EF"/>
-          </a:solidFill>
-          <a:ln w="9525">
-            <a:solidFill>
-              <a:srgbClr val="DDE7E7"/>
-            </a:solidFill>
-            <a:prstDash val="solid"/>
-          </a:ln>
-          <a:effectLst>
-            <a:outerShdw sx="100000" sy="100000" kx="0" ky="0" algn="bl" rotWithShape="0" blurRad="76200" dist="25400" dir="5400000">
-              <a:srgbClr val="17504E">
-                <a:alpha val="8000"/>
-              </a:srgbClr>
-            </a:outerShdw>
-          </a:effectLst>
-        </p:spPr>
-      </p:sp>
-      <p:sp>
-        <p:nvSpPr>
-          <p:cNvPr id="16" name="Text 14"/>
-          <p:cNvSpPr txBox="1"/>
-          <p:nvPr/>
-        </p:nvSpPr>
-        <p:spPr>
-          <a:xfrm>
-            <a:off x="4233672" y="3703320"/>
-            <a:ext cx="7132320" cy="1920240"/>
-          </a:xfrm>
-          <a:prstGeom prst="rect">
-            <a:avLst/>
-          </a:prstGeom>
-          <a:noFill/>
-          <a:ln/>
-        </p:spPr>
-        <p:txBody>
-          <a:bodyPr wrap="square" lIns="0" tIns="0" rIns="0" bIns="0" rtlCol="0" anchor="t"/>
-          <a:lstStyle/>
-          <a:p>
-            <a:pPr rtl="1" algn="r" indent="0" marL="0">
-              <a:buNone/>
-            </a:pPr>
-            <a:r>
-              <a:rPr lang="ar-SA" altLang="en-US" sz="1400" dirty="0">
-                <a:solidFill>
-                  <a:srgbClr val="17504E"/>
-                </a:solidFill>
-                <a:latin typeface="Arial" pitchFamily="34" charset="0"/>
-                <a:ea typeface="Arial" pitchFamily="34" charset="-122"/>
-                <a:cs typeface="Arial" pitchFamily="34" charset="-120"/>
-              </a:rPr>
-              <a:t>مثال: رخصة بلدي تحتاج عقد إيجار موثق ← التطبيق يعرف ذلك من صفحة بلدي الرسمية، فيوجّه المستخدم إلى منصة إيجار قبل التقديم.</a:t>
-            </a:r>
-            <a:endParaRPr lang="ar-SA" sz="1400" dirty="0"/>
-          </a:p>
-        </p:txBody>
-      </p:sp>
-      <p:sp>
-        <p:nvSpPr>
-          <p:cNvPr id="17" name="Text 15"/>
-          <p:cNvSpPr txBox="1"/>
-          <p:nvPr/>
-        </p:nvSpPr>
-        <p:spPr>
-          <a:xfrm>
-            <a:off x="548640" y="6355080"/>
-            <a:ext cx="3657600" cy="274320"/>
-          </a:xfrm>
-          <a:prstGeom prst="rect">
-            <a:avLst/>
-          </a:prstGeom>
-          <a:noFill/>
-          <a:ln/>
-        </p:spPr>
-        <p:txBody>
-          <a:bodyPr wrap="square" lIns="0" tIns="0" rIns="0" bIns="0" rtlCol="0" anchor="t"/>
-          <a:lstStyle/>
-          <a:p>
-            <a:pPr rtl="1" algn="l" indent="0" marL="0">
-              <a:buNone/>
-            </a:pPr>
-            <a:r>
-              <a:rPr lang="ar-SA" altLang="en-US" sz="1000" dirty="0">
-                <a:solidFill>
-                  <a:srgbClr val="6B7F7E"/>
-                </a:solidFill>
-                <a:latin typeface="Arial" pitchFamily="34" charset="0"/>
-                <a:ea typeface="Arial" pitchFamily="34" charset="-122"/>
-                <a:cs typeface="Arial" pitchFamily="34" charset="-120"/>
-              </a:rPr>
-              <a:t>shamal-ai.vercel.app</a:t>
-            </a:r>
-            <a:endParaRPr lang="ar-SA" sz="1000" dirty="0"/>
-          </a:p>
-        </p:txBody>
-      </p:sp>
-      <p:sp>
-        <p:nvSpPr>
-          <p:cNvPr id="18" name="Text 16"/>
-          <p:cNvSpPr txBox="1"/>
-          <p:nvPr/>
-        </p:nvSpPr>
-        <p:spPr>
-          <a:xfrm>
-            <a:off x="7068312" y="6355080"/>
-            <a:ext cx="4572000" cy="274320"/>
-          </a:xfrm>
-          <a:prstGeom prst="rect">
-            <a:avLst/>
-          </a:prstGeom>
-          <a:noFill/>
-          <a:ln/>
-        </p:spPr>
-        <p:txBody>
-          <a:bodyPr wrap="square" lIns="0" tIns="0" rIns="0" bIns="0" rtlCol="0" anchor="t"/>
-          <a:lstStyle/>
-          <a:p>
-            <a:pPr rtl="1" algn="r" indent="0" marL="0">
-              <a:buNone/>
-            </a:pPr>
-            <a:r>
-              <a:rPr lang="ar-SA" altLang="en-US" sz="1000" dirty="0">
-                <a:solidFill>
-                  <a:srgbClr val="6B7F7E"/>
-                </a:solidFill>
-                <a:latin typeface="Arial" pitchFamily="34" charset="0"/>
-                <a:ea typeface="Arial" pitchFamily="34" charset="-122"/>
-                <a:cs typeface="Arial" pitchFamily="34" charset="-120"/>
-              </a:rPr>
-              <a:t>شمال AI · ENBTHON 2026 · 6</a:t>
+              <a:t>شمال AI · التقنية · 6</a:t>
             </a:r>
             <a:endParaRPr lang="ar-SA" sz="1000" dirty="0"/>
           </a:p>
@@ -6383,7 +6533,7 @@
                 <a:ea typeface="Arial" pitchFamily="34" charset="-122"/>
                 <a:cs typeface="Arial" pitchFamily="34" charset="-120"/>
               </a:rPr>
-              <a:t>المصادر الرسمية التي اعتمدنا عليها</a:t>
+              <a:t>قاعدة المعرفة كبنية بيانات</a:t>
             </a:r>
             <a:endParaRPr lang="ar-SA" sz="3000" dirty="0"/>
           </a:p>
@@ -6422,7 +6572,7 @@
                 <a:ea typeface="Arial" pitchFamily="34" charset="-122"/>
                 <a:cs typeface="Arial" pitchFamily="34" charset="-120"/>
               </a:rPr>
-              <a:t>جهات حكومية سعودية فقط، لا مصادر غير رسمية</a:t>
+              <a:t>الخدمات الحكومية مكتوبة كأنواع TypeScript، لا كنصوص حرة</a:t>
             </a:r>
             <a:endParaRPr lang="ar-SA" sz="1400" dirty="0"/>
           </a:p>
@@ -6436,12 +6586,12 @@
         </p:nvSpPr>
         <p:spPr>
           <a:xfrm>
-            <a:off x="6231636" y="1600200"/>
-            <a:ext cx="5408676" cy="566928"/>
+            <a:off x="9948672" y="1645920"/>
+            <a:ext cx="1691640" cy="1371600"/>
           </a:xfrm>
           <a:prstGeom prst="roundRect">
             <a:avLst>
-              <a:gd name="adj" fmla="val 29032"/>
+              <a:gd name="adj" fmla="val 12000"/>
             </a:avLst>
           </a:prstGeom>
           <a:solidFill>
@@ -6464,121 +6614,96 @@
       </p:sp>
       <p:sp>
         <p:nvSpPr>
-          <p:cNvPr id="5" name="Shape 3"/>
+          <p:cNvPr id="5" name="Text 3"/>
+          <p:cNvSpPr txBox="1"/>
+          <p:nvPr/>
+        </p:nvSpPr>
+        <p:spPr>
+          <a:xfrm>
+            <a:off x="9948672" y="1755648"/>
+            <a:ext cx="1691640" cy="685800"/>
+          </a:xfrm>
+          <a:prstGeom prst="rect">
+            <a:avLst/>
+          </a:prstGeom>
+          <a:noFill/>
+          <a:ln/>
+        </p:spPr>
+        <p:txBody>
+          <a:bodyPr wrap="square" lIns="0" tIns="0" rIns="0" bIns="0" rtlCol="0" anchor="t"/>
+          <a:lstStyle/>
+          <a:p>
+            <a:pPr rtl="1" algn="ctr" indent="0" marL="0">
+              <a:buNone/>
+            </a:pPr>
+            <a:r>
+              <a:rPr lang="ar-SA" altLang="en-US" sz="4000" b="1" dirty="0">
+                <a:solidFill>
+                  <a:srgbClr val="1F6A68"/>
+                </a:solidFill>
+                <a:latin typeface="Arial" pitchFamily="34" charset="0"/>
+                <a:ea typeface="Arial" pitchFamily="34" charset="-122"/>
+                <a:cs typeface="Arial" pitchFamily="34" charset="-120"/>
+              </a:rPr>
+              <a:t>23</a:t>
+            </a:r>
+            <a:endParaRPr lang="ar-SA" sz="4000" dirty="0"/>
+          </a:p>
+        </p:txBody>
+      </p:sp>
+      <p:sp>
+        <p:nvSpPr>
+          <p:cNvPr id="6" name="Text 4"/>
+          <p:cNvSpPr txBox="1"/>
+          <p:nvPr/>
+        </p:nvSpPr>
+        <p:spPr>
+          <a:xfrm>
+            <a:off x="9948672" y="2487168"/>
+            <a:ext cx="1691640" cy="320040"/>
+          </a:xfrm>
+          <a:prstGeom prst="rect">
+            <a:avLst/>
+          </a:prstGeom>
+          <a:noFill/>
+          <a:ln/>
+        </p:spPr>
+        <p:txBody>
+          <a:bodyPr wrap="square" lIns="0" tIns="0" rIns="0" bIns="0" rtlCol="0" anchor="t"/>
+          <a:lstStyle/>
+          <a:p>
+            <a:pPr rtl="1" algn="ctr" indent="0" marL="0">
+              <a:buNone/>
+            </a:pPr>
+            <a:r>
+              <a:rPr lang="ar-SA" altLang="en-US" sz="1200" dirty="0">
+                <a:solidFill>
+                  <a:srgbClr val="6B7F7E"/>
+                </a:solidFill>
+                <a:latin typeface="Arial" pitchFamily="34" charset="0"/>
+                <a:ea typeface="Arial" pitchFamily="34" charset="-122"/>
+                <a:cs typeface="Arial" pitchFamily="34" charset="-120"/>
+              </a:rPr>
+              <a:t>خدمة</a:t>
+            </a:r>
+            <a:endParaRPr lang="ar-SA" sz="1200" dirty="0"/>
+          </a:p>
+        </p:txBody>
+      </p:sp>
+      <p:sp>
+        <p:nvSpPr>
+          <p:cNvPr id="7" name="Shape 5"/>
           <p:cNvSpPr/>
           <p:nvPr/>
         </p:nvSpPr>
         <p:spPr>
           <a:xfrm>
-            <a:off x="11183112" y="1773936"/>
-            <a:ext cx="219456" cy="219456"/>
-          </a:xfrm>
-          <a:prstGeom prst="ellipse">
-            <a:avLst/>
-          </a:prstGeom>
-          <a:solidFill>
-            <a:srgbClr val="1F6A68"/>
-          </a:solidFill>
-          <a:ln w="12700">
-            <a:solidFill>
-              <a:srgbClr val="1F6A68"/>
-            </a:solidFill>
-            <a:prstDash val="solid"/>
-          </a:ln>
-        </p:spPr>
-      </p:sp>
-      <p:sp>
-        <p:nvSpPr>
-          <p:cNvPr id="6" name="Text 4"/>
-          <p:cNvSpPr txBox="1"/>
-          <p:nvPr/>
-        </p:nvSpPr>
-        <p:spPr>
-          <a:xfrm>
-            <a:off x="8883396" y="1709928"/>
-            <a:ext cx="2208276" cy="365760"/>
-          </a:xfrm>
-          <a:prstGeom prst="rect">
-            <a:avLst/>
-          </a:prstGeom>
-          <a:noFill/>
-          <a:ln/>
-        </p:spPr>
-        <p:txBody>
-          <a:bodyPr wrap="square" lIns="0" tIns="0" rIns="0" bIns="0" rtlCol="0" anchor="ctr"/>
-          <a:lstStyle/>
-          <a:p>
-            <a:pPr rtl="1" algn="r" indent="0" marL="0">
-              <a:buNone/>
-            </a:pPr>
-            <a:r>
-              <a:rPr lang="ar-SA" altLang="en-US" sz="1300" b="1" dirty="0">
-                <a:solidFill>
-                  <a:srgbClr val="17504E"/>
-                </a:solidFill>
-                <a:latin typeface="Arial" pitchFamily="34" charset="0"/>
-                <a:ea typeface="Arial" pitchFamily="34" charset="-122"/>
-                <a:cs typeface="Arial" pitchFamily="34" charset="-120"/>
-              </a:rPr>
-              <a:t>المنصة الوطنية الموحدة</a:t>
-            </a:r>
-            <a:endParaRPr lang="ar-SA" sz="1300" dirty="0"/>
-          </a:p>
-        </p:txBody>
-      </p:sp>
-      <p:sp>
-        <p:nvSpPr>
-          <p:cNvPr id="7" name="Text 5"/>
-          <p:cNvSpPr txBox="1"/>
-          <p:nvPr/>
-        </p:nvSpPr>
-        <p:spPr>
-          <a:xfrm>
-            <a:off x="6460236" y="1709928"/>
-            <a:ext cx="2468880" cy="365760"/>
-          </a:xfrm>
-          <a:prstGeom prst="rect">
-            <a:avLst/>
-          </a:prstGeom>
-          <a:noFill/>
-          <a:ln/>
-        </p:spPr>
-        <p:txBody>
-          <a:bodyPr wrap="square" lIns="0" tIns="0" rIns="0" bIns="0" rtlCol="0" anchor="ctr"/>
-          <a:lstStyle/>
-          <a:p>
-            <a:pPr rtl="1" algn="l" indent="0" marL="0">
-              <a:buNone/>
-            </a:pPr>
-            <a:r>
-              <a:rPr lang="ar-SA" altLang="en-US" sz="1000" dirty="0">
-                <a:solidFill>
-                  <a:srgbClr val="6B7F7E"/>
-                </a:solidFill>
-                <a:latin typeface="Arial" pitchFamily="34" charset="0"/>
-                <a:ea typeface="Arial" pitchFamily="34" charset="-122"/>
-                <a:cs typeface="Arial" pitchFamily="34" charset="-120"/>
-              </a:rPr>
-              <a:t>my.gov.sa</a:t>
-            </a:r>
-            <a:endParaRPr lang="ar-SA" sz="1000" dirty="0"/>
-          </a:p>
-        </p:txBody>
-      </p:sp>
-      <p:sp>
-        <p:nvSpPr>
-          <p:cNvPr id="8" name="Shape 6"/>
-          <p:cNvSpPr/>
-          <p:nvPr/>
-        </p:nvSpPr>
-        <p:spPr>
-          <a:xfrm>
-            <a:off x="548640" y="1600200"/>
-            <a:ext cx="5408676" cy="566928"/>
+            <a:off x="8028432" y="1645920"/>
+            <a:ext cx="1691640" cy="1371600"/>
           </a:xfrm>
           <a:prstGeom prst="roundRect">
             <a:avLst>
-              <a:gd name="adj" fmla="val 29032"/>
+              <a:gd name="adj" fmla="val 12000"/>
             </a:avLst>
           </a:prstGeom>
           <a:solidFill>
@@ -6601,121 +6726,96 @@
       </p:sp>
       <p:sp>
         <p:nvSpPr>
-          <p:cNvPr id="9" name="Shape 7"/>
+          <p:cNvPr id="8" name="Text 6"/>
+          <p:cNvSpPr txBox="1"/>
+          <p:nvPr/>
+        </p:nvSpPr>
+        <p:spPr>
+          <a:xfrm>
+            <a:off x="8028432" y="1755648"/>
+            <a:ext cx="1691640" cy="685800"/>
+          </a:xfrm>
+          <a:prstGeom prst="rect">
+            <a:avLst/>
+          </a:prstGeom>
+          <a:noFill/>
+          <a:ln/>
+        </p:spPr>
+        <p:txBody>
+          <a:bodyPr wrap="square" lIns="0" tIns="0" rIns="0" bIns="0" rtlCol="0" anchor="t"/>
+          <a:lstStyle/>
+          <a:p>
+            <a:pPr rtl="1" algn="ctr" indent="0" marL="0">
+              <a:buNone/>
+            </a:pPr>
+            <a:r>
+              <a:rPr lang="ar-SA" altLang="en-US" sz="4000" b="1" dirty="0">
+                <a:solidFill>
+                  <a:srgbClr val="1F6A68"/>
+                </a:solidFill>
+                <a:latin typeface="Arial" pitchFamily="34" charset="0"/>
+                <a:ea typeface="Arial" pitchFamily="34" charset="-122"/>
+                <a:cs typeface="Arial" pitchFamily="34" charset="-120"/>
+              </a:rPr>
+              <a:t>17</a:t>
+            </a:r>
+            <a:endParaRPr lang="ar-SA" sz="4000" dirty="0"/>
+          </a:p>
+        </p:txBody>
+      </p:sp>
+      <p:sp>
+        <p:nvSpPr>
+          <p:cNvPr id="9" name="Text 7"/>
+          <p:cNvSpPr txBox="1"/>
+          <p:nvPr/>
+        </p:nvSpPr>
+        <p:spPr>
+          <a:xfrm>
+            <a:off x="8028432" y="2487168"/>
+            <a:ext cx="1691640" cy="320040"/>
+          </a:xfrm>
+          <a:prstGeom prst="rect">
+            <a:avLst/>
+          </a:prstGeom>
+          <a:noFill/>
+          <a:ln/>
+        </p:spPr>
+        <p:txBody>
+          <a:bodyPr wrap="square" lIns="0" tIns="0" rIns="0" bIns="0" rtlCol="0" anchor="t"/>
+          <a:lstStyle/>
+          <a:p>
+            <a:pPr rtl="1" algn="ctr" indent="0" marL="0">
+              <a:buNone/>
+            </a:pPr>
+            <a:r>
+              <a:rPr lang="ar-SA" altLang="en-US" sz="1200" dirty="0">
+                <a:solidFill>
+                  <a:srgbClr val="6B7F7E"/>
+                </a:solidFill>
+                <a:latin typeface="Arial" pitchFamily="34" charset="0"/>
+                <a:ea typeface="Arial" pitchFamily="34" charset="-122"/>
+                <a:cs typeface="Arial" pitchFamily="34" charset="-120"/>
+              </a:rPr>
+              <a:t>سيناريو</a:t>
+            </a:r>
+            <a:endParaRPr lang="ar-SA" sz="1200" dirty="0"/>
+          </a:p>
+        </p:txBody>
+      </p:sp>
+      <p:sp>
+        <p:nvSpPr>
+          <p:cNvPr id="10" name="Shape 8"/>
           <p:cNvSpPr/>
           <p:nvPr/>
         </p:nvSpPr>
         <p:spPr>
           <a:xfrm>
-            <a:off x="5500116" y="1773936"/>
-            <a:ext cx="219456" cy="219456"/>
-          </a:xfrm>
-          <a:prstGeom prst="ellipse">
-            <a:avLst/>
-          </a:prstGeom>
-          <a:solidFill>
-            <a:srgbClr val="1F6A68"/>
-          </a:solidFill>
-          <a:ln w="12700">
-            <a:solidFill>
-              <a:srgbClr val="1F6A68"/>
-            </a:solidFill>
-            <a:prstDash val="solid"/>
-          </a:ln>
-        </p:spPr>
-      </p:sp>
-      <p:sp>
-        <p:nvSpPr>
-          <p:cNvPr id="10" name="Text 8"/>
-          <p:cNvSpPr txBox="1"/>
-          <p:nvPr/>
-        </p:nvSpPr>
-        <p:spPr>
-          <a:xfrm>
-            <a:off x="3200400" y="1709928"/>
-            <a:ext cx="2208276" cy="365760"/>
-          </a:xfrm>
-          <a:prstGeom prst="rect">
-            <a:avLst/>
-          </a:prstGeom>
-          <a:noFill/>
-          <a:ln/>
-        </p:spPr>
-        <p:txBody>
-          <a:bodyPr wrap="square" lIns="0" tIns="0" rIns="0" bIns="0" rtlCol="0" anchor="ctr"/>
-          <a:lstStyle/>
-          <a:p>
-            <a:pPr rtl="1" algn="r" indent="0" marL="0">
-              <a:buNone/>
-            </a:pPr>
-            <a:r>
-              <a:rPr lang="ar-SA" altLang="en-US" sz="1300" b="1" dirty="0">
-                <a:solidFill>
-                  <a:srgbClr val="17504E"/>
-                </a:solidFill>
-                <a:latin typeface="Arial" pitchFamily="34" charset="0"/>
-                <a:ea typeface="Arial" pitchFamily="34" charset="-122"/>
-                <a:cs typeface="Arial" pitchFamily="34" charset="-120"/>
-              </a:rPr>
-              <a:t>أبشر</a:t>
-            </a:r>
-            <a:endParaRPr lang="ar-SA" sz="1300" dirty="0"/>
-          </a:p>
-        </p:txBody>
-      </p:sp>
-      <p:sp>
-        <p:nvSpPr>
-          <p:cNvPr id="11" name="Text 9"/>
-          <p:cNvSpPr txBox="1"/>
-          <p:nvPr/>
-        </p:nvSpPr>
-        <p:spPr>
-          <a:xfrm>
-            <a:off x="777240" y="1709928"/>
-            <a:ext cx="2468880" cy="365760"/>
-          </a:xfrm>
-          <a:prstGeom prst="rect">
-            <a:avLst/>
-          </a:prstGeom>
-          <a:noFill/>
-          <a:ln/>
-        </p:spPr>
-        <p:txBody>
-          <a:bodyPr wrap="square" lIns="0" tIns="0" rIns="0" bIns="0" rtlCol="0" anchor="ctr"/>
-          <a:lstStyle/>
-          <a:p>
-            <a:pPr rtl="1" algn="l" indent="0" marL="0">
-              <a:buNone/>
-            </a:pPr>
-            <a:r>
-              <a:rPr lang="ar-SA" altLang="en-US" sz="1000" dirty="0">
-                <a:solidFill>
-                  <a:srgbClr val="6B7F7E"/>
-                </a:solidFill>
-                <a:latin typeface="Arial" pitchFamily="34" charset="0"/>
-                <a:ea typeface="Arial" pitchFamily="34" charset="-122"/>
-                <a:cs typeface="Arial" pitchFamily="34" charset="-120"/>
-              </a:rPr>
-              <a:t>الأحوال المدنية · الجوازات · المرور</a:t>
-            </a:r>
-            <a:endParaRPr lang="ar-SA" sz="1000" dirty="0"/>
-          </a:p>
-        </p:txBody>
-      </p:sp>
-      <p:sp>
-        <p:nvSpPr>
-          <p:cNvPr id="12" name="Shape 10"/>
-          <p:cNvSpPr/>
-          <p:nvPr/>
-        </p:nvSpPr>
-        <p:spPr>
-          <a:xfrm>
-            <a:off x="6231636" y="2295144"/>
-            <a:ext cx="5408676" cy="566928"/>
+            <a:off x="6108192" y="1645920"/>
+            <a:ext cx="1691640" cy="1371600"/>
           </a:xfrm>
           <a:prstGeom prst="roundRect">
             <a:avLst>
-              <a:gd name="adj" fmla="val 29032"/>
+              <a:gd name="adj" fmla="val 12000"/>
             </a:avLst>
           </a:prstGeom>
           <a:solidFill>
@@ -6738,121 +6838,96 @@
       </p:sp>
       <p:sp>
         <p:nvSpPr>
+          <p:cNvPr id="11" name="Text 9"/>
+          <p:cNvSpPr txBox="1"/>
+          <p:nvPr/>
+        </p:nvSpPr>
+        <p:spPr>
+          <a:xfrm>
+            <a:off x="6108192" y="1755648"/>
+            <a:ext cx="1691640" cy="685800"/>
+          </a:xfrm>
+          <a:prstGeom prst="rect">
+            <a:avLst/>
+          </a:prstGeom>
+          <a:noFill/>
+          <a:ln/>
+        </p:spPr>
+        <p:txBody>
+          <a:bodyPr wrap="square" lIns="0" tIns="0" rIns="0" bIns="0" rtlCol="0" anchor="t"/>
+          <a:lstStyle/>
+          <a:p>
+            <a:pPr rtl="1" algn="ctr" indent="0" marL="0">
+              <a:buNone/>
+            </a:pPr>
+            <a:r>
+              <a:rPr lang="ar-SA" altLang="en-US" sz="4000" b="1" dirty="0">
+                <a:solidFill>
+                  <a:srgbClr val="1F6A68"/>
+                </a:solidFill>
+                <a:latin typeface="Arial" pitchFamily="34" charset="0"/>
+                <a:ea typeface="Arial" pitchFamily="34" charset="-122"/>
+                <a:cs typeface="Arial" pitchFamily="34" charset="-120"/>
+              </a:rPr>
+              <a:t>19</a:t>
+            </a:r>
+            <a:endParaRPr lang="ar-SA" sz="4000" dirty="0"/>
+          </a:p>
+        </p:txBody>
+      </p:sp>
+      <p:sp>
+        <p:nvSpPr>
+          <p:cNvPr id="12" name="Text 10"/>
+          <p:cNvSpPr txBox="1"/>
+          <p:nvPr/>
+        </p:nvSpPr>
+        <p:spPr>
+          <a:xfrm>
+            <a:off x="6108192" y="2487168"/>
+            <a:ext cx="1691640" cy="320040"/>
+          </a:xfrm>
+          <a:prstGeom prst="rect">
+            <a:avLst/>
+          </a:prstGeom>
+          <a:noFill/>
+          <a:ln/>
+        </p:spPr>
+        <p:txBody>
+          <a:bodyPr wrap="square" lIns="0" tIns="0" rIns="0" bIns="0" rtlCol="0" anchor="t"/>
+          <a:lstStyle/>
+          <a:p>
+            <a:pPr rtl="1" algn="ctr" indent="0" marL="0">
+              <a:buNone/>
+            </a:pPr>
+            <a:r>
+              <a:rPr lang="ar-SA" altLang="en-US" sz="1200" dirty="0">
+                <a:solidFill>
+                  <a:srgbClr val="6B7F7E"/>
+                </a:solidFill>
+                <a:latin typeface="Arial" pitchFamily="34" charset="0"/>
+                <a:ea typeface="Arial" pitchFamily="34" charset="-122"/>
+                <a:cs typeface="Arial" pitchFamily="34" charset="-120"/>
+              </a:rPr>
+              <a:t>جهة</a:t>
+            </a:r>
+            <a:endParaRPr lang="ar-SA" sz="1200" dirty="0"/>
+          </a:p>
+        </p:txBody>
+      </p:sp>
+      <p:sp>
+        <p:nvSpPr>
           <p:cNvPr id="13" name="Shape 11"/>
           <p:cNvSpPr/>
           <p:nvPr/>
         </p:nvSpPr>
         <p:spPr>
           <a:xfrm>
-            <a:off x="11183112" y="2468880"/>
-            <a:ext cx="219456" cy="219456"/>
-          </a:xfrm>
-          <a:prstGeom prst="ellipse">
-            <a:avLst/>
-          </a:prstGeom>
-          <a:solidFill>
-            <a:srgbClr val="1F6A68"/>
-          </a:solidFill>
-          <a:ln w="12700">
-            <a:solidFill>
-              <a:srgbClr val="1F6A68"/>
-            </a:solidFill>
-            <a:prstDash val="solid"/>
-          </a:ln>
-        </p:spPr>
-      </p:sp>
-      <p:sp>
-        <p:nvSpPr>
-          <p:cNvPr id="14" name="Text 12"/>
-          <p:cNvSpPr txBox="1"/>
-          <p:nvPr/>
-        </p:nvSpPr>
-        <p:spPr>
-          <a:xfrm>
-            <a:off x="8883396" y="2404872"/>
-            <a:ext cx="2208276" cy="365760"/>
-          </a:xfrm>
-          <a:prstGeom prst="rect">
-            <a:avLst/>
-          </a:prstGeom>
-          <a:noFill/>
-          <a:ln/>
-        </p:spPr>
-        <p:txBody>
-          <a:bodyPr wrap="square" lIns="0" tIns="0" rIns="0" bIns="0" rtlCol="0" anchor="ctr"/>
-          <a:lstStyle/>
-          <a:p>
-            <a:pPr rtl="1" algn="r" indent="0" marL="0">
-              <a:buNone/>
-            </a:pPr>
-            <a:r>
-              <a:rPr lang="ar-SA" altLang="en-US" sz="1300" b="1" dirty="0">
-                <a:solidFill>
-                  <a:srgbClr val="17504E"/>
-                </a:solidFill>
-                <a:latin typeface="Arial" pitchFamily="34" charset="0"/>
-                <a:ea typeface="Arial" pitchFamily="34" charset="-122"/>
-                <a:cs typeface="Arial" pitchFamily="34" charset="-120"/>
-              </a:rPr>
-              <a:t>المركز السعودي للأعمال</a:t>
-            </a:r>
-            <a:endParaRPr lang="ar-SA" sz="1300" dirty="0"/>
-          </a:p>
-        </p:txBody>
-      </p:sp>
-      <p:sp>
-        <p:nvSpPr>
-          <p:cNvPr id="15" name="Text 13"/>
-          <p:cNvSpPr txBox="1"/>
-          <p:nvPr/>
-        </p:nvSpPr>
-        <p:spPr>
-          <a:xfrm>
-            <a:off x="6460236" y="2404872"/>
-            <a:ext cx="2468880" cy="365760"/>
-          </a:xfrm>
-          <a:prstGeom prst="rect">
-            <a:avLst/>
-          </a:prstGeom>
-          <a:noFill/>
-          <a:ln/>
-        </p:spPr>
-        <p:txBody>
-          <a:bodyPr wrap="square" lIns="0" tIns="0" rIns="0" bIns="0" rtlCol="0" anchor="ctr"/>
-          <a:lstStyle/>
-          <a:p>
-            <a:pPr rtl="1" algn="l" indent="0" marL="0">
-              <a:buNone/>
-            </a:pPr>
-            <a:r>
-              <a:rPr lang="ar-SA" altLang="en-US" sz="1000" dirty="0">
-                <a:solidFill>
-                  <a:srgbClr val="6B7F7E"/>
-                </a:solidFill>
-                <a:latin typeface="Arial" pitchFamily="34" charset="0"/>
-                <a:ea typeface="Arial" pitchFamily="34" charset="-122"/>
-                <a:cs typeface="Arial" pitchFamily="34" charset="-120"/>
-              </a:rPr>
-              <a:t>وزارة التجارة · السجل التجاري</a:t>
-            </a:r>
-            <a:endParaRPr lang="ar-SA" sz="1000" dirty="0"/>
-          </a:p>
-        </p:txBody>
-      </p:sp>
-      <p:sp>
-        <p:nvSpPr>
-          <p:cNvPr id="16" name="Shape 14"/>
-          <p:cNvSpPr/>
-          <p:nvPr/>
-        </p:nvSpPr>
-        <p:spPr>
-          <a:xfrm>
-            <a:off x="548640" y="2295144"/>
-            <a:ext cx="5408676" cy="566928"/>
+            <a:off x="4187952" y="1645920"/>
+            <a:ext cx="1691640" cy="1371600"/>
           </a:xfrm>
           <a:prstGeom prst="roundRect">
             <a:avLst>
-              <a:gd name="adj" fmla="val 29032"/>
+              <a:gd name="adj" fmla="val 12000"/>
             </a:avLst>
           </a:prstGeom>
           <a:solidFill>
@@ -6875,28 +6950,154 @@
       </p:sp>
       <p:sp>
         <p:nvSpPr>
-          <p:cNvPr id="17" name="Shape 15"/>
+          <p:cNvPr id="14" name="Text 12"/>
+          <p:cNvSpPr txBox="1"/>
+          <p:nvPr/>
+        </p:nvSpPr>
+        <p:spPr>
+          <a:xfrm>
+            <a:off x="4187952" y="1755648"/>
+            <a:ext cx="1691640" cy="685800"/>
+          </a:xfrm>
+          <a:prstGeom prst="rect">
+            <a:avLst/>
+          </a:prstGeom>
+          <a:noFill/>
+          <a:ln/>
+        </p:spPr>
+        <p:txBody>
+          <a:bodyPr wrap="square" lIns="0" tIns="0" rIns="0" bIns="0" rtlCol="0" anchor="t"/>
+          <a:lstStyle/>
+          <a:p>
+            <a:pPr rtl="1" algn="ctr" indent="0" marL="0">
+              <a:buNone/>
+            </a:pPr>
+            <a:r>
+              <a:rPr lang="ar-SA" altLang="en-US" sz="4000" b="1" dirty="0">
+                <a:solidFill>
+                  <a:srgbClr val="1F6A68"/>
+                </a:solidFill>
+                <a:latin typeface="Arial" pitchFamily="34" charset="0"/>
+                <a:ea typeface="Arial" pitchFamily="34" charset="-122"/>
+                <a:cs typeface="Arial" pitchFamily="34" charset="-120"/>
+              </a:rPr>
+              <a:t>30</a:t>
+            </a:r>
+            <a:endParaRPr lang="ar-SA" sz="4000" dirty="0"/>
+          </a:p>
+        </p:txBody>
+      </p:sp>
+      <p:sp>
+        <p:nvSpPr>
+          <p:cNvPr id="15" name="Text 13"/>
+          <p:cNvSpPr txBox="1"/>
+          <p:nvPr/>
+        </p:nvSpPr>
+        <p:spPr>
+          <a:xfrm>
+            <a:off x="4187952" y="2487168"/>
+            <a:ext cx="1691640" cy="320040"/>
+          </a:xfrm>
+          <a:prstGeom prst="rect">
+            <a:avLst/>
+          </a:prstGeom>
+          <a:noFill/>
+          <a:ln/>
+        </p:spPr>
+        <p:txBody>
+          <a:bodyPr wrap="square" lIns="0" tIns="0" rIns="0" bIns="0" rtlCol="0" anchor="t"/>
+          <a:lstStyle/>
+          <a:p>
+            <a:pPr rtl="1" algn="ctr" indent="0" marL="0">
+              <a:buNone/>
+            </a:pPr>
+            <a:r>
+              <a:rPr lang="ar-SA" altLang="en-US" sz="1200" dirty="0">
+                <a:solidFill>
+                  <a:srgbClr val="6B7F7E"/>
+                </a:solidFill>
+                <a:latin typeface="Arial" pitchFamily="34" charset="0"/>
+                <a:ea typeface="Arial" pitchFamily="34" charset="-122"/>
+                <a:cs typeface="Arial" pitchFamily="34" charset="-120"/>
+              </a:rPr>
+              <a:t>اختباراً</a:t>
+            </a:r>
+            <a:endParaRPr lang="ar-SA" sz="1200" dirty="0"/>
+          </a:p>
+        </p:txBody>
+      </p:sp>
+      <p:sp>
+        <p:nvSpPr>
+          <p:cNvPr id="16" name="Shape 14"/>
           <p:cNvSpPr/>
           <p:nvPr/>
         </p:nvSpPr>
         <p:spPr>
           <a:xfrm>
-            <a:off x="5500116" y="2468880"/>
-            <a:ext cx="219456" cy="219456"/>
-          </a:xfrm>
-          <a:prstGeom prst="ellipse">
-            <a:avLst/>
+            <a:off x="548640" y="1645920"/>
+            <a:ext cx="3364992" cy="1371600"/>
+          </a:xfrm>
+          <a:prstGeom prst="roundRect">
+            <a:avLst>
+              <a:gd name="adj" fmla="val 12000"/>
+            </a:avLst>
           </a:prstGeom>
           <a:solidFill>
-            <a:srgbClr val="1F6A68"/>
+            <a:srgbClr val="E3F0EF"/>
           </a:solidFill>
-          <a:ln w="12700">
+          <a:ln w="9525">
             <a:solidFill>
-              <a:srgbClr val="1F6A68"/>
+              <a:srgbClr val="CFE3E1"/>
             </a:solidFill>
             <a:prstDash val="solid"/>
           </a:ln>
-        </p:spPr>
+          <a:effectLst>
+            <a:outerShdw sx="100000" sy="100000" kx="0" ky="0" algn="bl" rotWithShape="0" blurRad="76200" dist="25400" dir="5400000">
+              <a:srgbClr val="17504E">
+                <a:alpha val="8000"/>
+              </a:srgbClr>
+            </a:outerShdw>
+          </a:effectLst>
+        </p:spPr>
+      </p:sp>
+      <p:sp>
+        <p:nvSpPr>
+          <p:cNvPr id="17" name="Text 15"/>
+          <p:cNvSpPr txBox="1"/>
+          <p:nvPr/>
+        </p:nvSpPr>
+        <p:spPr>
+          <a:xfrm>
+            <a:off x="777240" y="1828800"/>
+            <a:ext cx="2907792" cy="365760"/>
+          </a:xfrm>
+          <a:prstGeom prst="rect">
+            <a:avLst/>
+          </a:prstGeom>
+          <a:noFill/>
+          <a:ln/>
+        </p:spPr>
+        <p:txBody>
+          <a:bodyPr wrap="square" lIns="0" tIns="0" rIns="0" bIns="0" rtlCol="0" anchor="t"/>
+          <a:lstStyle/>
+          <a:p>
+            <a:pPr rtl="1" algn="ctr" indent="0" marL="0">
+              <a:buNone/>
+            </a:pPr>
+            <a:r>
+              <a:rPr lang="ar-SA" altLang="en-US" sz="1500" b="1" dirty="0">
+                <a:solidFill>
+                  <a:srgbClr val="17504E"/>
+                </a:solidFill>
+                <a:latin typeface="Arial" pitchFamily="34" charset="0"/>
+                <a:ea typeface="Arial" pitchFamily="34" charset="-122"/>
+                <a:cs typeface="Arial" pitchFamily="34" charset="-120"/>
+              </a:rPr>
+              <a:t>Service · Requirement · Scenario</a:t>
+            </a:r>
+            <a:endParaRPr lang="ar-SA" sz="1500" dirty="0"/>
+          </a:p>
+        </p:txBody>
       </p:sp>
       <p:sp>
         <p:nvSpPr>
@@ -6906,63 +7107,24 @@
         </p:nvSpPr>
         <p:spPr>
           <a:xfrm>
-            <a:off x="3200400" y="2404872"/>
-            <a:ext cx="2208276" cy="365760"/>
-          </a:xfrm>
-          <a:prstGeom prst="rect">
-            <a:avLst/>
-          </a:prstGeom>
-          <a:noFill/>
-          <a:ln/>
-        </p:spPr>
-        <p:txBody>
-          <a:bodyPr wrap="square" lIns="0" tIns="0" rIns="0" bIns="0" rtlCol="0" anchor="ctr"/>
-          <a:lstStyle/>
-          <a:p>
-            <a:pPr rtl="1" algn="r" indent="0" marL="0">
-              <a:buNone/>
-            </a:pPr>
-            <a:r>
-              <a:rPr lang="ar-SA" altLang="en-US" sz="1300" b="1" dirty="0">
-                <a:solidFill>
-                  <a:srgbClr val="17504E"/>
-                </a:solidFill>
-                <a:latin typeface="Arial" pitchFamily="34" charset="0"/>
-                <a:ea typeface="Arial" pitchFamily="34" charset="-122"/>
-                <a:cs typeface="Arial" pitchFamily="34" charset="-120"/>
-              </a:rPr>
-              <a:t>منصة بلدي</a:t>
-            </a:r>
-            <a:endParaRPr lang="ar-SA" sz="1300" dirty="0"/>
-          </a:p>
-        </p:txBody>
-      </p:sp>
-      <p:sp>
-        <p:nvSpPr>
-          <p:cNvPr id="19" name="Text 17"/>
-          <p:cNvSpPr txBox="1"/>
-          <p:nvPr/>
-        </p:nvSpPr>
-        <p:spPr>
-          <a:xfrm>
-            <a:off x="777240" y="2404872"/>
-            <a:ext cx="2468880" cy="365760"/>
-          </a:xfrm>
-          <a:prstGeom prst="rect">
-            <a:avLst/>
-          </a:prstGeom>
-          <a:noFill/>
-          <a:ln/>
-        </p:spPr>
-        <p:txBody>
-          <a:bodyPr wrap="square" lIns="0" tIns="0" rIns="0" bIns="0" rtlCol="0" anchor="ctr"/>
-          <a:lstStyle/>
-          <a:p>
-            <a:pPr rtl="1" algn="l" indent="0" marL="0">
-              <a:buNone/>
-            </a:pPr>
-            <a:r>
-              <a:rPr lang="ar-SA" altLang="en-US" sz="1000" dirty="0">
+            <a:off x="777240" y="2286000"/>
+            <a:ext cx="2907792" cy="365760"/>
+          </a:xfrm>
+          <a:prstGeom prst="rect">
+            <a:avLst/>
+          </a:prstGeom>
+          <a:noFill/>
+          <a:ln/>
+        </p:spPr>
+        <p:txBody>
+          <a:bodyPr wrap="square" lIns="0" tIns="0" rIns="0" bIns="0" rtlCol="0" anchor="t"/>
+          <a:lstStyle/>
+          <a:p>
+            <a:pPr rtl="1" algn="ctr" indent="0" marL="0">
+              <a:buNone/>
+            </a:pPr>
+            <a:r>
+              <a:rPr lang="ar-SA" altLang="en-US" sz="1200" dirty="0">
                 <a:solidFill>
                   <a:srgbClr val="6B7F7E"/>
                 </a:solidFill>
@@ -6970,26 +7132,26 @@
                 <a:ea typeface="Arial" pitchFamily="34" charset="-122"/>
                 <a:cs typeface="Arial" pitchFamily="34" charset="-120"/>
               </a:rPr>
-              <a:t>رخص الأنشطة التجارية</a:t>
-            </a:r>
-            <a:endParaRPr lang="ar-SA" sz="1000" dirty="0"/>
-          </a:p>
-        </p:txBody>
-      </p:sp>
-      <p:sp>
-        <p:nvSpPr>
-          <p:cNvPr id="20" name="Shape 18"/>
+              <a:t>ثلاثة أنواع تحكم كل شيء</a:t>
+            </a:r>
+            <a:endParaRPr lang="ar-SA" sz="1200" dirty="0"/>
+          </a:p>
+        </p:txBody>
+      </p:sp>
+      <p:sp>
+        <p:nvSpPr>
+          <p:cNvPr id="19" name="Shape 17"/>
           <p:cNvSpPr/>
           <p:nvPr/>
         </p:nvSpPr>
         <p:spPr>
           <a:xfrm>
-            <a:off x="6231636" y="2990088"/>
-            <a:ext cx="5408676" cy="566928"/>
+            <a:off x="548640" y="3246120"/>
+            <a:ext cx="11091672" cy="658368"/>
           </a:xfrm>
           <a:prstGeom prst="roundRect">
             <a:avLst>
-              <a:gd name="adj" fmla="val 29032"/>
+              <a:gd name="adj" fmla="val 25000"/>
             </a:avLst>
           </a:prstGeom>
           <a:solidFill>
@@ -7012,121 +7174,96 @@
       </p:sp>
       <p:sp>
         <p:nvSpPr>
-          <p:cNvPr id="21" name="Shape 19"/>
+          <p:cNvPr id="20" name="Text 18"/>
+          <p:cNvSpPr txBox="1"/>
+          <p:nvPr/>
+        </p:nvSpPr>
+        <p:spPr>
+          <a:xfrm>
+            <a:off x="8622792" y="3392424"/>
+            <a:ext cx="2743200" cy="365760"/>
+          </a:xfrm>
+          <a:prstGeom prst="rect">
+            <a:avLst/>
+          </a:prstGeom>
+          <a:noFill/>
+          <a:ln/>
+        </p:spPr>
+        <p:txBody>
+          <a:bodyPr wrap="square" lIns="0" tIns="0" rIns="0" bIns="0" rtlCol="0" anchor="t"/>
+          <a:lstStyle/>
+          <a:p>
+            <a:pPr rtl="1" algn="r" indent="0" marL="0">
+              <a:buNone/>
+            </a:pPr>
+            <a:r>
+              <a:rPr lang="ar-SA" altLang="en-US" sz="1300" b="1" dirty="0">
+                <a:solidFill>
+                  <a:srgbClr val="17504E"/>
+                </a:solidFill>
+                <a:latin typeface="Arial" pitchFamily="34" charset="0"/>
+                <a:ea typeface="Arial" pitchFamily="34" charset="-122"/>
+                <a:cs typeface="Arial" pitchFamily="34" charset="-120"/>
+              </a:rPr>
+              <a:t>كل خدمة كائن مكتمل</a:t>
+            </a:r>
+            <a:endParaRPr lang="ar-SA" sz="1300" dirty="0"/>
+          </a:p>
+        </p:txBody>
+      </p:sp>
+      <p:sp>
+        <p:nvSpPr>
+          <p:cNvPr id="21" name="Text 19"/>
+          <p:cNvSpPr txBox="1"/>
+          <p:nvPr/>
+        </p:nvSpPr>
+        <p:spPr>
+          <a:xfrm>
+            <a:off x="777240" y="3392424"/>
+            <a:ext cx="7799832" cy="411480"/>
+          </a:xfrm>
+          <a:prstGeom prst="rect">
+            <a:avLst/>
+          </a:prstGeom>
+          <a:noFill/>
+          <a:ln/>
+        </p:spPr>
+        <p:txBody>
+          <a:bodyPr wrap="square" lIns="0" tIns="0" rIns="0" bIns="0" rtlCol="0" anchor="t"/>
+          <a:lstStyle/>
+          <a:p>
+            <a:pPr rtl="1" algn="l" indent="0" marL="0">
+              <a:buNone/>
+            </a:pPr>
+            <a:r>
+              <a:rPr lang="ar-SA" altLang="en-US" sz="1150" dirty="0">
+                <a:solidFill>
+                  <a:srgbClr val="6B7F7E"/>
+                </a:solidFill>
+                <a:latin typeface="Arial" pitchFamily="34" charset="0"/>
+                <a:ea typeface="Arial" pitchFamily="34" charset="-122"/>
+                <a:cs typeface="Arial" pitchFamily="34" charset="-120"/>
+              </a:rPr>
+              <a:t>الشروط والمستندات والخطوات والرسوم والمدة والجهة ورابط القناة الرسمية وقائمة المصادر وتاريخ التحقق</a:t>
+            </a:r>
+            <a:endParaRPr lang="ar-SA" sz="1150" dirty="0"/>
+          </a:p>
+        </p:txBody>
+      </p:sp>
+      <p:sp>
+        <p:nvSpPr>
+          <p:cNvPr id="22" name="Shape 20"/>
           <p:cNvSpPr/>
           <p:nvPr/>
         </p:nvSpPr>
         <p:spPr>
           <a:xfrm>
-            <a:off x="11183112" y="3163824"/>
-            <a:ext cx="219456" cy="219456"/>
-          </a:xfrm>
-          <a:prstGeom prst="ellipse">
-            <a:avLst/>
-          </a:prstGeom>
-          <a:solidFill>
-            <a:srgbClr val="1F6A68"/>
-          </a:solidFill>
-          <a:ln w="12700">
-            <a:solidFill>
-              <a:srgbClr val="1F6A68"/>
-            </a:solidFill>
-            <a:prstDash val="solid"/>
-          </a:ln>
-        </p:spPr>
-      </p:sp>
-      <p:sp>
-        <p:nvSpPr>
-          <p:cNvPr id="22" name="Text 20"/>
-          <p:cNvSpPr txBox="1"/>
-          <p:nvPr/>
-        </p:nvSpPr>
-        <p:spPr>
-          <a:xfrm>
-            <a:off x="8883396" y="3099816"/>
-            <a:ext cx="2208276" cy="365760"/>
-          </a:xfrm>
-          <a:prstGeom prst="rect">
-            <a:avLst/>
-          </a:prstGeom>
-          <a:noFill/>
-          <a:ln/>
-        </p:spPr>
-        <p:txBody>
-          <a:bodyPr wrap="square" lIns="0" tIns="0" rIns="0" bIns="0" rtlCol="0" anchor="ctr"/>
-          <a:lstStyle/>
-          <a:p>
-            <a:pPr rtl="1" algn="r" indent="0" marL="0">
-              <a:buNone/>
-            </a:pPr>
-            <a:r>
-              <a:rPr lang="ar-SA" altLang="en-US" sz="1300" b="1" dirty="0">
-                <a:solidFill>
-                  <a:srgbClr val="17504E"/>
-                </a:solidFill>
-                <a:latin typeface="Arial" pitchFamily="34" charset="0"/>
-                <a:ea typeface="Arial" pitchFamily="34" charset="-122"/>
-                <a:cs typeface="Arial" pitchFamily="34" charset="-120"/>
-              </a:rPr>
-              <a:t>منصة إيجار</a:t>
-            </a:r>
-            <a:endParaRPr lang="ar-SA" sz="1300" dirty="0"/>
-          </a:p>
-        </p:txBody>
-      </p:sp>
-      <p:sp>
-        <p:nvSpPr>
-          <p:cNvPr id="23" name="Text 21"/>
-          <p:cNvSpPr txBox="1"/>
-          <p:nvPr/>
-        </p:nvSpPr>
-        <p:spPr>
-          <a:xfrm>
-            <a:off x="6460236" y="3099816"/>
-            <a:ext cx="2468880" cy="365760"/>
-          </a:xfrm>
-          <a:prstGeom prst="rect">
-            <a:avLst/>
-          </a:prstGeom>
-          <a:noFill/>
-          <a:ln/>
-        </p:spPr>
-        <p:txBody>
-          <a:bodyPr wrap="square" lIns="0" tIns="0" rIns="0" bIns="0" rtlCol="0" anchor="ctr"/>
-          <a:lstStyle/>
-          <a:p>
-            <a:pPr rtl="1" algn="l" indent="0" marL="0">
-              <a:buNone/>
-            </a:pPr>
-            <a:r>
-              <a:rPr lang="ar-SA" altLang="en-US" sz="1000" dirty="0">
-                <a:solidFill>
-                  <a:srgbClr val="6B7F7E"/>
-                </a:solidFill>
-                <a:latin typeface="Arial" pitchFamily="34" charset="0"/>
-                <a:ea typeface="Arial" pitchFamily="34" charset="-122"/>
-                <a:cs typeface="Arial" pitchFamily="34" charset="-120"/>
-              </a:rPr>
-              <a:t>العقود السكنية والتجارية</a:t>
-            </a:r>
-            <a:endParaRPr lang="ar-SA" sz="1000" dirty="0"/>
-          </a:p>
-        </p:txBody>
-      </p:sp>
-      <p:sp>
-        <p:nvSpPr>
-          <p:cNvPr id="24" name="Shape 22"/>
-          <p:cNvSpPr/>
-          <p:nvPr/>
-        </p:nvSpPr>
-        <p:spPr>
-          <a:xfrm>
-            <a:off x="548640" y="2990088"/>
-            <a:ext cx="5408676" cy="566928"/>
+            <a:off x="548640" y="4032504"/>
+            <a:ext cx="11091672" cy="658368"/>
           </a:xfrm>
           <a:prstGeom prst="roundRect">
             <a:avLst>
-              <a:gd name="adj" fmla="val 29032"/>
+              <a:gd name="adj" fmla="val 25000"/>
             </a:avLst>
           </a:prstGeom>
           <a:solidFill>
@@ -7149,121 +7286,96 @@
       </p:sp>
       <p:sp>
         <p:nvSpPr>
+          <p:cNvPr id="23" name="Text 21"/>
+          <p:cNvSpPr txBox="1"/>
+          <p:nvPr/>
+        </p:nvSpPr>
+        <p:spPr>
+          <a:xfrm>
+            <a:off x="8622792" y="4178808"/>
+            <a:ext cx="2743200" cy="365760"/>
+          </a:xfrm>
+          <a:prstGeom prst="rect">
+            <a:avLst/>
+          </a:prstGeom>
+          <a:noFill/>
+          <a:ln/>
+        </p:spPr>
+        <p:txBody>
+          <a:bodyPr wrap="square" lIns="0" tIns="0" rIns="0" bIns="0" rtlCol="0" anchor="t"/>
+          <a:lstStyle/>
+          <a:p>
+            <a:pPr rtl="1" algn="r" indent="0" marL="0">
+              <a:buNone/>
+            </a:pPr>
+            <a:r>
+              <a:rPr lang="ar-SA" altLang="en-US" sz="1300" b="1" dirty="0">
+                <a:solidFill>
+                  <a:srgbClr val="17504E"/>
+                </a:solidFill>
+                <a:latin typeface="Arial" pitchFamily="34" charset="0"/>
+                <a:ea typeface="Arial" pitchFamily="34" charset="-122"/>
+                <a:cs typeface="Arial" pitchFamily="34" charset="-120"/>
+              </a:rPr>
+              <a:t>كل متطلب يحمل مسار حله</a:t>
+            </a:r>
+            <a:endParaRPr lang="ar-SA" sz="1300" dirty="0"/>
+          </a:p>
+        </p:txBody>
+      </p:sp>
+      <p:sp>
+        <p:nvSpPr>
+          <p:cNvPr id="24" name="Text 22"/>
+          <p:cNvSpPr txBox="1"/>
+          <p:nvPr/>
+        </p:nvSpPr>
+        <p:spPr>
+          <a:xfrm>
+            <a:off x="777240" y="4178808"/>
+            <a:ext cx="7799832" cy="411480"/>
+          </a:xfrm>
+          <a:prstGeom prst="rect">
+            <a:avLst/>
+          </a:prstGeom>
+          <a:noFill/>
+          <a:ln/>
+        </p:spPr>
+        <p:txBody>
+          <a:bodyPr wrap="square" lIns="0" tIns="0" rIns="0" bIns="0" rtlCol="0" anchor="t"/>
+          <a:lstStyle/>
+          <a:p>
+            <a:pPr rtl="1" algn="l" indent="0" marL="0">
+              <a:buNone/>
+            </a:pPr>
+            <a:r>
+              <a:rPr lang="ar-SA" altLang="en-US" sz="1150" dirty="0">
+                <a:solidFill>
+                  <a:srgbClr val="6B7F7E"/>
+                </a:solidFill>
+                <a:latin typeface="Arial" pitchFamily="34" charset="0"/>
+                <a:ea typeface="Arial" pitchFamily="34" charset="-122"/>
+                <a:cs typeface="Arial" pitchFamily="34" charset="-120"/>
+              </a:rPr>
+              <a:t>حقل obtain: لماذا هو مطلوب، وأين يُستخرج، وبأي خطوات، وكم يستغرق. هذا ما يغذي شاشة «لو ما أقدر؟»</a:t>
+            </a:r>
+            <a:endParaRPr lang="ar-SA" sz="1150" dirty="0"/>
+          </a:p>
+        </p:txBody>
+      </p:sp>
+      <p:sp>
+        <p:nvSpPr>
           <p:cNvPr id="25" name="Shape 23"/>
           <p:cNvSpPr/>
           <p:nvPr/>
         </p:nvSpPr>
         <p:spPr>
           <a:xfrm>
-            <a:off x="5500116" y="3163824"/>
-            <a:ext cx="219456" cy="219456"/>
-          </a:xfrm>
-          <a:prstGeom prst="ellipse">
-            <a:avLst/>
-          </a:prstGeom>
-          <a:solidFill>
-            <a:srgbClr val="1F6A68"/>
-          </a:solidFill>
-          <a:ln w="12700">
-            <a:solidFill>
-              <a:srgbClr val="1F6A68"/>
-            </a:solidFill>
-            <a:prstDash val="solid"/>
-          </a:ln>
-        </p:spPr>
-      </p:sp>
-      <p:sp>
-        <p:nvSpPr>
-          <p:cNvPr id="26" name="Text 24"/>
-          <p:cNvSpPr txBox="1"/>
-          <p:nvPr/>
-        </p:nvSpPr>
-        <p:spPr>
-          <a:xfrm>
-            <a:off x="3200400" y="3099816"/>
-            <a:ext cx="2208276" cy="365760"/>
-          </a:xfrm>
-          <a:prstGeom prst="rect">
-            <a:avLst/>
-          </a:prstGeom>
-          <a:noFill/>
-          <a:ln/>
-        </p:spPr>
-        <p:txBody>
-          <a:bodyPr wrap="square" lIns="0" tIns="0" rIns="0" bIns="0" rtlCol="0" anchor="ctr"/>
-          <a:lstStyle/>
-          <a:p>
-            <a:pPr rtl="1" algn="r" indent="0" marL="0">
-              <a:buNone/>
-            </a:pPr>
-            <a:r>
-              <a:rPr lang="ar-SA" altLang="en-US" sz="1300" b="1" dirty="0">
-                <a:solidFill>
-                  <a:srgbClr val="17504E"/>
-                </a:solidFill>
-                <a:latin typeface="Arial" pitchFamily="34" charset="0"/>
-                <a:ea typeface="Arial" pitchFamily="34" charset="-122"/>
-                <a:cs typeface="Arial" pitchFamily="34" charset="-120"/>
-              </a:rPr>
-              <a:t>هيئة الزكاة والضريبة والجمارك</a:t>
-            </a:r>
-            <a:endParaRPr lang="ar-SA" sz="1300" dirty="0"/>
-          </a:p>
-        </p:txBody>
-      </p:sp>
-      <p:sp>
-        <p:nvSpPr>
-          <p:cNvPr id="27" name="Text 25"/>
-          <p:cNvSpPr txBox="1"/>
-          <p:nvPr/>
-        </p:nvSpPr>
-        <p:spPr>
-          <a:xfrm>
-            <a:off x="777240" y="3099816"/>
-            <a:ext cx="2468880" cy="365760"/>
-          </a:xfrm>
-          <a:prstGeom prst="rect">
-            <a:avLst/>
-          </a:prstGeom>
-          <a:noFill/>
-          <a:ln/>
-        </p:spPr>
-        <p:txBody>
-          <a:bodyPr wrap="square" lIns="0" tIns="0" rIns="0" bIns="0" rtlCol="0" anchor="ctr"/>
-          <a:lstStyle/>
-          <a:p>
-            <a:pPr rtl="1" algn="l" indent="0" marL="0">
-              <a:buNone/>
-            </a:pPr>
-            <a:r>
-              <a:rPr lang="ar-SA" altLang="en-US" sz="1000" dirty="0">
-                <a:solidFill>
-                  <a:srgbClr val="6B7F7E"/>
-                </a:solidFill>
-                <a:latin typeface="Arial" pitchFamily="34" charset="0"/>
-                <a:ea typeface="Arial" pitchFamily="34" charset="-122"/>
-                <a:cs typeface="Arial" pitchFamily="34" charset="-120"/>
-              </a:rPr>
-              <a:t>الزكاة وضريبة القيمة المضافة</a:t>
-            </a:r>
-            <a:endParaRPr lang="ar-SA" sz="1000" dirty="0"/>
-          </a:p>
-        </p:txBody>
-      </p:sp>
-      <p:sp>
-        <p:nvSpPr>
-          <p:cNvPr id="28" name="Shape 26"/>
-          <p:cNvSpPr/>
-          <p:nvPr/>
-        </p:nvSpPr>
-        <p:spPr>
-          <a:xfrm>
-            <a:off x="6231636" y="3685032"/>
-            <a:ext cx="5408676" cy="566928"/>
+            <a:off x="548640" y="4818888"/>
+            <a:ext cx="11091672" cy="658368"/>
           </a:xfrm>
           <a:prstGeom prst="roundRect">
             <a:avLst>
-              <a:gd name="adj" fmla="val 29032"/>
+              <a:gd name="adj" fmla="val 25000"/>
             </a:avLst>
           </a:prstGeom>
           <a:solidFill>
@@ -7286,121 +7398,96 @@
       </p:sp>
       <p:sp>
         <p:nvSpPr>
-          <p:cNvPr id="29" name="Shape 27"/>
+          <p:cNvPr id="26" name="Text 24"/>
+          <p:cNvSpPr txBox="1"/>
+          <p:nvPr/>
+        </p:nvSpPr>
+        <p:spPr>
+          <a:xfrm>
+            <a:off x="8622792" y="4965192"/>
+            <a:ext cx="2743200" cy="365760"/>
+          </a:xfrm>
+          <a:prstGeom prst="rect">
+            <a:avLst/>
+          </a:prstGeom>
+          <a:noFill/>
+          <a:ln/>
+        </p:spPr>
+        <p:txBody>
+          <a:bodyPr wrap="square" lIns="0" tIns="0" rIns="0" bIns="0" rtlCol="0" anchor="t"/>
+          <a:lstStyle/>
+          <a:p>
+            <a:pPr rtl="1" algn="r" indent="0" marL="0">
+              <a:buNone/>
+            </a:pPr>
+            <a:r>
+              <a:rPr lang="ar-SA" altLang="en-US" sz="1300" b="1" dirty="0">
+                <a:solidFill>
+                  <a:srgbClr val="17504E"/>
+                </a:solidFill>
+                <a:latin typeface="Arial" pitchFamily="34" charset="0"/>
+                <a:ea typeface="Arial" pitchFamily="34" charset="-122"/>
+                <a:cs typeface="Arial" pitchFamily="34" charset="-120"/>
+              </a:rPr>
+              <a:t>التبعيات صريحة</a:t>
+            </a:r>
+            <a:endParaRPr lang="ar-SA" sz="1300" dirty="0"/>
+          </a:p>
+        </p:txBody>
+      </p:sp>
+      <p:sp>
+        <p:nvSpPr>
+          <p:cNvPr id="27" name="Text 25"/>
+          <p:cNvSpPr txBox="1"/>
+          <p:nvPr/>
+        </p:nvSpPr>
+        <p:spPr>
+          <a:xfrm>
+            <a:off x="777240" y="4965192"/>
+            <a:ext cx="7799832" cy="411480"/>
+          </a:xfrm>
+          <a:prstGeom prst="rect">
+            <a:avLst/>
+          </a:prstGeom>
+          <a:noFill/>
+          <a:ln/>
+        </p:spPr>
+        <p:txBody>
+          <a:bodyPr wrap="square" lIns="0" tIns="0" rIns="0" bIns="0" rtlCol="0" anchor="t"/>
+          <a:lstStyle/>
+          <a:p>
+            <a:pPr rtl="1" algn="l" indent="0" marL="0">
+              <a:buNone/>
+            </a:pPr>
+            <a:r>
+              <a:rPr lang="ar-SA" altLang="en-US" sz="1150" dirty="0">
+                <a:solidFill>
+                  <a:srgbClr val="6B7F7E"/>
+                </a:solidFill>
+                <a:latin typeface="Arial" pitchFamily="34" charset="0"/>
+                <a:ea typeface="Arial" pitchFamily="34" charset="-122"/>
+                <a:cs typeface="Arial" pitchFamily="34" charset="-120"/>
+              </a:rPr>
+              <a:t>prerequisites تربط الخدمات ببعضها، ومنها يُبنى ترتيب الرحلة آلياً بلا كتابة يدوية</a:t>
+            </a:r>
+            <a:endParaRPr lang="ar-SA" sz="1150" dirty="0"/>
+          </a:p>
+        </p:txBody>
+      </p:sp>
+      <p:sp>
+        <p:nvSpPr>
+          <p:cNvPr id="28" name="Shape 26"/>
           <p:cNvSpPr/>
           <p:nvPr/>
         </p:nvSpPr>
         <p:spPr>
           <a:xfrm>
-            <a:off x="11183112" y="3858768"/>
-            <a:ext cx="219456" cy="219456"/>
-          </a:xfrm>
-          <a:prstGeom prst="ellipse">
-            <a:avLst/>
-          </a:prstGeom>
-          <a:solidFill>
-            <a:srgbClr val="1F6A68"/>
-          </a:solidFill>
-          <a:ln w="12700">
-            <a:solidFill>
-              <a:srgbClr val="1F6A68"/>
-            </a:solidFill>
-            <a:prstDash val="solid"/>
-          </a:ln>
-        </p:spPr>
-      </p:sp>
-      <p:sp>
-        <p:nvSpPr>
-          <p:cNvPr id="30" name="Text 28"/>
-          <p:cNvSpPr txBox="1"/>
-          <p:nvPr/>
-        </p:nvSpPr>
-        <p:spPr>
-          <a:xfrm>
-            <a:off x="8883396" y="3794760"/>
-            <a:ext cx="2208276" cy="365760"/>
-          </a:xfrm>
-          <a:prstGeom prst="rect">
-            <a:avLst/>
-          </a:prstGeom>
-          <a:noFill/>
-          <a:ln/>
-        </p:spPr>
-        <p:txBody>
-          <a:bodyPr wrap="square" lIns="0" tIns="0" rIns="0" bIns="0" rtlCol="0" anchor="ctr"/>
-          <a:lstStyle/>
-          <a:p>
-            <a:pPr rtl="1" algn="r" indent="0" marL="0">
-              <a:buNone/>
-            </a:pPr>
-            <a:r>
-              <a:rPr lang="ar-SA" altLang="en-US" sz="1300" b="1" dirty="0">
-                <a:solidFill>
-                  <a:srgbClr val="17504E"/>
-                </a:solidFill>
-                <a:latin typeface="Arial" pitchFamily="34" charset="0"/>
-                <a:ea typeface="Arial" pitchFamily="34" charset="-122"/>
-                <a:cs typeface="Arial" pitchFamily="34" charset="-120"/>
-              </a:rPr>
-              <a:t>التأمينات الاجتماعية</a:t>
-            </a:r>
-            <a:endParaRPr lang="ar-SA" sz="1300" dirty="0"/>
-          </a:p>
-        </p:txBody>
-      </p:sp>
-      <p:sp>
-        <p:nvSpPr>
-          <p:cNvPr id="31" name="Text 29"/>
-          <p:cNvSpPr txBox="1"/>
-          <p:nvPr/>
-        </p:nvSpPr>
-        <p:spPr>
-          <a:xfrm>
-            <a:off x="6460236" y="3794760"/>
-            <a:ext cx="2468880" cy="365760"/>
-          </a:xfrm>
-          <a:prstGeom prst="rect">
-            <a:avLst/>
-          </a:prstGeom>
-          <a:noFill/>
-          <a:ln/>
-        </p:spPr>
-        <p:txBody>
-          <a:bodyPr wrap="square" lIns="0" tIns="0" rIns="0" bIns="0" rtlCol="0" anchor="ctr"/>
-          <a:lstStyle/>
-          <a:p>
-            <a:pPr rtl="1" algn="l" indent="0" marL="0">
-              <a:buNone/>
-            </a:pPr>
-            <a:r>
-              <a:rPr lang="ar-SA" altLang="en-US" sz="1000" dirty="0">
-                <a:solidFill>
-                  <a:srgbClr val="6B7F7E"/>
-                </a:solidFill>
-                <a:latin typeface="Arial" pitchFamily="34" charset="0"/>
-                <a:ea typeface="Arial" pitchFamily="34" charset="-122"/>
-                <a:cs typeface="Arial" pitchFamily="34" charset="-120"/>
-              </a:rPr>
-              <a:t>تسجيل المنشآت والمشتركين</a:t>
-            </a:r>
-            <a:endParaRPr lang="ar-SA" sz="1000" dirty="0"/>
-          </a:p>
-        </p:txBody>
-      </p:sp>
-      <p:sp>
-        <p:nvSpPr>
-          <p:cNvPr id="32" name="Shape 30"/>
-          <p:cNvSpPr/>
-          <p:nvPr/>
-        </p:nvSpPr>
-        <p:spPr>
-          <a:xfrm>
-            <a:off x="548640" y="3685032"/>
-            <a:ext cx="5408676" cy="566928"/>
+            <a:off x="548640" y="5605272"/>
+            <a:ext cx="11091672" cy="658368"/>
           </a:xfrm>
           <a:prstGeom prst="roundRect">
             <a:avLst>
-              <a:gd name="adj" fmla="val 29032"/>
+              <a:gd name="adj" fmla="val 25000"/>
             </a:avLst>
           </a:prstGeom>
           <a:solidFill>
@@ -7423,48 +7510,23 @@
       </p:sp>
       <p:sp>
         <p:nvSpPr>
-          <p:cNvPr id="33" name="Shape 31"/>
-          <p:cNvSpPr/>
-          <p:nvPr/>
-        </p:nvSpPr>
-        <p:spPr>
-          <a:xfrm>
-            <a:off x="5500116" y="3858768"/>
-            <a:ext cx="219456" cy="219456"/>
-          </a:xfrm>
-          <a:prstGeom prst="ellipse">
-            <a:avLst/>
-          </a:prstGeom>
-          <a:solidFill>
-            <a:srgbClr val="1F6A68"/>
-          </a:solidFill>
-          <a:ln w="12700">
-            <a:solidFill>
-              <a:srgbClr val="1F6A68"/>
-            </a:solidFill>
-            <a:prstDash val="solid"/>
-          </a:ln>
-        </p:spPr>
-      </p:sp>
-      <p:sp>
-        <p:nvSpPr>
-          <p:cNvPr id="34" name="Text 32"/>
-          <p:cNvSpPr txBox="1"/>
-          <p:nvPr/>
-        </p:nvSpPr>
-        <p:spPr>
-          <a:xfrm>
-            <a:off x="3200400" y="3794760"/>
-            <a:ext cx="2208276" cy="365760"/>
-          </a:xfrm>
-          <a:prstGeom prst="rect">
-            <a:avLst/>
-          </a:prstGeom>
-          <a:noFill/>
-          <a:ln/>
-        </p:spPr>
-        <p:txBody>
-          <a:bodyPr wrap="square" lIns="0" tIns="0" rIns="0" bIns="0" rtlCol="0" anchor="ctr"/>
+          <p:cNvPr id="29" name="Text 27"/>
+          <p:cNvSpPr txBox="1"/>
+          <p:nvPr/>
+        </p:nvSpPr>
+        <p:spPr>
+          <a:xfrm>
+            <a:off x="8622792" y="5751576"/>
+            <a:ext cx="2743200" cy="365760"/>
+          </a:xfrm>
+          <a:prstGeom prst="rect">
+            <a:avLst/>
+          </a:prstGeom>
+          <a:noFill/>
+          <a:ln/>
+        </p:spPr>
+        <p:txBody>
+          <a:bodyPr wrap="square" lIns="0" tIns="0" rIns="0" bIns="0" rtlCol="0" anchor="t"/>
           <a:lstStyle/>
           <a:p>
             <a:pPr rtl="1" algn="r" indent="0" marL="0">
@@ -7479,7 +7541,7 @@
                 <a:ea typeface="Arial" pitchFamily="34" charset="-122"/>
                 <a:cs typeface="Arial" pitchFamily="34" charset="-120"/>
               </a:rPr>
-              <a:t>قوى · مدد</a:t>
+              <a:t>فحص سلامة آلي</a:t>
             </a:r>
             <a:endParaRPr lang="ar-SA" sz="1300" dirty="0"/>
           </a:p>
@@ -7487,29 +7549,68 @@
       </p:sp>
       <p:sp>
         <p:nvSpPr>
-          <p:cNvPr id="35" name="Text 33"/>
-          <p:cNvSpPr txBox="1"/>
-          <p:nvPr/>
-        </p:nvSpPr>
-        <p:spPr>
-          <a:xfrm>
-            <a:off x="777240" y="3794760"/>
-            <a:ext cx="2468880" cy="365760"/>
-          </a:xfrm>
-          <a:prstGeom prst="rect">
-            <a:avLst/>
-          </a:prstGeom>
-          <a:noFill/>
-          <a:ln/>
-        </p:spPr>
-        <p:txBody>
-          <a:bodyPr wrap="square" lIns="0" tIns="0" rIns="0" bIns="0" rtlCol="0" anchor="ctr"/>
+          <p:cNvPr id="30" name="Text 28"/>
+          <p:cNvSpPr txBox="1"/>
+          <p:nvPr/>
+        </p:nvSpPr>
+        <p:spPr>
+          <a:xfrm>
+            <a:off x="777240" y="5751576"/>
+            <a:ext cx="7799832" cy="411480"/>
+          </a:xfrm>
+          <a:prstGeom prst="rect">
+            <a:avLst/>
+          </a:prstGeom>
+          <a:noFill/>
+          <a:ln/>
+        </p:spPr>
+        <p:txBody>
+          <a:bodyPr wrap="square" lIns="0" tIns="0" rIns="0" bIns="0" rtlCol="0" anchor="t"/>
           <a:lstStyle/>
           <a:p>
             <a:pPr rtl="1" algn="l" indent="0" marL="0">
               <a:buNone/>
             </a:pPr>
             <a:r>
+              <a:rPr lang="ar-SA" altLang="en-US" sz="1150" dirty="0">
+                <a:solidFill>
+                  <a:srgbClr val="6B7F7E"/>
+                </a:solidFill>
+                <a:latin typeface="Arial" pitchFamily="34" charset="0"/>
+                <a:ea typeface="Arial" pitchFamily="34" charset="-122"/>
+                <a:cs typeface="Arial" pitchFamily="34" charset="-120"/>
+              </a:rPr>
+              <a:t>سكربت يتأكد أن كل معرّف وجهة ومصدر موجود، وأنه لا توجد دورات في التبعيات، قبل كل نشر</a:t>
+            </a:r>
+            <a:endParaRPr lang="ar-SA" sz="1150" dirty="0"/>
+          </a:p>
+        </p:txBody>
+      </p:sp>
+      <p:sp>
+        <p:nvSpPr>
+          <p:cNvPr id="31" name="Text 29"/>
+          <p:cNvSpPr txBox="1"/>
+          <p:nvPr/>
+        </p:nvSpPr>
+        <p:spPr>
+          <a:xfrm>
+            <a:off x="548640" y="6382512"/>
+            <a:ext cx="3657600" cy="274320"/>
+          </a:xfrm>
+          <a:prstGeom prst="rect">
+            <a:avLst/>
+          </a:prstGeom>
+          <a:noFill/>
+          <a:ln/>
+        </p:spPr>
+        <p:txBody>
+          <a:bodyPr wrap="square" lIns="0" tIns="0" rIns="0" bIns="0" rtlCol="0" anchor="t"/>
+          <a:lstStyle/>
+          <a:p>
+            <a:pPr rtl="1" algn="l" indent="0" marL="0">
+              <a:buNone/>
+            </a:pPr>
+            <a:r>
               <a:rPr lang="ar-SA" altLang="en-US" sz="1000" dirty="0">
                 <a:solidFill>
                   <a:srgbClr val="6B7F7E"/>
@@ -7518,7 +7619,7 @@
                 <a:ea typeface="Arial" pitchFamily="34" charset="-122"/>
                 <a:cs typeface="Arial" pitchFamily="34" charset="-120"/>
               </a:rPr>
-              <a:t>العمالة وحماية الأجور</a:t>
+              <a:t>shamal-ai.vercel.app</a:t>
             </a:r>
             <a:endParaRPr lang="ar-SA" sz="1000" dirty="0"/>
           </a:p>
@@ -7526,127 +7627,29 @@
       </p:sp>
       <p:sp>
         <p:nvSpPr>
-          <p:cNvPr id="36" name="Shape 34"/>
-          <p:cNvSpPr/>
-          <p:nvPr/>
-        </p:nvSpPr>
-        <p:spPr>
-          <a:xfrm>
-            <a:off x="6231636" y="4379976"/>
-            <a:ext cx="5408676" cy="566928"/>
-          </a:xfrm>
-          <a:prstGeom prst="roundRect">
-            <a:avLst>
-              <a:gd name="adj" fmla="val 29032"/>
-            </a:avLst>
-          </a:prstGeom>
-          <a:solidFill>
-            <a:srgbClr val="FFFFFF"/>
-          </a:solidFill>
-          <a:ln w="9525">
-            <a:solidFill>
-              <a:srgbClr val="DDE7E7"/>
-            </a:solidFill>
-            <a:prstDash val="solid"/>
-          </a:ln>
-          <a:effectLst>
-            <a:outerShdw sx="100000" sy="100000" kx="0" ky="0" algn="bl" rotWithShape="0" blurRad="76200" dist="25400" dir="5400000">
-              <a:srgbClr val="17504E">
-                <a:alpha val="8000"/>
-              </a:srgbClr>
-            </a:outerShdw>
-          </a:effectLst>
-        </p:spPr>
-      </p:sp>
-      <p:sp>
-        <p:nvSpPr>
-          <p:cNvPr id="37" name="Shape 35"/>
-          <p:cNvSpPr/>
-          <p:nvPr/>
-        </p:nvSpPr>
-        <p:spPr>
-          <a:xfrm>
-            <a:off x="11183112" y="4553712"/>
-            <a:ext cx="219456" cy="219456"/>
-          </a:xfrm>
-          <a:prstGeom prst="ellipse">
-            <a:avLst/>
-          </a:prstGeom>
-          <a:solidFill>
-            <a:srgbClr val="1F6A68"/>
-          </a:solidFill>
-          <a:ln w="12700">
-            <a:solidFill>
-              <a:srgbClr val="1F6A68"/>
-            </a:solidFill>
-            <a:prstDash val="solid"/>
-          </a:ln>
-        </p:spPr>
-      </p:sp>
-      <p:sp>
-        <p:nvSpPr>
-          <p:cNvPr id="38" name="Text 36"/>
-          <p:cNvSpPr txBox="1"/>
-          <p:nvPr/>
-        </p:nvSpPr>
-        <p:spPr>
-          <a:xfrm>
-            <a:off x="8883396" y="4489704"/>
-            <a:ext cx="2208276" cy="365760"/>
-          </a:xfrm>
-          <a:prstGeom prst="rect">
-            <a:avLst/>
-          </a:prstGeom>
-          <a:noFill/>
-          <a:ln/>
-        </p:spPr>
-        <p:txBody>
-          <a:bodyPr wrap="square" lIns="0" tIns="0" rIns="0" bIns="0" rtlCol="0" anchor="ctr"/>
+          <p:cNvPr id="32" name="Text 30"/>
+          <p:cNvSpPr txBox="1"/>
+          <p:nvPr/>
+        </p:nvSpPr>
+        <p:spPr>
+          <a:xfrm>
+            <a:off x="7068312" y="6382512"/>
+            <a:ext cx="4572000" cy="274320"/>
+          </a:xfrm>
+          <a:prstGeom prst="rect">
+            <a:avLst/>
+          </a:prstGeom>
+          <a:noFill/>
+          <a:ln/>
+        </p:spPr>
+        <p:txBody>
+          <a:bodyPr wrap="square" lIns="0" tIns="0" rIns="0" bIns="0" rtlCol="0" anchor="t"/>
           <a:lstStyle/>
           <a:p>
             <a:pPr rtl="1" algn="r" indent="0" marL="0">
               <a:buNone/>
             </a:pPr>
             <a:r>
-              <a:rPr lang="ar-SA" altLang="en-US" sz="1300" b="1" dirty="0">
-                <a:solidFill>
-                  <a:srgbClr val="17504E"/>
-                </a:solidFill>
-                <a:latin typeface="Arial" pitchFamily="34" charset="0"/>
-                <a:ea typeface="Arial" pitchFamily="34" charset="-122"/>
-                <a:cs typeface="Arial" pitchFamily="34" charset="-120"/>
-              </a:rPr>
-              <a:t>الهيئة السعودية للملكية الفكرية</a:t>
-            </a:r>
-            <a:endParaRPr lang="ar-SA" sz="1300" dirty="0"/>
-          </a:p>
-        </p:txBody>
-      </p:sp>
-      <p:sp>
-        <p:nvSpPr>
-          <p:cNvPr id="39" name="Text 37"/>
-          <p:cNvSpPr txBox="1"/>
-          <p:nvPr/>
-        </p:nvSpPr>
-        <p:spPr>
-          <a:xfrm>
-            <a:off x="6460236" y="4489704"/>
-            <a:ext cx="2468880" cy="365760"/>
-          </a:xfrm>
-          <a:prstGeom prst="rect">
-            <a:avLst/>
-          </a:prstGeom>
-          <a:noFill/>
-          <a:ln/>
-        </p:spPr>
-        <p:txBody>
-          <a:bodyPr wrap="square" lIns="0" tIns="0" rIns="0" bIns="0" rtlCol="0" anchor="ctr"/>
-          <a:lstStyle/>
-          <a:p>
-            <a:pPr rtl="1" algn="l" indent="0" marL="0">
-              <a:buNone/>
-            </a:pPr>
-            <a:r>
               <a:rPr lang="ar-SA" altLang="en-US" sz="1000" dirty="0">
                 <a:solidFill>
                   <a:srgbClr val="6B7F7E"/>
@@ -7655,770 +7658,7 @@
                 <a:ea typeface="Arial" pitchFamily="34" charset="-122"/>
                 <a:cs typeface="Arial" pitchFamily="34" charset="-120"/>
               </a:rPr>
-              <a:t>العلامات التجارية</a:t>
-            </a:r>
-            <a:endParaRPr lang="ar-SA" sz="1000" dirty="0"/>
-          </a:p>
-        </p:txBody>
-      </p:sp>
-      <p:sp>
-        <p:nvSpPr>
-          <p:cNvPr id="40" name="Shape 38"/>
-          <p:cNvSpPr/>
-          <p:nvPr/>
-        </p:nvSpPr>
-        <p:spPr>
-          <a:xfrm>
-            <a:off x="548640" y="4379976"/>
-            <a:ext cx="5408676" cy="566928"/>
-          </a:xfrm>
-          <a:prstGeom prst="roundRect">
-            <a:avLst>
-              <a:gd name="adj" fmla="val 29032"/>
-            </a:avLst>
-          </a:prstGeom>
-          <a:solidFill>
-            <a:srgbClr val="FFFFFF"/>
-          </a:solidFill>
-          <a:ln w="9525">
-            <a:solidFill>
-              <a:srgbClr val="DDE7E7"/>
-            </a:solidFill>
-            <a:prstDash val="solid"/>
-          </a:ln>
-          <a:effectLst>
-            <a:outerShdw sx="100000" sy="100000" kx="0" ky="0" algn="bl" rotWithShape="0" blurRad="76200" dist="25400" dir="5400000">
-              <a:srgbClr val="17504E">
-                <a:alpha val="8000"/>
-              </a:srgbClr>
-            </a:outerShdw>
-          </a:effectLst>
-        </p:spPr>
-      </p:sp>
-      <p:sp>
-        <p:nvSpPr>
-          <p:cNvPr id="41" name="Shape 39"/>
-          <p:cNvSpPr/>
-          <p:nvPr/>
-        </p:nvSpPr>
-        <p:spPr>
-          <a:xfrm>
-            <a:off x="5500116" y="4553712"/>
-            <a:ext cx="219456" cy="219456"/>
-          </a:xfrm>
-          <a:prstGeom prst="ellipse">
-            <a:avLst/>
-          </a:prstGeom>
-          <a:solidFill>
-            <a:srgbClr val="1F6A68"/>
-          </a:solidFill>
-          <a:ln w="12700">
-            <a:solidFill>
-              <a:srgbClr val="1F6A68"/>
-            </a:solidFill>
-            <a:prstDash val="solid"/>
-          </a:ln>
-        </p:spPr>
-      </p:sp>
-      <p:sp>
-        <p:nvSpPr>
-          <p:cNvPr id="42" name="Text 40"/>
-          <p:cNvSpPr txBox="1"/>
-          <p:nvPr/>
-        </p:nvSpPr>
-        <p:spPr>
-          <a:xfrm>
-            <a:off x="3200400" y="4489704"/>
-            <a:ext cx="2208276" cy="365760"/>
-          </a:xfrm>
-          <a:prstGeom prst="rect">
-            <a:avLst/>
-          </a:prstGeom>
-          <a:noFill/>
-          <a:ln/>
-        </p:spPr>
-        <p:txBody>
-          <a:bodyPr wrap="square" lIns="0" tIns="0" rIns="0" bIns="0" rtlCol="0" anchor="ctr"/>
-          <a:lstStyle/>
-          <a:p>
-            <a:pPr rtl="1" algn="r" indent="0" marL="0">
-              <a:buNone/>
-            </a:pPr>
-            <a:r>
-              <a:rPr lang="ar-SA" altLang="en-US" sz="1300" b="1" dirty="0">
-                <a:solidFill>
-                  <a:srgbClr val="17504E"/>
-                </a:solidFill>
-                <a:latin typeface="Arial" pitchFamily="34" charset="0"/>
-                <a:ea typeface="Arial" pitchFamily="34" charset="-122"/>
-                <a:cs typeface="Arial" pitchFamily="34" charset="-120"/>
-              </a:rPr>
-              <a:t>منصة العمل الحر · منشآت</a:t>
-            </a:r>
-            <a:endParaRPr lang="ar-SA" sz="1300" dirty="0"/>
-          </a:p>
-        </p:txBody>
-      </p:sp>
-      <p:sp>
-        <p:nvSpPr>
-          <p:cNvPr id="43" name="Text 41"/>
-          <p:cNvSpPr txBox="1"/>
-          <p:nvPr/>
-        </p:nvSpPr>
-        <p:spPr>
-          <a:xfrm>
-            <a:off x="777240" y="4489704"/>
-            <a:ext cx="2468880" cy="365760"/>
-          </a:xfrm>
-          <a:prstGeom prst="rect">
-            <a:avLst/>
-          </a:prstGeom>
-          <a:noFill/>
-          <a:ln/>
-        </p:spPr>
-        <p:txBody>
-          <a:bodyPr wrap="square" lIns="0" tIns="0" rIns="0" bIns="0" rtlCol="0" anchor="ctr"/>
-          <a:lstStyle/>
-          <a:p>
-            <a:pPr rtl="1" algn="l" indent="0" marL="0">
-              <a:buNone/>
-            </a:pPr>
-            <a:r>
-              <a:rPr lang="ar-SA" altLang="en-US" sz="1000" dirty="0">
-                <a:solidFill>
-                  <a:srgbClr val="6B7F7E"/>
-                </a:solidFill>
-                <a:latin typeface="Arial" pitchFamily="34" charset="0"/>
-                <a:ea typeface="Arial" pitchFamily="34" charset="-122"/>
-                <a:cs typeface="Arial" pitchFamily="34" charset="-120"/>
-              </a:rPr>
-              <a:t>وثيقة العمل الحر ودعم المنشآت</a:t>
-            </a:r>
-            <a:endParaRPr lang="ar-SA" sz="1000" dirty="0"/>
-          </a:p>
-        </p:txBody>
-      </p:sp>
-      <p:sp>
-        <p:nvSpPr>
-          <p:cNvPr id="44" name="Shape 42"/>
-          <p:cNvSpPr/>
-          <p:nvPr/>
-        </p:nvSpPr>
-        <p:spPr>
-          <a:xfrm>
-            <a:off x="6231636" y="5074920"/>
-            <a:ext cx="5408676" cy="566928"/>
-          </a:xfrm>
-          <a:prstGeom prst="roundRect">
-            <a:avLst>
-              <a:gd name="adj" fmla="val 29032"/>
-            </a:avLst>
-          </a:prstGeom>
-          <a:solidFill>
-            <a:srgbClr val="FFFFFF"/>
-          </a:solidFill>
-          <a:ln w="9525">
-            <a:solidFill>
-              <a:srgbClr val="DDE7E7"/>
-            </a:solidFill>
-            <a:prstDash val="solid"/>
-          </a:ln>
-          <a:effectLst>
-            <a:outerShdw sx="100000" sy="100000" kx="0" ky="0" algn="bl" rotWithShape="0" blurRad="76200" dist="25400" dir="5400000">
-              <a:srgbClr val="17504E">
-                <a:alpha val="8000"/>
-              </a:srgbClr>
-            </a:outerShdw>
-          </a:effectLst>
-        </p:spPr>
-      </p:sp>
-      <p:sp>
-        <p:nvSpPr>
-          <p:cNvPr id="45" name="Shape 43"/>
-          <p:cNvSpPr/>
-          <p:nvPr/>
-        </p:nvSpPr>
-        <p:spPr>
-          <a:xfrm>
-            <a:off x="11183112" y="5248656"/>
-            <a:ext cx="219456" cy="219456"/>
-          </a:xfrm>
-          <a:prstGeom prst="ellipse">
-            <a:avLst/>
-          </a:prstGeom>
-          <a:solidFill>
-            <a:srgbClr val="1F6A68"/>
-          </a:solidFill>
-          <a:ln w="12700">
-            <a:solidFill>
-              <a:srgbClr val="1F6A68"/>
-            </a:solidFill>
-            <a:prstDash val="solid"/>
-          </a:ln>
-        </p:spPr>
-      </p:sp>
-      <p:sp>
-        <p:nvSpPr>
-          <p:cNvPr id="46" name="Text 44"/>
-          <p:cNvSpPr txBox="1"/>
-          <p:nvPr/>
-        </p:nvSpPr>
-        <p:spPr>
-          <a:xfrm>
-            <a:off x="8883396" y="5184648"/>
-            <a:ext cx="2208276" cy="365760"/>
-          </a:xfrm>
-          <a:prstGeom prst="rect">
-            <a:avLst/>
-          </a:prstGeom>
-          <a:noFill/>
-          <a:ln/>
-        </p:spPr>
-        <p:txBody>
-          <a:bodyPr wrap="square" lIns="0" tIns="0" rIns="0" bIns="0" rtlCol="0" anchor="ctr"/>
-          <a:lstStyle/>
-          <a:p>
-            <a:pPr rtl="1" algn="r" indent="0" marL="0">
-              <a:buNone/>
-            </a:pPr>
-            <a:r>
-              <a:rPr lang="ar-SA" altLang="en-US" sz="1300" b="1" dirty="0">
-                <a:solidFill>
-                  <a:srgbClr val="17504E"/>
-                </a:solidFill>
-                <a:latin typeface="Arial" pitchFamily="34" charset="0"/>
-                <a:ea typeface="Arial" pitchFamily="34" charset="-122"/>
-                <a:cs typeface="Arial" pitchFamily="34" charset="-120"/>
-              </a:rPr>
-              <a:t>وزارة الخارجية</a:t>
-            </a:r>
-            <a:endParaRPr lang="ar-SA" sz="1300" dirty="0"/>
-          </a:p>
-        </p:txBody>
-      </p:sp>
-      <p:sp>
-        <p:nvSpPr>
-          <p:cNvPr id="47" name="Text 45"/>
-          <p:cNvSpPr txBox="1"/>
-          <p:nvPr/>
-        </p:nvSpPr>
-        <p:spPr>
-          <a:xfrm>
-            <a:off x="6460236" y="5184648"/>
-            <a:ext cx="2468880" cy="365760"/>
-          </a:xfrm>
-          <a:prstGeom prst="rect">
-            <a:avLst/>
-          </a:prstGeom>
-          <a:noFill/>
-          <a:ln/>
-        </p:spPr>
-        <p:txBody>
-          <a:bodyPr wrap="square" lIns="0" tIns="0" rIns="0" bIns="0" rtlCol="0" anchor="ctr"/>
-          <a:lstStyle/>
-          <a:p>
-            <a:pPr rtl="1" algn="l" indent="0" marL="0">
-              <a:buNone/>
-            </a:pPr>
-            <a:r>
-              <a:rPr lang="ar-SA" altLang="en-US" sz="1000" dirty="0">
-                <a:solidFill>
-                  <a:srgbClr val="6B7F7E"/>
-                </a:solidFill>
-                <a:latin typeface="Arial" pitchFamily="34" charset="0"/>
-                <a:ea typeface="Arial" pitchFamily="34" charset="-122"/>
-                <a:cs typeface="Arial" pitchFamily="34" charset="-120"/>
-              </a:rPr>
-              <a:t>منصة التأشيرات</a:t>
-            </a:r>
-            <a:endParaRPr lang="ar-SA" sz="1000" dirty="0"/>
-          </a:p>
-        </p:txBody>
-      </p:sp>
-      <p:sp>
-        <p:nvSpPr>
-          <p:cNvPr id="48" name="Shape 46"/>
-          <p:cNvSpPr/>
-          <p:nvPr/>
-        </p:nvSpPr>
-        <p:spPr>
-          <a:xfrm>
-            <a:off x="548640" y="5074920"/>
-            <a:ext cx="5408676" cy="566928"/>
-          </a:xfrm>
-          <a:prstGeom prst="roundRect">
-            <a:avLst>
-              <a:gd name="adj" fmla="val 29032"/>
-            </a:avLst>
-          </a:prstGeom>
-          <a:solidFill>
-            <a:srgbClr val="FFFFFF"/>
-          </a:solidFill>
-          <a:ln w="9525">
-            <a:solidFill>
-              <a:srgbClr val="DDE7E7"/>
-            </a:solidFill>
-            <a:prstDash val="solid"/>
-          </a:ln>
-          <a:effectLst>
-            <a:outerShdw sx="100000" sy="100000" kx="0" ky="0" algn="bl" rotWithShape="0" blurRad="76200" dist="25400" dir="5400000">
-              <a:srgbClr val="17504E">
-                <a:alpha val="8000"/>
-              </a:srgbClr>
-            </a:outerShdw>
-          </a:effectLst>
-        </p:spPr>
-      </p:sp>
-      <p:sp>
-        <p:nvSpPr>
-          <p:cNvPr id="49" name="Shape 47"/>
-          <p:cNvSpPr/>
-          <p:nvPr/>
-        </p:nvSpPr>
-        <p:spPr>
-          <a:xfrm>
-            <a:off x="5500116" y="5248656"/>
-            <a:ext cx="219456" cy="219456"/>
-          </a:xfrm>
-          <a:prstGeom prst="ellipse">
-            <a:avLst/>
-          </a:prstGeom>
-          <a:solidFill>
-            <a:srgbClr val="1F6A68"/>
-          </a:solidFill>
-          <a:ln w="12700">
-            <a:solidFill>
-              <a:srgbClr val="1F6A68"/>
-            </a:solidFill>
-            <a:prstDash val="solid"/>
-          </a:ln>
-        </p:spPr>
-      </p:sp>
-      <p:sp>
-        <p:nvSpPr>
-          <p:cNvPr id="50" name="Text 48"/>
-          <p:cNvSpPr txBox="1"/>
-          <p:nvPr/>
-        </p:nvSpPr>
-        <p:spPr>
-          <a:xfrm>
-            <a:off x="3200400" y="5184648"/>
-            <a:ext cx="2208276" cy="365760"/>
-          </a:xfrm>
-          <a:prstGeom prst="rect">
-            <a:avLst/>
-          </a:prstGeom>
-          <a:noFill/>
-          <a:ln/>
-        </p:spPr>
-        <p:txBody>
-          <a:bodyPr wrap="square" lIns="0" tIns="0" rIns="0" bIns="0" rtlCol="0" anchor="ctr"/>
-          <a:lstStyle/>
-          <a:p>
-            <a:pPr rtl="1" algn="r" indent="0" marL="0">
-              <a:buNone/>
-            </a:pPr>
-            <a:r>
-              <a:rPr lang="ar-SA" altLang="en-US" sz="1300" b="1" dirty="0">
-                <a:solidFill>
-                  <a:srgbClr val="17504E"/>
-                </a:solidFill>
-                <a:latin typeface="Arial" pitchFamily="34" charset="0"/>
-                <a:ea typeface="Arial" pitchFamily="34" charset="-122"/>
-                <a:cs typeface="Arial" pitchFamily="34" charset="-120"/>
-              </a:rPr>
-              <a:t>سبل</a:t>
-            </a:r>
-            <a:endParaRPr lang="ar-SA" sz="1300" dirty="0"/>
-          </a:p>
-        </p:txBody>
-      </p:sp>
-      <p:sp>
-        <p:nvSpPr>
-          <p:cNvPr id="51" name="Text 49"/>
-          <p:cNvSpPr txBox="1"/>
-          <p:nvPr/>
-        </p:nvSpPr>
-        <p:spPr>
-          <a:xfrm>
-            <a:off x="777240" y="5184648"/>
-            <a:ext cx="2468880" cy="365760"/>
-          </a:xfrm>
-          <a:prstGeom prst="rect">
-            <a:avLst/>
-          </a:prstGeom>
-          <a:noFill/>
-          <a:ln/>
-        </p:spPr>
-        <p:txBody>
-          <a:bodyPr wrap="square" lIns="0" tIns="0" rIns="0" bIns="0" rtlCol="0" anchor="ctr"/>
-          <a:lstStyle/>
-          <a:p>
-            <a:pPr rtl="1" algn="l" indent="0" marL="0">
-              <a:buNone/>
-            </a:pPr>
-            <a:r>
-              <a:rPr lang="ar-SA" altLang="en-US" sz="1000" dirty="0">
-                <a:solidFill>
-                  <a:srgbClr val="6B7F7E"/>
-                </a:solidFill>
-                <a:latin typeface="Arial" pitchFamily="34" charset="0"/>
-                <a:ea typeface="Arial" pitchFamily="34" charset="-122"/>
-                <a:cs typeface="Arial" pitchFamily="34" charset="-120"/>
-              </a:rPr>
-              <a:t>العنوان الوطني</a:t>
-            </a:r>
-            <a:endParaRPr lang="ar-SA" sz="1000" dirty="0"/>
-          </a:p>
-        </p:txBody>
-      </p:sp>
-      <p:sp>
-        <p:nvSpPr>
-          <p:cNvPr id="52" name="Shape 50"/>
-          <p:cNvSpPr/>
-          <p:nvPr/>
-        </p:nvSpPr>
-        <p:spPr>
-          <a:xfrm>
-            <a:off x="6231636" y="5769864"/>
-            <a:ext cx="5408676" cy="566928"/>
-          </a:xfrm>
-          <a:prstGeom prst="roundRect">
-            <a:avLst>
-              <a:gd name="adj" fmla="val 29032"/>
-            </a:avLst>
-          </a:prstGeom>
-          <a:solidFill>
-            <a:srgbClr val="FFFFFF"/>
-          </a:solidFill>
-          <a:ln w="9525">
-            <a:solidFill>
-              <a:srgbClr val="DDE7E7"/>
-            </a:solidFill>
-            <a:prstDash val="solid"/>
-          </a:ln>
-          <a:effectLst>
-            <a:outerShdw sx="100000" sy="100000" kx="0" ky="0" algn="bl" rotWithShape="0" blurRad="76200" dist="25400" dir="5400000">
-              <a:srgbClr val="17504E">
-                <a:alpha val="8000"/>
-              </a:srgbClr>
-            </a:outerShdw>
-          </a:effectLst>
-        </p:spPr>
-      </p:sp>
-      <p:sp>
-        <p:nvSpPr>
-          <p:cNvPr id="53" name="Shape 51"/>
-          <p:cNvSpPr/>
-          <p:nvPr/>
-        </p:nvSpPr>
-        <p:spPr>
-          <a:xfrm>
-            <a:off x="11183112" y="5943600"/>
-            <a:ext cx="219456" cy="219456"/>
-          </a:xfrm>
-          <a:prstGeom prst="ellipse">
-            <a:avLst/>
-          </a:prstGeom>
-          <a:solidFill>
-            <a:srgbClr val="1F6A68"/>
-          </a:solidFill>
-          <a:ln w="12700">
-            <a:solidFill>
-              <a:srgbClr val="1F6A68"/>
-            </a:solidFill>
-            <a:prstDash val="solid"/>
-          </a:ln>
-        </p:spPr>
-      </p:sp>
-      <p:sp>
-        <p:nvSpPr>
-          <p:cNvPr id="54" name="Text 52"/>
-          <p:cNvSpPr txBox="1"/>
-          <p:nvPr/>
-        </p:nvSpPr>
-        <p:spPr>
-          <a:xfrm>
-            <a:off x="8883396" y="5879592"/>
-            <a:ext cx="2208276" cy="365760"/>
-          </a:xfrm>
-          <a:prstGeom prst="rect">
-            <a:avLst/>
-          </a:prstGeom>
-          <a:noFill/>
-          <a:ln/>
-        </p:spPr>
-        <p:txBody>
-          <a:bodyPr wrap="square" lIns="0" tIns="0" rIns="0" bIns="0" rtlCol="0" anchor="ctr"/>
-          <a:lstStyle/>
-          <a:p>
-            <a:pPr rtl="1" algn="r" indent="0" marL="0">
-              <a:buNone/>
-            </a:pPr>
-            <a:r>
-              <a:rPr lang="ar-SA" altLang="en-US" sz="1300" b="1" dirty="0">
-                <a:solidFill>
-                  <a:srgbClr val="17504E"/>
-                </a:solidFill>
-                <a:latin typeface="Arial" pitchFamily="34" charset="0"/>
-                <a:ea typeface="Arial" pitchFamily="34" charset="-122"/>
-                <a:cs typeface="Arial" pitchFamily="34" charset="-120"/>
-              </a:rPr>
-              <a:t>صحتي</a:t>
-            </a:r>
-            <a:endParaRPr lang="ar-SA" sz="1300" dirty="0"/>
-          </a:p>
-        </p:txBody>
-      </p:sp>
-      <p:sp>
-        <p:nvSpPr>
-          <p:cNvPr id="55" name="Text 53"/>
-          <p:cNvSpPr txBox="1"/>
-          <p:nvPr/>
-        </p:nvSpPr>
-        <p:spPr>
-          <a:xfrm>
-            <a:off x="6460236" y="5879592"/>
-            <a:ext cx="2468880" cy="365760"/>
-          </a:xfrm>
-          <a:prstGeom prst="rect">
-            <a:avLst/>
-          </a:prstGeom>
-          <a:noFill/>
-          <a:ln/>
-        </p:spPr>
-        <p:txBody>
-          <a:bodyPr wrap="square" lIns="0" tIns="0" rIns="0" bIns="0" rtlCol="0" anchor="ctr"/>
-          <a:lstStyle/>
-          <a:p>
-            <a:pPr rtl="1" algn="l" indent="0" marL="0">
-              <a:buNone/>
-            </a:pPr>
-            <a:r>
-              <a:rPr lang="ar-SA" altLang="en-US" sz="1000" dirty="0">
-                <a:solidFill>
-                  <a:srgbClr val="6B7F7E"/>
-                </a:solidFill>
-                <a:latin typeface="Arial" pitchFamily="34" charset="0"/>
-                <a:ea typeface="Arial" pitchFamily="34" charset="-122"/>
-                <a:cs typeface="Arial" pitchFamily="34" charset="-120"/>
-              </a:rPr>
-              <a:t>المواعيد الطبية</a:t>
-            </a:r>
-            <a:endParaRPr lang="ar-SA" sz="1000" dirty="0"/>
-          </a:p>
-        </p:txBody>
-      </p:sp>
-      <p:sp>
-        <p:nvSpPr>
-          <p:cNvPr id="56" name="Shape 54"/>
-          <p:cNvSpPr/>
-          <p:nvPr/>
-        </p:nvSpPr>
-        <p:spPr>
-          <a:xfrm>
-            <a:off x="548640" y="5769864"/>
-            <a:ext cx="5408676" cy="566928"/>
-          </a:xfrm>
-          <a:prstGeom prst="roundRect">
-            <a:avLst>
-              <a:gd name="adj" fmla="val 29032"/>
-            </a:avLst>
-          </a:prstGeom>
-          <a:solidFill>
-            <a:srgbClr val="FFFFFF"/>
-          </a:solidFill>
-          <a:ln w="9525">
-            <a:solidFill>
-              <a:srgbClr val="DDE7E7"/>
-            </a:solidFill>
-            <a:prstDash val="solid"/>
-          </a:ln>
-          <a:effectLst>
-            <a:outerShdw sx="100000" sy="100000" kx="0" ky="0" algn="bl" rotWithShape="0" blurRad="76200" dist="25400" dir="5400000">
-              <a:srgbClr val="17504E">
-                <a:alpha val="8000"/>
-              </a:srgbClr>
-            </a:outerShdw>
-          </a:effectLst>
-        </p:spPr>
-      </p:sp>
-      <p:sp>
-        <p:nvSpPr>
-          <p:cNvPr id="57" name="Shape 55"/>
-          <p:cNvSpPr/>
-          <p:nvPr/>
-        </p:nvSpPr>
-        <p:spPr>
-          <a:xfrm>
-            <a:off x="5500116" y="5943600"/>
-            <a:ext cx="219456" cy="219456"/>
-          </a:xfrm>
-          <a:prstGeom prst="ellipse">
-            <a:avLst/>
-          </a:prstGeom>
-          <a:solidFill>
-            <a:srgbClr val="1F6A68"/>
-          </a:solidFill>
-          <a:ln w="12700">
-            <a:solidFill>
-              <a:srgbClr val="1F6A68"/>
-            </a:solidFill>
-            <a:prstDash val="solid"/>
-          </a:ln>
-        </p:spPr>
-      </p:sp>
-      <p:sp>
-        <p:nvSpPr>
-          <p:cNvPr id="58" name="Text 56"/>
-          <p:cNvSpPr txBox="1"/>
-          <p:nvPr/>
-        </p:nvSpPr>
-        <p:spPr>
-          <a:xfrm>
-            <a:off x="3200400" y="5879592"/>
-            <a:ext cx="2208276" cy="365760"/>
-          </a:xfrm>
-          <a:prstGeom prst="rect">
-            <a:avLst/>
-          </a:prstGeom>
-          <a:noFill/>
-          <a:ln/>
-        </p:spPr>
-        <p:txBody>
-          <a:bodyPr wrap="square" lIns="0" tIns="0" rIns="0" bIns="0" rtlCol="0" anchor="ctr"/>
-          <a:lstStyle/>
-          <a:p>
-            <a:pPr rtl="1" algn="r" indent="0" marL="0">
-              <a:buNone/>
-            </a:pPr>
-            <a:r>
-              <a:rPr lang="ar-SA" altLang="en-US" sz="1300" b="1" dirty="0">
-                <a:solidFill>
-                  <a:srgbClr val="17504E"/>
-                </a:solidFill>
-                <a:latin typeface="Arial" pitchFamily="34" charset="0"/>
-                <a:ea typeface="Arial" pitchFamily="34" charset="-122"/>
-                <a:cs typeface="Arial" pitchFamily="34" charset="-120"/>
-              </a:rPr>
-              <a:t>وزارة الموارد البشرية</a:t>
-            </a:r>
-            <a:endParaRPr lang="ar-SA" sz="1300" dirty="0"/>
-          </a:p>
-        </p:txBody>
-      </p:sp>
-      <p:sp>
-        <p:nvSpPr>
-          <p:cNvPr id="59" name="Text 57"/>
-          <p:cNvSpPr txBox="1"/>
-          <p:nvPr/>
-        </p:nvSpPr>
-        <p:spPr>
-          <a:xfrm>
-            <a:off x="777240" y="5879592"/>
-            <a:ext cx="2468880" cy="365760"/>
-          </a:xfrm>
-          <a:prstGeom prst="rect">
-            <a:avLst/>
-          </a:prstGeom>
-          <a:noFill/>
-          <a:ln/>
-        </p:spPr>
-        <p:txBody>
-          <a:bodyPr wrap="square" lIns="0" tIns="0" rIns="0" bIns="0" rtlCol="0" anchor="ctr"/>
-          <a:lstStyle/>
-          <a:p>
-            <a:pPr rtl="1" algn="l" indent="0" marL="0">
-              <a:buNone/>
-            </a:pPr>
-            <a:r>
-              <a:rPr lang="ar-SA" altLang="en-US" sz="1000" dirty="0">
-                <a:solidFill>
-                  <a:srgbClr val="6B7F7E"/>
-                </a:solidFill>
-                <a:latin typeface="Arial" pitchFamily="34" charset="0"/>
-                <a:ea typeface="Arial" pitchFamily="34" charset="-122"/>
-                <a:cs typeface="Arial" pitchFamily="34" charset="-120"/>
-              </a:rPr>
-              <a:t>الضمان الاجتماعي · ذوي الإعاقة</a:t>
-            </a:r>
-            <a:endParaRPr lang="ar-SA" sz="1000" dirty="0"/>
-          </a:p>
-        </p:txBody>
-      </p:sp>
-      <p:sp>
-        <p:nvSpPr>
-          <p:cNvPr id="60" name="Text 58"/>
-          <p:cNvSpPr txBox="1"/>
-          <p:nvPr/>
-        </p:nvSpPr>
-        <p:spPr>
-          <a:xfrm>
-            <a:off x="548640" y="6355080"/>
-            <a:ext cx="3657600" cy="274320"/>
-          </a:xfrm>
-          <a:prstGeom prst="rect">
-            <a:avLst/>
-          </a:prstGeom>
-          <a:noFill/>
-          <a:ln/>
-        </p:spPr>
-        <p:txBody>
-          <a:bodyPr wrap="square" lIns="0" tIns="0" rIns="0" bIns="0" rtlCol="0" anchor="t"/>
-          <a:lstStyle/>
-          <a:p>
-            <a:pPr rtl="1" algn="l" indent="0" marL="0">
-              <a:buNone/>
-            </a:pPr>
-            <a:r>
-              <a:rPr lang="ar-SA" altLang="en-US" sz="1000" dirty="0">
-                <a:solidFill>
-                  <a:srgbClr val="6B7F7E"/>
-                </a:solidFill>
-                <a:latin typeface="Arial" pitchFamily="34" charset="0"/>
-                <a:ea typeface="Arial" pitchFamily="34" charset="-122"/>
-                <a:cs typeface="Arial" pitchFamily="34" charset="-120"/>
-              </a:rPr>
-              <a:t>shamal-ai.vercel.app</a:t>
-            </a:r>
-            <a:endParaRPr lang="ar-SA" sz="1000" dirty="0"/>
-          </a:p>
-        </p:txBody>
-      </p:sp>
-      <p:sp>
-        <p:nvSpPr>
-          <p:cNvPr id="61" name="Text 59"/>
-          <p:cNvSpPr txBox="1"/>
-          <p:nvPr/>
-        </p:nvSpPr>
-        <p:spPr>
-          <a:xfrm>
-            <a:off x="7068312" y="6355080"/>
-            <a:ext cx="4572000" cy="274320"/>
-          </a:xfrm>
-          <a:prstGeom prst="rect">
-            <a:avLst/>
-          </a:prstGeom>
-          <a:noFill/>
-          <a:ln/>
-        </p:spPr>
-        <p:txBody>
-          <a:bodyPr wrap="square" lIns="0" tIns="0" rIns="0" bIns="0" rtlCol="0" anchor="t"/>
-          <a:lstStyle/>
-          <a:p>
-            <a:pPr rtl="1" algn="r" indent="0" marL="0">
-              <a:buNone/>
-            </a:pPr>
-            <a:r>
-              <a:rPr lang="ar-SA" altLang="en-US" sz="1000" dirty="0">
-                <a:solidFill>
-                  <a:srgbClr val="6B7F7E"/>
-                </a:solidFill>
-                <a:latin typeface="Arial" pitchFamily="34" charset="0"/>
-                <a:ea typeface="Arial" pitchFamily="34" charset="-122"/>
-                <a:cs typeface="Arial" pitchFamily="34" charset="-120"/>
-              </a:rPr>
-              <a:t>شمال AI · ENBTHON 2026 · 7</a:t>
+              <a:t>شمال AI · التقنية · 7</a:t>
             </a:r>
             <a:endParaRPr lang="ar-SA" sz="1000" dirty="0"/>
           </a:p>
@@ -8489,7 +7729,7 @@
                 <a:ea typeface="Arial" pitchFamily="34" charset="-122"/>
                 <a:cs typeface="Arial" pitchFamily="34" charset="-120"/>
               </a:rPr>
-              <a:t>موارد التصميم والأدوات</a:t>
+              <a:t>الأدوات والجودة</a:t>
             </a:r>
             <a:endParaRPr lang="ar-SA" sz="3000" dirty="0"/>
           </a:p>
@@ -8528,7 +7768,7 @@
                 <a:ea typeface="Arial" pitchFamily="34" charset="-122"/>
                 <a:cs typeface="Arial" pitchFamily="34" charset="-120"/>
               </a:rPr>
-              <a:t>ما استخدمناه لبناء الشكل والجودة</a:t>
+              <a:t>ما استخدمناه حول الكود نفسه</a:t>
             </a:r>
             <a:endParaRPr lang="ar-SA" sz="1400" dirty="0"/>
           </a:p>
@@ -8543,11 +7783,11 @@
         <p:spPr>
           <a:xfrm>
             <a:off x="8125968" y="1645920"/>
-            <a:ext cx="3514344" cy="1920240"/>
+            <a:ext cx="3514344" cy="1965960"/>
           </a:xfrm>
           <a:prstGeom prst="roundRect">
             <a:avLst>
-              <a:gd name="adj" fmla="val 8571"/>
+              <a:gd name="adj" fmla="val 8372"/>
             </a:avLst>
           </a:prstGeom>
           <a:solidFill>
@@ -8576,20 +7816,20 @@
         </p:nvSpPr>
         <p:spPr>
           <a:xfrm>
-            <a:off x="10680192" y="1874520"/>
-            <a:ext cx="731520" cy="731520"/>
+            <a:off x="10607040" y="1901952"/>
+            <a:ext cx="777240" cy="777240"/>
           </a:xfrm>
           <a:prstGeom prst="roundRect">
             <a:avLst>
-              <a:gd name="adj" fmla="val 20000"/>
+              <a:gd name="adj" fmla="val 18824"/>
             </a:avLst>
           </a:prstGeom>
           <a:solidFill>
-            <a:srgbClr val="E4F0EA"/>
+            <a:srgbClr val="E3F0EF"/>
           </a:solidFill>
           <a:ln w="12700">
             <a:solidFill>
-              <a:srgbClr val="E4F0EA"/>
+              <a:srgbClr val="E3F0EF"/>
             </a:solidFill>
             <a:prstDash val="solid"/>
           </a:ln>
@@ -8603,8 +7843,8 @@
         </p:nvSpPr>
         <p:spPr>
           <a:xfrm>
-            <a:off x="8354568" y="2697480"/>
-            <a:ext cx="3057144" cy="365760"/>
+            <a:off x="8382000" y="2788920"/>
+            <a:ext cx="3002280" cy="384048"/>
           </a:xfrm>
           <a:prstGeom prst="rect">
             <a:avLst/>
@@ -8628,7 +7868,7 @@
                 <a:ea typeface="Arial" pitchFamily="34" charset="-122"/>
                 <a:cs typeface="Arial" pitchFamily="34" charset="-120"/>
               </a:rPr>
-              <a:t>Pexels</a:t>
+              <a:t>Git · GitHub</a:t>
             </a:r>
             <a:endParaRPr lang="ar-SA" sz="1600" dirty="0"/>
           </a:p>
@@ -8642,8 +7882,8 @@
         </p:nvSpPr>
         <p:spPr>
           <a:xfrm>
-            <a:off x="8354568" y="3063240"/>
-            <a:ext cx="3057144" cy="457200"/>
+            <a:off x="8382000" y="3182112"/>
+            <a:ext cx="3002280" cy="384048"/>
           </a:xfrm>
           <a:prstGeom prst="rect">
             <a:avLst/>
@@ -8667,7 +7907,7 @@
                 <a:ea typeface="Arial" pitchFamily="34" charset="-122"/>
                 <a:cs typeface="Arial" pitchFamily="34" charset="-120"/>
               </a:rPr>
-              <a:t>صور مجانية لجبال طويق والصحراء السعودية (رخصة استخدام حر)</a:t>
+              <a:t>تتبع كل تعديل، والنشر من سطر أوامر واحد</a:t>
             </a:r>
             <a:endParaRPr lang="ar-SA" sz="1100" dirty="0"/>
           </a:p>
@@ -8682,11 +7922,11 @@
         <p:spPr>
           <a:xfrm>
             <a:off x="4337304" y="1645920"/>
-            <a:ext cx="3514344" cy="1920240"/>
+            <a:ext cx="3514344" cy="1965960"/>
           </a:xfrm>
           <a:prstGeom prst="roundRect">
             <a:avLst>
-              <a:gd name="adj" fmla="val 8571"/>
+              <a:gd name="adj" fmla="val 8372"/>
             </a:avLst>
           </a:prstGeom>
           <a:solidFill>
@@ -8715,20 +7955,20 @@
         </p:nvSpPr>
         <p:spPr>
           <a:xfrm>
-            <a:off x="6891528" y="1874520"/>
-            <a:ext cx="731520" cy="731520"/>
+            <a:off x="6818376" y="1901952"/>
+            <a:ext cx="777240" cy="777240"/>
           </a:xfrm>
           <a:prstGeom prst="roundRect">
             <a:avLst>
-              <a:gd name="adj" fmla="val 20000"/>
+              <a:gd name="adj" fmla="val 18824"/>
             </a:avLst>
           </a:prstGeom>
           <a:solidFill>
-            <a:srgbClr val="E4EDF5"/>
+            <a:srgbClr val="E4F0EA"/>
           </a:solidFill>
           <a:ln w="12700">
             <a:solidFill>
-              <a:srgbClr val="E4EDF5"/>
+              <a:srgbClr val="E4F0EA"/>
             </a:solidFill>
             <a:prstDash val="solid"/>
           </a:ln>
@@ -8742,8 +7982,8 @@
         </p:nvSpPr>
         <p:spPr>
           <a:xfrm>
-            <a:off x="4565904" y="2697480"/>
-            <a:ext cx="3057144" cy="365760"/>
+            <a:off x="4593336" y="2788920"/>
+            <a:ext cx="3002280" cy="384048"/>
           </a:xfrm>
           <a:prstGeom prst="rect">
             <a:avLst/>
@@ -8767,7 +8007,7 @@
                 <a:ea typeface="Arial" pitchFamily="34" charset="-122"/>
                 <a:cs typeface="Arial" pitchFamily="34" charset="-120"/>
               </a:rPr>
-              <a:t>Lucide</a:t>
+              <a:t>Pexels</a:t>
             </a:r>
             <a:endParaRPr lang="ar-SA" sz="1600" dirty="0"/>
           </a:p>
@@ -8781,8 +8021,8 @@
         </p:nvSpPr>
         <p:spPr>
           <a:xfrm>
-            <a:off x="4565904" y="3063240"/>
-            <a:ext cx="3057144" cy="457200"/>
+            <a:off x="4593336" y="3182112"/>
+            <a:ext cx="3002280" cy="384048"/>
           </a:xfrm>
           <a:prstGeom prst="rect">
             <a:avLst/>
@@ -8806,7 +8046,7 @@
                 <a:ea typeface="Arial" pitchFamily="34" charset="-122"/>
                 <a:cs typeface="Arial" pitchFamily="34" charset="-120"/>
               </a:rPr>
-              <a:t>مكتبة أيقونات مفتوحة المصدر لكل خدمة</a:t>
+              <a:t>صور الجبال الصحراوية برخصة استخدام حر</a:t>
             </a:r>
             <a:endParaRPr lang="ar-SA" sz="1100" dirty="0"/>
           </a:p>
@@ -8821,11 +8061,11 @@
         <p:spPr>
           <a:xfrm>
             <a:off x="548640" y="1645920"/>
-            <a:ext cx="3514344" cy="1920240"/>
+            <a:ext cx="3514344" cy="1965960"/>
           </a:xfrm>
           <a:prstGeom prst="roundRect">
             <a:avLst>
-              <a:gd name="adj" fmla="val 8571"/>
+              <a:gd name="adj" fmla="val 8372"/>
             </a:avLst>
           </a:prstGeom>
           <a:solidFill>
@@ -8854,20 +8094,20 @@
         </p:nvSpPr>
         <p:spPr>
           <a:xfrm>
-            <a:off x="3102864" y="1874520"/>
-            <a:ext cx="731520" cy="731520"/>
+            <a:off x="3029712" y="1901952"/>
+            <a:ext cx="777240" cy="777240"/>
           </a:xfrm>
           <a:prstGeom prst="roundRect">
             <a:avLst>
-              <a:gd name="adj" fmla="val 20000"/>
+              <a:gd name="adj" fmla="val 18824"/>
             </a:avLst>
           </a:prstGeom>
           <a:solidFill>
-            <a:srgbClr val="EBE7F4"/>
+            <a:srgbClr val="E4EDF5"/>
           </a:solidFill>
           <a:ln w="12700">
             <a:solidFill>
-              <a:srgbClr val="EBE7F4"/>
+              <a:srgbClr val="E4EDF5"/>
             </a:solidFill>
             <a:prstDash val="solid"/>
           </a:ln>
@@ -8881,8 +8121,8 @@
         </p:nvSpPr>
         <p:spPr>
           <a:xfrm>
-            <a:off x="777240" y="2697480"/>
-            <a:ext cx="3057144" cy="365760"/>
+            <a:off x="804672" y="2788920"/>
+            <a:ext cx="3002280" cy="384048"/>
           </a:xfrm>
           <a:prstGeom prst="rect">
             <a:avLst/>
@@ -8906,7 +8146,7 @@
                 <a:ea typeface="Arial" pitchFamily="34" charset="-122"/>
                 <a:cs typeface="Arial" pitchFamily="34" charset="-120"/>
               </a:rPr>
-              <a:t>IBM Plex Sans Arabic</a:t>
+              <a:t>Lucide</a:t>
             </a:r>
             <a:endParaRPr lang="ar-SA" sz="1600" dirty="0"/>
           </a:p>
@@ -8920,8 +8160,8 @@
         </p:nvSpPr>
         <p:spPr>
           <a:xfrm>
-            <a:off x="777240" y="3063240"/>
-            <a:ext cx="3057144" cy="457200"/>
+            <a:off x="804672" y="3182112"/>
+            <a:ext cx="3002280" cy="384048"/>
           </a:xfrm>
           <a:prstGeom prst="rect">
             <a:avLst/>
@@ -8945,7 +8185,7 @@
                 <a:ea typeface="Arial" pitchFamily="34" charset="-122"/>
                 <a:cs typeface="Arial" pitchFamily="34" charset="-120"/>
               </a:rPr>
-              <a:t>خط عربي من Google Fonts واضح على الجوال</a:t>
+              <a:t>أيقونة مميزة لكل خدمة من مكتبة مفتوحة المصدر</a:t>
             </a:r>
             <a:endParaRPr lang="ar-SA" sz="1100" dirty="0"/>
           </a:p>
@@ -8959,12 +8199,12 @@
         </p:nvSpPr>
         <p:spPr>
           <a:xfrm>
-            <a:off x="8125968" y="3840480"/>
-            <a:ext cx="3514344" cy="1920240"/>
+            <a:off x="8125968" y="3886200"/>
+            <a:ext cx="3514344" cy="1965960"/>
           </a:xfrm>
           <a:prstGeom prst="roundRect">
             <a:avLst>
-              <a:gd name="adj" fmla="val 8571"/>
+              <a:gd name="adj" fmla="val 8372"/>
             </a:avLst>
           </a:prstGeom>
           <a:solidFill>
@@ -8993,20 +8233,20 @@
         </p:nvSpPr>
         <p:spPr>
           <a:xfrm>
-            <a:off x="10680192" y="4069080"/>
-            <a:ext cx="731520" cy="731520"/>
+            <a:off x="10607040" y="4142232"/>
+            <a:ext cx="777240" cy="777240"/>
           </a:xfrm>
           <a:prstGeom prst="roundRect">
             <a:avLst>
-              <a:gd name="adj" fmla="val 20000"/>
+              <a:gd name="adj" fmla="val 18824"/>
             </a:avLst>
           </a:prstGeom>
           <a:solidFill>
-            <a:srgbClr val="F4EEE3"/>
+            <a:srgbClr val="EBE7F4"/>
           </a:solidFill>
           <a:ln w="12700">
             <a:solidFill>
-              <a:srgbClr val="F4EEE3"/>
+              <a:srgbClr val="EBE7F4"/>
             </a:solidFill>
             <a:prstDash val="solid"/>
           </a:ln>
@@ -9020,8 +8260,8 @@
         </p:nvSpPr>
         <p:spPr>
           <a:xfrm>
-            <a:off x="8354568" y="4892040"/>
-            <a:ext cx="3057144" cy="365760"/>
+            <a:off x="8382000" y="5029200"/>
+            <a:ext cx="3002280" cy="384048"/>
           </a:xfrm>
           <a:prstGeom prst="rect">
             <a:avLst/>
@@ -9045,7 +8285,7 @@
                 <a:ea typeface="Arial" pitchFamily="34" charset="-122"/>
                 <a:cs typeface="Arial" pitchFamily="34" charset="-120"/>
               </a:rPr>
-              <a:t>شعار متجهي SVG</a:t>
+              <a:t>IBM Plex Sans Arabic</a:t>
             </a:r>
             <a:endParaRPr lang="ar-SA" sz="1600" dirty="0"/>
           </a:p>
@@ -9059,8 +8299,8 @@
         </p:nvSpPr>
         <p:spPr>
           <a:xfrm>
-            <a:off x="8354568" y="5257800"/>
-            <a:ext cx="3057144" cy="457200"/>
+            <a:off x="8382000" y="5422392"/>
+            <a:ext cx="3002280" cy="384048"/>
           </a:xfrm>
           <a:prstGeom prst="rect">
             <a:avLst/>
@@ -9084,7 +8324,7 @@
                 <a:ea typeface="Arial" pitchFamily="34" charset="-122"/>
                 <a:cs typeface="Arial" pitchFamily="34" charset="-120"/>
               </a:rPr>
-              <a:t>أُعيد رسم شعار شمال بجودة غير محدودة</a:t>
+              <a:t>خط عربي من Google Fonts مقروء على الجوال</a:t>
             </a:r>
             <a:endParaRPr lang="ar-SA" sz="1100" dirty="0"/>
           </a:p>
@@ -9098,12 +8338,12 @@
         </p:nvSpPr>
         <p:spPr>
           <a:xfrm>
-            <a:off x="4337304" y="3840480"/>
-            <a:ext cx="3514344" cy="1920240"/>
+            <a:off x="4337304" y="3886200"/>
+            <a:ext cx="3514344" cy="1965960"/>
           </a:xfrm>
           <a:prstGeom prst="roundRect">
             <a:avLst>
-              <a:gd name="adj" fmla="val 8571"/>
+              <a:gd name="adj" fmla="val 8372"/>
             </a:avLst>
           </a:prstGeom>
           <a:solidFill>
@@ -9132,20 +8372,20 @@
         </p:nvSpPr>
         <p:spPr>
           <a:xfrm>
-            <a:off x="6891528" y="4069080"/>
-            <a:ext cx="731520" cy="731520"/>
+            <a:off x="6818376" y="4142232"/>
+            <a:ext cx="777240" cy="777240"/>
           </a:xfrm>
           <a:prstGeom prst="roundRect">
             <a:avLst>
-              <a:gd name="adj" fmla="val 20000"/>
+              <a:gd name="adj" fmla="val 18824"/>
             </a:avLst>
           </a:prstGeom>
           <a:solidFill>
-            <a:srgbClr val="E3F0EF"/>
+            <a:srgbClr val="F4EEE3"/>
           </a:solidFill>
           <a:ln w="12700">
             <a:solidFill>
-              <a:srgbClr val="E3F0EF"/>
+              <a:srgbClr val="F4EEE3"/>
             </a:solidFill>
             <a:prstDash val="solid"/>
           </a:ln>
@@ -9159,8 +8399,8 @@
         </p:nvSpPr>
         <p:spPr>
           <a:xfrm>
-            <a:off x="4565904" y="4892040"/>
-            <a:ext cx="3057144" cy="365760"/>
+            <a:off x="4593336" y="5029200"/>
+            <a:ext cx="3002280" cy="384048"/>
           </a:xfrm>
           <a:prstGeom prst="rect">
             <a:avLst/>
@@ -9184,7 +8424,7 @@
                 <a:ea typeface="Arial" pitchFamily="34" charset="-122"/>
                 <a:cs typeface="Arial" pitchFamily="34" charset="-120"/>
               </a:rPr>
-              <a:t>Git · GitHub</a:t>
+              <a:t>شعار SVG متجهي</a:t>
             </a:r>
             <a:endParaRPr lang="ar-SA" sz="1600" dirty="0"/>
           </a:p>
@@ -9198,8 +8438,8 @@
         </p:nvSpPr>
         <p:spPr>
           <a:xfrm>
-            <a:off x="4565904" y="5257800"/>
-            <a:ext cx="3057144" cy="457200"/>
+            <a:off x="4593336" y="5422392"/>
+            <a:ext cx="3002280" cy="384048"/>
           </a:xfrm>
           <a:prstGeom prst="rect">
             <a:avLst/>
@@ -9223,7 +8463,7 @@
                 <a:ea typeface="Arial" pitchFamily="34" charset="-122"/>
                 <a:cs typeface="Arial" pitchFamily="34" charset="-120"/>
               </a:rPr>
-              <a:t>حفظ الكود وتتبع كل تعديل</a:t>
+              <a:t>أُعيد رسم الشعار كمتجه بجودة غير محدودة</a:t>
             </a:r>
             <a:endParaRPr lang="ar-SA" sz="1100" dirty="0"/>
           </a:p>
@@ -9237,12 +8477,12 @@
         </p:nvSpPr>
         <p:spPr>
           <a:xfrm>
-            <a:off x="548640" y="3840480"/>
-            <a:ext cx="3514344" cy="1920240"/>
+            <a:off x="548640" y="3886200"/>
+            <a:ext cx="3514344" cy="1965960"/>
           </a:xfrm>
           <a:prstGeom prst="roundRect">
             <a:avLst>
-              <a:gd name="adj" fmla="val 8571"/>
+              <a:gd name="adj" fmla="val 8372"/>
             </a:avLst>
           </a:prstGeom>
           <a:solidFill>
@@ -9271,20 +8511,20 @@
         </p:nvSpPr>
         <p:spPr>
           <a:xfrm>
-            <a:off x="3102864" y="4069080"/>
-            <a:ext cx="731520" cy="731520"/>
+            <a:off x="3029712" y="4142232"/>
+            <a:ext cx="777240" cy="777240"/>
           </a:xfrm>
           <a:prstGeom prst="roundRect">
             <a:avLst>
-              <a:gd name="adj" fmla="val 20000"/>
+              <a:gd name="adj" fmla="val 18824"/>
             </a:avLst>
           </a:prstGeom>
           <a:solidFill>
-            <a:srgbClr val="E4F0EA"/>
+            <a:srgbClr val="E3F0EF"/>
           </a:solidFill>
           <a:ln w="12700">
             <a:solidFill>
-              <a:srgbClr val="E4F0EA"/>
+              <a:srgbClr val="E3F0EF"/>
             </a:solidFill>
             <a:prstDash val="solid"/>
           </a:ln>
@@ -9298,8 +8538,8 @@
         </p:nvSpPr>
         <p:spPr>
           <a:xfrm>
-            <a:off x="777240" y="4892040"/>
-            <a:ext cx="3057144" cy="365760"/>
+            <a:off x="804672" y="5029200"/>
+            <a:ext cx="3002280" cy="384048"/>
           </a:xfrm>
           <a:prstGeom prst="rect">
             <a:avLst/>
@@ -9323,7 +8563,7 @@
                 <a:ea typeface="Arial" pitchFamily="34" charset="-122"/>
                 <a:cs typeface="Arial" pitchFamily="34" charset="-120"/>
               </a:rPr>
-              <a:t>اختبارات آلية</a:t>
+              <a:t>npm test</a:t>
             </a:r>
             <a:endParaRPr lang="ar-SA" sz="1600" dirty="0"/>
           </a:p>
@@ -9337,8 +8577,8 @@
         </p:nvSpPr>
         <p:spPr>
           <a:xfrm>
-            <a:off x="777240" y="5257800"/>
-            <a:ext cx="3057144" cy="457200"/>
+            <a:off x="804672" y="5422392"/>
+            <a:ext cx="3002280" cy="384048"/>
           </a:xfrm>
           <a:prstGeom prst="rect">
             <a:avLst/>
@@ -9362,7 +8602,7 @@
                 <a:ea typeface="Arial" pitchFamily="34" charset="-122"/>
                 <a:cs typeface="Arial" pitchFamily="34" charset="-120"/>
               </a:rPr>
-              <a:t>30 اختباراً لمحرك الرحلة وفحص سلامة قاعدة المعرفة</a:t>
+              <a:t>اختبارات المحرك وفحص القاعدة قبل كل نشر</a:t>
             </a:r>
             <a:endParaRPr lang="ar-SA" sz="1100" dirty="0"/>
           </a:p>
@@ -9376,7 +8616,7 @@
         </p:nvSpPr>
         <p:spPr>
           <a:xfrm>
-            <a:off x="548640" y="6355080"/>
+            <a:off x="548640" y="6382512"/>
             <a:ext cx="3657600" cy="274320"/>
           </a:xfrm>
           <a:prstGeom prst="rect">
@@ -9415,7 +8655,7 @@
         </p:nvSpPr>
         <p:spPr>
           <a:xfrm>
-            <a:off x="7068312" y="6355080"/>
+            <a:off x="7068312" y="6382512"/>
             <a:ext cx="4572000" cy="274320"/>
           </a:xfrm>
           <a:prstGeom prst="rect">
@@ -9440,7 +8680,7 @@
                 <a:ea typeface="Arial" pitchFamily="34" charset="-122"/>
                 <a:cs typeface="Arial" pitchFamily="34" charset="-120"/>
               </a:rPr>
-              <a:t>شمال AI · ENBTHON 2026 · 8</a:t>
+              <a:t>شمال AI · التقنية · 8</a:t>
             </a:r>
             <a:endParaRPr lang="ar-SA" sz="1000" dirty="0"/>
           </a:p>
@@ -9550,7 +8790,7 @@
                 <a:ea typeface="Arial" pitchFamily="34" charset="-122"/>
                 <a:cs typeface="Arial" pitchFamily="34" charset="-120"/>
               </a:rPr>
-              <a:t>قرارات عملية لهاكاثون قصير ومنتج قابل للتوسع</a:t>
+              <a:t>قرارات هندسية لهاكاثون قصير ومنتج قابل للتوسع</a:t>
             </a:r>
             <a:endParaRPr lang="ar-SA" sz="1400" dirty="0"/>
           </a:p>
@@ -9565,11 +8805,11 @@
         <p:spPr>
           <a:xfrm>
             <a:off x="6231636" y="1600200"/>
-            <a:ext cx="5408676" cy="1143000"/>
+            <a:ext cx="5408676" cy="1188720"/>
           </a:xfrm>
           <a:prstGeom prst="roundRect">
             <a:avLst>
-              <a:gd name="adj" fmla="val 14400"/>
+              <a:gd name="adj" fmla="val 13846"/>
             </a:avLst>
           </a:prstGeom>
           <a:solidFill>
@@ -9598,7 +8838,7 @@
         </p:nvSpPr>
         <p:spPr>
           <a:xfrm>
-            <a:off x="6505956" y="1783080"/>
+            <a:off x="6505956" y="1801368"/>
             <a:ext cx="4860036" cy="411480"/>
           </a:xfrm>
           <a:prstGeom prst="rect">
@@ -9623,7 +8863,7 @@
                 <a:ea typeface="Arial" pitchFamily="34" charset="-122"/>
                 <a:cs typeface="Arial" pitchFamily="34" charset="-120"/>
               </a:rPr>
-              <a:t>⚡ سرعة البناء</a:t>
+              <a:t>⚡ سرعة</a:t>
             </a:r>
             <a:endParaRPr lang="ar-SA" sz="1600" dirty="0"/>
           </a:p>
@@ -9637,7 +8877,7 @@
         </p:nvSpPr>
         <p:spPr>
           <a:xfrm>
-            <a:off x="6505956" y="2221992"/>
+            <a:off x="6505956" y="2258568"/>
             <a:ext cx="4860036" cy="457200"/>
           </a:xfrm>
           <a:prstGeom prst="rect">
@@ -9662,7 +8902,7 @@
                 <a:ea typeface="Arial" pitchFamily="34" charset="-122"/>
                 <a:cs typeface="Arial" pitchFamily="34" charset="-120"/>
               </a:rPr>
-              <a:t>من الفكرة إلى رابط حي في أيام</a:t>
+              <a:t>من الفكرة إلى رابط حي في أيام، ونشر التحديث في أقل من دقيقة</a:t>
             </a:r>
             <a:endParaRPr lang="ar-SA" sz="1200" dirty="0"/>
           </a:p>
@@ -9677,11 +8917,11 @@
         <p:spPr>
           <a:xfrm>
             <a:off x="548640" y="1600200"/>
-            <a:ext cx="5408676" cy="1143000"/>
+            <a:ext cx="5408676" cy="1188720"/>
           </a:xfrm>
           <a:prstGeom prst="roundRect">
             <a:avLst>
-              <a:gd name="adj" fmla="val 14400"/>
+              <a:gd name="adj" fmla="val 13846"/>
             </a:avLst>
           </a:prstGeom>
           <a:solidFill>
@@ -9710,7 +8950,7 @@
         </p:nvSpPr>
         <p:spPr>
           <a:xfrm>
-            <a:off x="822960" y="1783080"/>
+            <a:off x="822960" y="1801368"/>
             <a:ext cx="4860036" cy="411480"/>
           </a:xfrm>
           <a:prstGeom prst="rect">
@@ -9749,7 +8989,7 @@
         </p:nvSpPr>
         <p:spPr>
           <a:xfrm>
-            <a:off x="822960" y="2221992"/>
+            <a:off x="822960" y="2258568"/>
             <a:ext cx="4860036" cy="457200"/>
           </a:xfrm>
           <a:prstGeom prst="rect">
@@ -9774,7 +9014,7 @@
                 <a:ea typeface="Arial" pitchFamily="34" charset="-122"/>
                 <a:cs typeface="Arial" pitchFamily="34" charset="-120"/>
               </a:rPr>
-              <a:t>كل الأدوات مجانية أو بخطط مجانية</a:t>
+              <a:t>كل الأدوات مجانية أو ضمن خطط مجانية، بلا بطاقة ولا اشتراك</a:t>
             </a:r>
             <a:endParaRPr lang="ar-SA" sz="1200" dirty="0"/>
           </a:p>
@@ -9788,12 +9028,12 @@
         </p:nvSpPr>
         <p:spPr>
           <a:xfrm>
-            <a:off x="6231636" y="2944368"/>
-            <a:ext cx="5408676" cy="1143000"/>
+            <a:off x="6231636" y="2990088"/>
+            <a:ext cx="5408676" cy="1188720"/>
           </a:xfrm>
           <a:prstGeom prst="roundRect">
             <a:avLst>
-              <a:gd name="adj" fmla="val 14400"/>
+              <a:gd name="adj" fmla="val 13846"/>
             </a:avLst>
           </a:prstGeom>
           <a:solidFill>
@@ -9822,7 +9062,7 @@
         </p:nvSpPr>
         <p:spPr>
           <a:xfrm>
-            <a:off x="6505956" y="3127248"/>
+            <a:off x="6505956" y="3191256"/>
             <a:ext cx="4860036" cy="411480"/>
           </a:xfrm>
           <a:prstGeom prst="rect">
@@ -9847,7 +9087,7 @@
                 <a:ea typeface="Arial" pitchFamily="34" charset="-122"/>
                 <a:cs typeface="Arial" pitchFamily="34" charset="-120"/>
               </a:rPr>
-              <a:t>📈 سهولة التوسع</a:t>
+              <a:t>📈 توسع بملف واحد</a:t>
             </a:r>
             <a:endParaRPr lang="ar-SA" sz="1600" dirty="0"/>
           </a:p>
@@ -9861,7 +9101,7 @@
         </p:nvSpPr>
         <p:spPr>
           <a:xfrm>
-            <a:off x="6505956" y="3566160"/>
+            <a:off x="6505956" y="3648456"/>
             <a:ext cx="4860036" cy="457200"/>
           </a:xfrm>
           <a:prstGeom prst="rect">
@@ -9886,7 +9126,7 @@
                 <a:ea typeface="Arial" pitchFamily="34" charset="-122"/>
                 <a:cs typeface="Arial" pitchFamily="34" charset="-120"/>
               </a:rPr>
-              <a:t>إضافة خدمة جديدة = ملف بيانات واحد</a:t>
+              <a:t>إضافة خدمة حكومية جديدة = كائن بيانات، بلا تعديل على المحرك أو الواجهة</a:t>
             </a:r>
             <a:endParaRPr lang="ar-SA" sz="1200" dirty="0"/>
           </a:p>
@@ -9900,12 +9140,12 @@
         </p:nvSpPr>
         <p:spPr>
           <a:xfrm>
-            <a:off x="548640" y="2944368"/>
-            <a:ext cx="5408676" cy="1143000"/>
+            <a:off x="548640" y="2990088"/>
+            <a:ext cx="5408676" cy="1188720"/>
           </a:xfrm>
           <a:prstGeom prst="roundRect">
             <a:avLst>
-              <a:gd name="adj" fmla="val 14400"/>
+              <a:gd name="adj" fmla="val 13846"/>
             </a:avLst>
           </a:prstGeom>
           <a:solidFill>
@@ -9934,7 +9174,7 @@
         </p:nvSpPr>
         <p:spPr>
           <a:xfrm>
-            <a:off x="822960" y="3127248"/>
+            <a:off x="822960" y="3191256"/>
             <a:ext cx="4860036" cy="411480"/>
           </a:xfrm>
           <a:prstGeom prst="rect">
@@ -9959,7 +9199,7 @@
                 <a:ea typeface="Arial" pitchFamily="34" charset="-122"/>
                 <a:cs typeface="Arial" pitchFamily="34" charset="-120"/>
               </a:rPr>
-              <a:t>🔐 الأمان</a:t>
+              <a:t>🔐 أمان بالأساس</a:t>
             </a:r>
             <a:endParaRPr lang="ar-SA" sz="1600" dirty="0"/>
           </a:p>
@@ -9973,7 +9213,7 @@
         </p:nvSpPr>
         <p:spPr>
           <a:xfrm>
-            <a:off x="822960" y="3566160"/>
+            <a:off x="822960" y="3648456"/>
             <a:ext cx="4860036" cy="457200"/>
           </a:xfrm>
           <a:prstGeom prst="rect">
@@ -9998,7 +9238,7 @@
                 <a:ea typeface="Arial" pitchFamily="34" charset="-122"/>
                 <a:cs typeface="Arial" pitchFamily="34" charset="-120"/>
               </a:rPr>
-              <a:t>تشفير كلمات المرور وجلسات موقّعة وبيانات معزولة لكل مستخدم</a:t>
+              <a:t>تجزئة كلمات المرور، جلسات موقّعة، وعزل بيانات كل مستخدم في كل استعلام</a:t>
             </a:r>
             <a:endParaRPr lang="ar-SA" sz="1200" dirty="0"/>
           </a:p>
@@ -10012,12 +9252,12 @@
         </p:nvSpPr>
         <p:spPr>
           <a:xfrm>
-            <a:off x="6231636" y="4288536"/>
-            <a:ext cx="5408676" cy="1143000"/>
+            <a:off x="6231636" y="4379976"/>
+            <a:ext cx="5408676" cy="1188720"/>
           </a:xfrm>
           <a:prstGeom prst="roundRect">
             <a:avLst>
-              <a:gd name="adj" fmla="val 14400"/>
+              <a:gd name="adj" fmla="val 13846"/>
             </a:avLst>
           </a:prstGeom>
           <a:solidFill>
@@ -10046,7 +9286,7 @@
         </p:nvSpPr>
         <p:spPr>
           <a:xfrm>
-            <a:off x="6505956" y="4471416"/>
+            <a:off x="6505956" y="4581144"/>
             <a:ext cx="4860036" cy="411480"/>
           </a:xfrm>
           <a:prstGeom prst="rect">
@@ -10071,7 +9311,7 @@
                 <a:ea typeface="Arial" pitchFamily="34" charset="-122"/>
                 <a:cs typeface="Arial" pitchFamily="34" charset="-120"/>
               </a:rPr>
-              <a:t>🏛️ القنوات الرسمية</a:t>
+              <a:t>🛟 يعمل بلا إنترنت خارجي</a:t>
             </a:r>
             <a:endParaRPr lang="ar-SA" sz="1600" dirty="0"/>
           </a:p>
@@ -10085,7 +9325,7 @@
         </p:nvSpPr>
         <p:spPr>
           <a:xfrm>
-            <a:off x="6505956" y="4910328"/>
+            <a:off x="6505956" y="5038344"/>
             <a:ext cx="4860036" cy="457200"/>
           </a:xfrm>
           <a:prstGeom prst="rect">
@@ -10110,7 +9350,7 @@
                 <a:ea typeface="Arial" pitchFamily="34" charset="-122"/>
                 <a:cs typeface="Arial" pitchFamily="34" charset="-120"/>
               </a:rPr>
-              <a:t>طبقة ذكية فوق الخدمات القائمة بدل بناء بوابة جديدة</a:t>
+              <a:t>لا اعتماد إلزامي على أي خدمة ذكاء اصطناعي أثناء العرض</a:t>
             </a:r>
             <a:endParaRPr lang="ar-SA" sz="1200" dirty="0"/>
           </a:p>
@@ -10124,12 +9364,12 @@
         </p:nvSpPr>
         <p:spPr>
           <a:xfrm>
-            <a:off x="548640" y="4288536"/>
-            <a:ext cx="5408676" cy="1143000"/>
+            <a:off x="548640" y="4379976"/>
+            <a:ext cx="5408676" cy="1188720"/>
           </a:xfrm>
           <a:prstGeom prst="roundRect">
             <a:avLst>
-              <a:gd name="adj" fmla="val 14400"/>
+              <a:gd name="adj" fmla="val 13846"/>
             </a:avLst>
           </a:prstGeom>
           <a:solidFill>
@@ -10151,7 +9391,7 @@
         </p:nvSpPr>
         <p:spPr>
           <a:xfrm>
-            <a:off x="822960" y="4471416"/>
+            <a:off x="822960" y="4608576"/>
             <a:ext cx="4860036" cy="457200"/>
           </a:xfrm>
           <a:prstGeom prst="rect">
@@ -10190,7 +9430,7 @@
         </p:nvSpPr>
         <p:spPr>
           <a:xfrm>
-            <a:off x="822960" y="4946904"/>
+            <a:off x="822960" y="5065776"/>
             <a:ext cx="4860036" cy="365760"/>
           </a:xfrm>
           <a:prstGeom prst="rect">
@@ -10229,7 +9469,7 @@
         </p:nvSpPr>
         <p:spPr>
           <a:xfrm>
-            <a:off x="548640" y="6355080"/>
+            <a:off x="548640" y="6382512"/>
             <a:ext cx="3657600" cy="274320"/>
           </a:xfrm>
           <a:prstGeom prst="rect">
@@ -10268,7 +9508,7 @@
         </p:nvSpPr>
         <p:spPr>
           <a:xfrm>
-            <a:off x="7068312" y="6355080"/>
+            <a:off x="7068312" y="6382512"/>
             <a:ext cx="4572000" cy="274320"/>
           </a:xfrm>
           <a:prstGeom prst="rect">
@@ -10293,7 +9533,7 @@
                 <a:ea typeface="Arial" pitchFamily="34" charset="-122"/>
                 <a:cs typeface="Arial" pitchFamily="34" charset="-120"/>
               </a:rPr>
-              <a:t>شمال AI · ENBTHON 2026 · 9</a:t>
+              <a:t>شمال AI · التقنية · 9</a:t>
             </a:r>
             <a:endParaRPr lang="ar-SA" sz="1000" dirty="0"/>
           </a:p>
